--- a/slides.pptx
+++ b/slides.pptx
@@ -1,35 +1,137 @@
 
 <file path=ppt/presentation.xml><?xml version="1.0" encoding="utf-8"?>
-<p:presentation xmlns:a="http://schemas.openxmlformats.org/drawingml/2006/main" xmlns:p="http://schemas.openxmlformats.org/presentationml/2006/main" xmlns:r="http://schemas.openxmlformats.org/officeDocument/2006/relationships" xmlns:p14="http://schemas.microsoft.com/office/powerpoint/2010/main" xmlns:p15="http://schemas.microsoft.com/office/powerpoint/2012/main" xmlns:mc="http://schemas.openxmlformats.org/markup-compatibility/2006">
+<p:presentation xmlns:a="http://schemas.openxmlformats.org/drawingml/2006/main" xmlns:r="http://schemas.openxmlformats.org/officeDocument/2006/relationships" xmlns:p="http://schemas.openxmlformats.org/presentationml/2006/main">
   <p:sldMasterIdLst>
-    <p:sldMasterId id="2147483648" r:id="rId2"/>
+    <p:sldMasterId id="2147483648" r:id="rId1"/>
   </p:sldMasterIdLst>
   <p:sldIdLst>
-    <p:sldId id="256" r:id="rId3"/>
-    <p:sldId id="257" r:id="rId4"/>
-    <p:sldId id="258" r:id="rId5"/>
-    <p:sldId id="259" r:id="rId6"/>
-    <p:sldId id="260" r:id="rId7"/>
-    <p:sldId id="261" r:id="rId8"/>
-    <p:sldId id="262" r:id="rId9"/>
-    <p:sldId id="263" r:id="rId10"/>
-    <p:sldId id="264" r:id="rId11"/>
-    <p:sldId id="265" r:id="rId12"/>
-    <p:sldId id="266" r:id="rId13"/>
+    <p:sldId id="256" r:id="rId2"/>
+    <p:sldId id="257" r:id="rId3"/>
+    <p:sldId id="258" r:id="rId4"/>
+    <p:sldId id="259" r:id="rId5"/>
+    <p:sldId id="260" r:id="rId6"/>
+    <p:sldId id="261" r:id="rId7"/>
+    <p:sldId id="262" r:id="rId8"/>
+    <p:sldId id="263" r:id="rId9"/>
+    <p:sldId id="264" r:id="rId10"/>
+    <p:sldId id="265" r:id="rId11"/>
+    <p:sldId id="266" r:id="rId12"/>
+    <p:sldId id="267" r:id="rId13"/>
   </p:sldIdLst>
   <p:sldSz cx="12192000" cy="6858000"/>
   <p:notesSz cx="7559675" cy="10691813"/>
+  <p:defaultTextStyle>
+    <a:defPPr>
+      <a:defRPr lang="en-US"/>
+    </a:defPPr>
+    <a:lvl1pPr marL="0" algn="l" defTabSz="914400" rtl="0" eaLnBrk="1" latinLnBrk="0" hangingPunct="1">
+      <a:defRPr sz="1800" kern="1200">
+        <a:solidFill>
+          <a:schemeClr val="tx1"/>
+        </a:solidFill>
+        <a:latin typeface="+mn-lt"/>
+        <a:ea typeface="+mn-ea"/>
+        <a:cs typeface="+mn-cs"/>
+      </a:defRPr>
+    </a:lvl1pPr>
+    <a:lvl2pPr marL="457200" algn="l" defTabSz="914400" rtl="0" eaLnBrk="1" latinLnBrk="0" hangingPunct="1">
+      <a:defRPr sz="1800" kern="1200">
+        <a:solidFill>
+          <a:schemeClr val="tx1"/>
+        </a:solidFill>
+        <a:latin typeface="+mn-lt"/>
+        <a:ea typeface="+mn-ea"/>
+        <a:cs typeface="+mn-cs"/>
+      </a:defRPr>
+    </a:lvl2pPr>
+    <a:lvl3pPr marL="914400" algn="l" defTabSz="914400" rtl="0" eaLnBrk="1" latinLnBrk="0" hangingPunct="1">
+      <a:defRPr sz="1800" kern="1200">
+        <a:solidFill>
+          <a:schemeClr val="tx1"/>
+        </a:solidFill>
+        <a:latin typeface="+mn-lt"/>
+        <a:ea typeface="+mn-ea"/>
+        <a:cs typeface="+mn-cs"/>
+      </a:defRPr>
+    </a:lvl3pPr>
+    <a:lvl4pPr marL="1371600" algn="l" defTabSz="914400" rtl="0" eaLnBrk="1" latinLnBrk="0" hangingPunct="1">
+      <a:defRPr sz="1800" kern="1200">
+        <a:solidFill>
+          <a:schemeClr val="tx1"/>
+        </a:solidFill>
+        <a:latin typeface="+mn-lt"/>
+        <a:ea typeface="+mn-ea"/>
+        <a:cs typeface="+mn-cs"/>
+      </a:defRPr>
+    </a:lvl4pPr>
+    <a:lvl5pPr marL="1828800" algn="l" defTabSz="914400" rtl="0" eaLnBrk="1" latinLnBrk="0" hangingPunct="1">
+      <a:defRPr sz="1800" kern="1200">
+        <a:solidFill>
+          <a:schemeClr val="tx1"/>
+        </a:solidFill>
+        <a:latin typeface="+mn-lt"/>
+        <a:ea typeface="+mn-ea"/>
+        <a:cs typeface="+mn-cs"/>
+      </a:defRPr>
+    </a:lvl5pPr>
+    <a:lvl6pPr marL="2286000" algn="l" defTabSz="914400" rtl="0" eaLnBrk="1" latinLnBrk="0" hangingPunct="1">
+      <a:defRPr sz="1800" kern="1200">
+        <a:solidFill>
+          <a:schemeClr val="tx1"/>
+        </a:solidFill>
+        <a:latin typeface="+mn-lt"/>
+        <a:ea typeface="+mn-ea"/>
+        <a:cs typeface="+mn-cs"/>
+      </a:defRPr>
+    </a:lvl6pPr>
+    <a:lvl7pPr marL="2743200" algn="l" defTabSz="914400" rtl="0" eaLnBrk="1" latinLnBrk="0" hangingPunct="1">
+      <a:defRPr sz="1800" kern="1200">
+        <a:solidFill>
+          <a:schemeClr val="tx1"/>
+        </a:solidFill>
+        <a:latin typeface="+mn-lt"/>
+        <a:ea typeface="+mn-ea"/>
+        <a:cs typeface="+mn-cs"/>
+      </a:defRPr>
+    </a:lvl7pPr>
+    <a:lvl8pPr marL="3200400" algn="l" defTabSz="914400" rtl="0" eaLnBrk="1" latinLnBrk="0" hangingPunct="1">
+      <a:defRPr sz="1800" kern="1200">
+        <a:solidFill>
+          <a:schemeClr val="tx1"/>
+        </a:solidFill>
+        <a:latin typeface="+mn-lt"/>
+        <a:ea typeface="+mn-ea"/>
+        <a:cs typeface="+mn-cs"/>
+      </a:defRPr>
+    </a:lvl8pPr>
+    <a:lvl9pPr marL="3657600" algn="l" defTabSz="914400" rtl="0" eaLnBrk="1" latinLnBrk="0" hangingPunct="1">
+      <a:defRPr sz="1800" kern="1200">
+        <a:solidFill>
+          <a:schemeClr val="tx1"/>
+        </a:solidFill>
+        <a:latin typeface="+mn-lt"/>
+        <a:ea typeface="+mn-ea"/>
+        <a:cs typeface="+mn-cs"/>
+      </a:defRPr>
+    </a:lvl9pPr>
+  </p:defaultTextStyle>
+  <p:extLst>
+    <p:ext uri="{EFAFB233-063F-42B5-8137-9DF3F51BA10A}">
+      <p15:sldGuideLst xmlns:p15="http://schemas.microsoft.com/office/powerpoint/2012/main"/>
+    </p:ext>
+  </p:extLst>
 </p:presentation>
 </file>
 
 <file path=ppt/slideLayouts/slideLayout1.xml><?xml version="1.0" encoding="utf-8"?>
-<p:sldLayout xmlns:a="http://schemas.openxmlformats.org/drawingml/2006/main" xmlns:p="http://schemas.openxmlformats.org/presentationml/2006/main" xmlns:r="http://schemas.openxmlformats.org/officeDocument/2006/relationships" xmlns:p14="http://schemas.microsoft.com/office/powerpoint/2010/main" xmlns:p15="http://schemas.microsoft.com/office/powerpoint/2012/main" xmlns:mc="http://schemas.openxmlformats.org/markup-compatibility/2006" type="title" preserve="1">
+<p:sldLayout xmlns:a="http://schemas.openxmlformats.org/drawingml/2006/main" xmlns:r="http://schemas.openxmlformats.org/officeDocument/2006/relationships" xmlns:p="http://schemas.openxmlformats.org/presentationml/2006/main" type="title" preserve="1">
   <p:cSld name="Title Slide">
     <p:bg>
       <p:bgPr>
         <a:solidFill>
-          <a:srgbClr val="ffffff"/>
+          <a:srgbClr val="FFFFFF"/>
         </a:solidFill>
+        <a:effectLst/>
       </p:bgPr>
     </p:bg>
     <p:spTree>
@@ -70,9 +172,10 @@
           </a:ln>
         </p:spPr>
         <p:txBody>
-          <a:bodyPr lIns="91440" rIns="91440" tIns="45720" bIns="45720" anchor="ctr">
+          <a:bodyPr lIns="91440" tIns="45720" rIns="91440" bIns="45720" anchor="ctr">
             <a:noAutofit/>
           </a:bodyPr>
+          <a:lstStyle/>
           <a:p>
             <a:pPr indent="0" algn="ctr" defTabSz="457200">
               <a:lnSpc>
@@ -91,14 +194,6 @@
               </a:rPr>
               <a:t>Click to edit Master title style</a:t>
             </a:r>
-            <a:endParaRPr lang="en-US" sz="4400" b="0" u="none" strike="noStrike">
-              <a:solidFill>
-                <a:schemeClr val="dk1"/>
-              </a:solidFill>
-              <a:effectLst/>
-              <a:uFillTx/>
-              <a:latin typeface="Calibri"/>
-            </a:endParaRPr>
           </a:p>
         </p:txBody>
       </p:sp>
@@ -126,7 +221,7 @@
           </a:ln>
         </p:spPr>
         <p:txBody>
-          <a:bodyPr lIns="91440" rIns="91440" tIns="45720" bIns="45720" anchor="ctr">
+          <a:bodyPr lIns="91440" tIns="45720" rIns="91440" bIns="45720" anchor="ctr">
             <a:noAutofit/>
           </a:bodyPr>
           <a:lstStyle>
@@ -202,7 +297,7 @@
           </a:ln>
         </p:spPr>
         <p:txBody>
-          <a:bodyPr lIns="91440" rIns="91440" tIns="45720" bIns="45720" anchor="ctr">
+          <a:bodyPr lIns="91440" tIns="45720" rIns="91440" bIns="45720" anchor="ctr">
             <a:noAutofit/>
           </a:bodyPr>
           <a:lstStyle>
@@ -233,14 +328,6 @@
               </a:rPr>
               <a:t>&lt;footer&gt;</a:t>
             </a:r>
-            <a:endParaRPr lang="en-IN" sz="1400" b="0" u="none" strike="noStrike">
-              <a:solidFill>
-                <a:srgbClr val="000000"/>
-              </a:solidFill>
-              <a:effectLst/>
-              <a:uFillTx/>
-              <a:latin typeface="Times New Roman"/>
-            </a:endParaRPr>
           </a:p>
         </p:txBody>
       </p:sp>
@@ -268,7 +355,7 @@
           </a:ln>
         </p:spPr>
         <p:txBody>
-          <a:bodyPr lIns="91440" rIns="91440" tIns="45720" bIns="45720" anchor="ctr">
+          <a:bodyPr lIns="91440" tIns="45720" rIns="91440" bIns="45720" anchor="ctr">
             <a:noAutofit/>
           </a:bodyPr>
           <a:lstStyle>
@@ -307,7 +394,7 @@
                 <a:uFillTx/>
                 <a:latin typeface="Calibri"/>
               </a:rPr>
-              <a:t>&lt;number&gt;</a:t>
+              <a:t>‹#›</a:t>
             </a:fld>
             <a:endParaRPr lang="en-IN" sz="1200" b="0" u="none" strike="noStrike">
               <a:solidFill>
@@ -322,17 +409,21 @@
       </p:sp>
     </p:spTree>
   </p:cSld>
+  <p:clrMapOvr>
+    <a:masterClrMapping/>
+  </p:clrMapOvr>
 </p:sldLayout>
 </file>
 
 <file path=ppt/slideLayouts/slideLayout10.xml><?xml version="1.0" encoding="utf-8"?>
-<p:sldLayout xmlns:a="http://schemas.openxmlformats.org/drawingml/2006/main" xmlns:p="http://schemas.openxmlformats.org/presentationml/2006/main" xmlns:r="http://schemas.openxmlformats.org/officeDocument/2006/relationships" xmlns:p14="http://schemas.microsoft.com/office/powerpoint/2010/main" xmlns:p15="http://schemas.microsoft.com/office/powerpoint/2012/main" xmlns:mc="http://schemas.openxmlformats.org/markup-compatibility/2006" type="blank" preserve="1">
+<p:sldLayout xmlns:a="http://schemas.openxmlformats.org/drawingml/2006/main" xmlns:r="http://schemas.openxmlformats.org/officeDocument/2006/relationships" xmlns:p="http://schemas.openxmlformats.org/presentationml/2006/main" type="blank" preserve="1">
   <p:cSld name="Content with Caption">
     <p:bg>
       <p:bgPr>
         <a:solidFill>
-          <a:srgbClr val="ffffff"/>
+          <a:srgbClr val="FFFFFF"/>
         </a:solidFill>
+        <a:effectLst/>
       </p:bgPr>
     </p:bg>
     <p:spTree>
@@ -373,9 +464,10 @@
           </a:ln>
         </p:spPr>
         <p:txBody>
-          <a:bodyPr lIns="91440" rIns="91440" tIns="45720" bIns="45720" anchor="b">
+          <a:bodyPr lIns="91440" tIns="45720" rIns="91440" bIns="45720" anchor="b">
             <a:noAutofit/>
           </a:bodyPr>
+          <a:lstStyle/>
           <a:p>
             <a:pPr indent="0" defTabSz="457200">
               <a:lnSpc>
@@ -429,9 +521,10 @@
           </a:ln>
         </p:spPr>
         <p:txBody>
-          <a:bodyPr lIns="91440" rIns="91440" tIns="45720" bIns="45720" anchor="t">
+          <a:bodyPr lIns="91440" tIns="45720" rIns="91440" bIns="45720" anchor="t">
             <a:noAutofit/>
           </a:bodyPr>
+          <a:lstStyle/>
           <a:p>
             <a:pPr marL="343080" indent="-343080" defTabSz="457200">
               <a:lnSpc>
@@ -457,14 +550,6 @@
               </a:rPr>
               <a:t>Click to edit Master text styles</a:t>
             </a:r>
-            <a:endParaRPr lang="en-US" sz="3200" b="0" u="none" strike="noStrike">
-              <a:solidFill>
-                <a:schemeClr val="dk1"/>
-              </a:solidFill>
-              <a:effectLst/>
-              <a:uFillTx/>
-              <a:latin typeface="Calibri"/>
-            </a:endParaRPr>
           </a:p>
           <a:p>
             <a:pPr marL="743040" lvl="1" indent="-285840" defTabSz="457200">
@@ -491,14 +576,6 @@
               </a:rPr>
               <a:t>Second level</a:t>
             </a:r>
-            <a:endParaRPr lang="en-US" sz="2800" b="0" u="none" strike="noStrike">
-              <a:solidFill>
-                <a:schemeClr val="dk1"/>
-              </a:solidFill>
-              <a:effectLst/>
-              <a:uFillTx/>
-              <a:latin typeface="Calibri"/>
-            </a:endParaRPr>
           </a:p>
           <a:p>
             <a:pPr marL="1143000" lvl="2" indent="-228600" defTabSz="457200">
@@ -525,14 +602,6 @@
               </a:rPr>
               <a:t>Third level</a:t>
             </a:r>
-            <a:endParaRPr lang="en-US" sz="2400" b="0" u="none" strike="noStrike">
-              <a:solidFill>
-                <a:schemeClr val="dk1"/>
-              </a:solidFill>
-              <a:effectLst/>
-              <a:uFillTx/>
-              <a:latin typeface="Calibri"/>
-            </a:endParaRPr>
           </a:p>
           <a:p>
             <a:pPr marL="1600200" lvl="3" indent="-228600" defTabSz="457200">
@@ -559,14 +628,6 @@
               </a:rPr>
               <a:t>Fourth level</a:t>
             </a:r>
-            <a:endParaRPr lang="en-US" sz="2000" b="0" u="none" strike="noStrike">
-              <a:solidFill>
-                <a:schemeClr val="dk1"/>
-              </a:solidFill>
-              <a:effectLst/>
-              <a:uFillTx/>
-              <a:latin typeface="Calibri"/>
-            </a:endParaRPr>
           </a:p>
           <a:p>
             <a:pPr marL="2057400" lvl="4" indent="-228600" defTabSz="457200">
@@ -593,14 +654,6 @@
               </a:rPr>
               <a:t>Fifth level</a:t>
             </a:r>
-            <a:endParaRPr lang="en-US" sz="2000" b="0" u="none" strike="noStrike">
-              <a:solidFill>
-                <a:schemeClr val="dk1"/>
-              </a:solidFill>
-              <a:effectLst/>
-              <a:uFillTx/>
-              <a:latin typeface="Calibri"/>
-            </a:endParaRPr>
           </a:p>
         </p:txBody>
       </p:sp>
@@ -628,9 +681,10 @@
           </a:ln>
         </p:spPr>
         <p:txBody>
-          <a:bodyPr lIns="91440" rIns="91440" tIns="45720" bIns="45720" anchor="t">
+          <a:bodyPr lIns="91440" tIns="45720" rIns="91440" bIns="45720" anchor="t">
             <a:noAutofit/>
           </a:bodyPr>
+          <a:lstStyle/>
           <a:p>
             <a:pPr indent="0" defTabSz="457200">
               <a:lnSpc>
@@ -641,7 +695,7 @@
               </a:spcBef>
               <a:buNone/>
               <a:tabLst>
-                <a:tab algn="l" pos="0"/>
+                <a:tab pos="0" algn="l"/>
               </a:tabLst>
             </a:pPr>
             <a:r>
@@ -655,14 +709,6 @@
               </a:rPr>
               <a:t>Click to edit Master text styles</a:t>
             </a:r>
-            <a:endParaRPr lang="en-US" sz="1400" b="0" u="none" strike="noStrike">
-              <a:solidFill>
-                <a:schemeClr val="dk1"/>
-              </a:solidFill>
-              <a:effectLst/>
-              <a:uFillTx/>
-              <a:latin typeface="Calibri"/>
-            </a:endParaRPr>
           </a:p>
         </p:txBody>
       </p:sp>
@@ -690,7 +736,7 @@
           </a:ln>
         </p:spPr>
         <p:txBody>
-          <a:bodyPr lIns="91440" rIns="91440" tIns="45720" bIns="45720" anchor="ctr">
+          <a:bodyPr lIns="91440" tIns="45720" rIns="91440" bIns="45720" anchor="ctr">
             <a:noAutofit/>
           </a:bodyPr>
           <a:lstStyle>
@@ -766,7 +812,7 @@
           </a:ln>
         </p:spPr>
         <p:txBody>
-          <a:bodyPr lIns="91440" rIns="91440" tIns="45720" bIns="45720" anchor="ctr">
+          <a:bodyPr lIns="91440" tIns="45720" rIns="91440" bIns="45720" anchor="ctr">
             <a:noAutofit/>
           </a:bodyPr>
           <a:lstStyle>
@@ -797,14 +843,6 @@
               </a:rPr>
               <a:t>&lt;footer&gt;</a:t>
             </a:r>
-            <a:endParaRPr lang="en-IN" sz="1400" b="0" u="none" strike="noStrike">
-              <a:solidFill>
-                <a:srgbClr val="000000"/>
-              </a:solidFill>
-              <a:effectLst/>
-              <a:uFillTx/>
-              <a:latin typeface="Times New Roman"/>
-            </a:endParaRPr>
           </a:p>
         </p:txBody>
       </p:sp>
@@ -832,7 +870,7 @@
           </a:ln>
         </p:spPr>
         <p:txBody>
-          <a:bodyPr lIns="91440" rIns="91440" tIns="45720" bIns="45720" anchor="ctr">
+          <a:bodyPr lIns="91440" tIns="45720" rIns="91440" bIns="45720" anchor="ctr">
             <a:noAutofit/>
           </a:bodyPr>
           <a:lstStyle>
@@ -871,7 +909,7 @@
                 <a:uFillTx/>
                 <a:latin typeface="Calibri"/>
               </a:rPr>
-              <a:t>&lt;number&gt;</a:t>
+              <a:t>‹#›</a:t>
             </a:fld>
             <a:endParaRPr lang="en-IN" sz="1200" b="0" u="none" strike="noStrike">
               <a:solidFill>
@@ -886,17 +924,21 @@
       </p:sp>
     </p:spTree>
   </p:cSld>
+  <p:clrMapOvr>
+    <a:masterClrMapping/>
+  </p:clrMapOvr>
 </p:sldLayout>
 </file>
 
 <file path=ppt/slideLayouts/slideLayout11.xml><?xml version="1.0" encoding="utf-8"?>
-<p:sldLayout xmlns:a="http://schemas.openxmlformats.org/drawingml/2006/main" xmlns:p="http://schemas.openxmlformats.org/presentationml/2006/main" xmlns:r="http://schemas.openxmlformats.org/officeDocument/2006/relationships" xmlns:p14="http://schemas.microsoft.com/office/powerpoint/2010/main" xmlns:p15="http://schemas.microsoft.com/office/powerpoint/2012/main" xmlns:mc="http://schemas.openxmlformats.org/markup-compatibility/2006" type="blank" preserve="1">
+<p:sldLayout xmlns:a="http://schemas.openxmlformats.org/drawingml/2006/main" xmlns:r="http://schemas.openxmlformats.org/officeDocument/2006/relationships" xmlns:p="http://schemas.openxmlformats.org/presentationml/2006/main" type="blank" preserve="1">
   <p:cSld name="Picture with Caption">
     <p:bg>
       <p:bgPr>
         <a:solidFill>
-          <a:srgbClr val="ffffff"/>
+          <a:srgbClr val="FFFFFF"/>
         </a:solidFill>
+        <a:effectLst/>
       </p:bgPr>
     </p:bg>
     <p:spTree>
@@ -937,9 +979,10 @@
           </a:ln>
         </p:spPr>
         <p:txBody>
-          <a:bodyPr lIns="91440" rIns="91440" tIns="45720" bIns="45720" anchor="b">
+          <a:bodyPr lIns="91440" tIns="45720" rIns="91440" bIns="45720" anchor="b">
             <a:noAutofit/>
           </a:bodyPr>
+          <a:lstStyle/>
           <a:p>
             <a:pPr indent="0" defTabSz="457200">
               <a:lnSpc>
@@ -993,9 +1036,10 @@
           </a:ln>
         </p:spPr>
         <p:txBody>
-          <a:bodyPr lIns="90000" rIns="90000" tIns="45000" bIns="45000" anchor="t">
+          <a:bodyPr lIns="90000" tIns="45000" rIns="90000" bIns="45000" anchor="t">
             <a:noAutofit/>
           </a:bodyPr>
+          <a:lstStyle/>
           <a:p>
             <a:pPr marL="432000" indent="-324000">
               <a:spcBef>
@@ -1019,14 +1063,6 @@
               </a:rPr>
               <a:t>Click to edit the outline text format</a:t>
             </a:r>
-            <a:endParaRPr lang="en-US" sz="3200" b="0" u="none" strike="noStrike">
-              <a:solidFill>
-                <a:schemeClr val="dk1"/>
-              </a:solidFill>
-              <a:effectLst/>
-              <a:uFillTx/>
-              <a:latin typeface="Calibri"/>
-            </a:endParaRPr>
           </a:p>
           <a:p>
             <a:pPr marL="864000" lvl="1" indent="-324000">
@@ -1051,14 +1087,6 @@
               </a:rPr>
               <a:t>Second Outline Level</a:t>
             </a:r>
-            <a:endParaRPr lang="en-US" sz="3200" b="0" u="none" strike="noStrike">
-              <a:solidFill>
-                <a:schemeClr val="dk1"/>
-              </a:solidFill>
-              <a:effectLst/>
-              <a:uFillTx/>
-              <a:latin typeface="Calibri"/>
-            </a:endParaRPr>
           </a:p>
           <a:p>
             <a:pPr marL="1296000" lvl="2" indent="-288000">
@@ -1083,14 +1111,6 @@
               </a:rPr>
               <a:t>Third Outline Level</a:t>
             </a:r>
-            <a:endParaRPr lang="en-US" sz="3200" b="0" u="none" strike="noStrike">
-              <a:solidFill>
-                <a:schemeClr val="dk1"/>
-              </a:solidFill>
-              <a:effectLst/>
-              <a:uFillTx/>
-              <a:latin typeface="Calibri"/>
-            </a:endParaRPr>
           </a:p>
           <a:p>
             <a:pPr marL="1728000" lvl="3" indent="-216000">
@@ -1115,14 +1135,6 @@
               </a:rPr>
               <a:t>Fourth Outline Level</a:t>
             </a:r>
-            <a:endParaRPr lang="en-US" sz="3200" b="0" u="none" strike="noStrike">
-              <a:solidFill>
-                <a:schemeClr val="dk1"/>
-              </a:solidFill>
-              <a:effectLst/>
-              <a:uFillTx/>
-              <a:latin typeface="Calibri"/>
-            </a:endParaRPr>
           </a:p>
           <a:p>
             <a:pPr marL="2160000" lvl="4" indent="-216000">
@@ -1147,14 +1159,6 @@
               </a:rPr>
               <a:t>Fifth Outline Level</a:t>
             </a:r>
-            <a:endParaRPr lang="en-US" sz="3200" b="0" u="none" strike="noStrike">
-              <a:solidFill>
-                <a:schemeClr val="dk1"/>
-              </a:solidFill>
-              <a:effectLst/>
-              <a:uFillTx/>
-              <a:latin typeface="Calibri"/>
-            </a:endParaRPr>
           </a:p>
           <a:p>
             <a:pPr marL="2592000" lvl="5" indent="-216000">
@@ -1179,14 +1183,6 @@
               </a:rPr>
               <a:t>Sixth Outline Level</a:t>
             </a:r>
-            <a:endParaRPr lang="en-US" sz="3200" b="0" u="none" strike="noStrike">
-              <a:solidFill>
-                <a:schemeClr val="dk1"/>
-              </a:solidFill>
-              <a:effectLst/>
-              <a:uFillTx/>
-              <a:latin typeface="Calibri"/>
-            </a:endParaRPr>
           </a:p>
           <a:p>
             <a:pPr marL="3024000" lvl="6" indent="-216000">
@@ -1211,14 +1207,6 @@
               </a:rPr>
               <a:t>Seventh Outline Level</a:t>
             </a:r>
-            <a:endParaRPr lang="en-US" sz="3200" b="0" u="none" strike="noStrike">
-              <a:solidFill>
-                <a:schemeClr val="dk1"/>
-              </a:solidFill>
-              <a:effectLst/>
-              <a:uFillTx/>
-              <a:latin typeface="Calibri"/>
-            </a:endParaRPr>
           </a:p>
         </p:txBody>
       </p:sp>
@@ -1246,9 +1234,10 @@
           </a:ln>
         </p:spPr>
         <p:txBody>
-          <a:bodyPr lIns="91440" rIns="91440" tIns="45720" bIns="45720" anchor="t">
+          <a:bodyPr lIns="91440" tIns="45720" rIns="91440" bIns="45720" anchor="t">
             <a:noAutofit/>
           </a:bodyPr>
+          <a:lstStyle/>
           <a:p>
             <a:pPr indent="0" defTabSz="457200">
               <a:lnSpc>
@@ -1259,7 +1248,7 @@
               </a:spcBef>
               <a:buNone/>
               <a:tabLst>
-                <a:tab algn="l" pos="0"/>
+                <a:tab pos="0" algn="l"/>
               </a:tabLst>
             </a:pPr>
             <a:r>
@@ -1273,14 +1262,6 @@
               </a:rPr>
               <a:t>Click to edit Master text styles</a:t>
             </a:r>
-            <a:endParaRPr lang="en-US" sz="1400" b="0" u="none" strike="noStrike">
-              <a:solidFill>
-                <a:schemeClr val="dk1"/>
-              </a:solidFill>
-              <a:effectLst/>
-              <a:uFillTx/>
-              <a:latin typeface="Calibri"/>
-            </a:endParaRPr>
           </a:p>
         </p:txBody>
       </p:sp>
@@ -1308,7 +1289,7 @@
           </a:ln>
         </p:spPr>
         <p:txBody>
-          <a:bodyPr lIns="91440" rIns="91440" tIns="45720" bIns="45720" anchor="ctr">
+          <a:bodyPr lIns="91440" tIns="45720" rIns="91440" bIns="45720" anchor="ctr">
             <a:noAutofit/>
           </a:bodyPr>
           <a:lstStyle>
@@ -1384,7 +1365,7 @@
           </a:ln>
         </p:spPr>
         <p:txBody>
-          <a:bodyPr lIns="91440" rIns="91440" tIns="45720" bIns="45720" anchor="ctr">
+          <a:bodyPr lIns="91440" tIns="45720" rIns="91440" bIns="45720" anchor="ctr">
             <a:noAutofit/>
           </a:bodyPr>
           <a:lstStyle>
@@ -1415,14 +1396,6 @@
               </a:rPr>
               <a:t>&lt;footer&gt;</a:t>
             </a:r>
-            <a:endParaRPr lang="en-IN" sz="1400" b="0" u="none" strike="noStrike">
-              <a:solidFill>
-                <a:srgbClr val="000000"/>
-              </a:solidFill>
-              <a:effectLst/>
-              <a:uFillTx/>
-              <a:latin typeface="Times New Roman"/>
-            </a:endParaRPr>
           </a:p>
         </p:txBody>
       </p:sp>
@@ -1450,7 +1423,7 @@
           </a:ln>
         </p:spPr>
         <p:txBody>
-          <a:bodyPr lIns="91440" rIns="91440" tIns="45720" bIns="45720" anchor="ctr">
+          <a:bodyPr lIns="91440" tIns="45720" rIns="91440" bIns="45720" anchor="ctr">
             <a:noAutofit/>
           </a:bodyPr>
           <a:lstStyle>
@@ -1489,7 +1462,7 @@
                 <a:uFillTx/>
                 <a:latin typeface="Calibri"/>
               </a:rPr>
-              <a:t>&lt;number&gt;</a:t>
+              <a:t>‹#›</a:t>
             </a:fld>
             <a:endParaRPr lang="en-IN" sz="1200" b="0" u="none" strike="noStrike">
               <a:solidFill>
@@ -1504,17 +1477,21 @@
       </p:sp>
     </p:spTree>
   </p:cSld>
+  <p:clrMapOvr>
+    <a:masterClrMapping/>
+  </p:clrMapOvr>
 </p:sldLayout>
 </file>
 
 <file path=ppt/slideLayouts/slideLayout2.xml><?xml version="1.0" encoding="utf-8"?>
-<p:sldLayout xmlns:a="http://schemas.openxmlformats.org/drawingml/2006/main" xmlns:p="http://schemas.openxmlformats.org/presentationml/2006/main" xmlns:r="http://schemas.openxmlformats.org/officeDocument/2006/relationships" xmlns:p14="http://schemas.microsoft.com/office/powerpoint/2010/main" xmlns:p15="http://schemas.microsoft.com/office/powerpoint/2012/main" xmlns:mc="http://schemas.openxmlformats.org/markup-compatibility/2006" type="vertTx" preserve="1">
+<p:sldLayout xmlns:a="http://schemas.openxmlformats.org/drawingml/2006/main" xmlns:r="http://schemas.openxmlformats.org/officeDocument/2006/relationships" xmlns:p="http://schemas.openxmlformats.org/presentationml/2006/main" type="vertTx" preserve="1">
   <p:cSld name="Title and Vertical Text">
     <p:bg>
       <p:bgPr>
         <a:solidFill>
-          <a:srgbClr val="ffffff"/>
+          <a:srgbClr val="FFFFFF"/>
         </a:solidFill>
+        <a:effectLst/>
       </p:bgPr>
     </p:bg>
     <p:spTree>
@@ -1555,9 +1532,10 @@
           </a:ln>
         </p:spPr>
         <p:txBody>
-          <a:bodyPr lIns="91440" rIns="91440" tIns="45720" bIns="45720" anchor="ctr">
+          <a:bodyPr lIns="91440" tIns="45720" rIns="91440" bIns="45720" anchor="ctr">
             <a:noAutofit/>
           </a:bodyPr>
+          <a:lstStyle/>
           <a:p>
             <a:pPr indent="0" algn="ctr" defTabSz="457200">
               <a:lnSpc>
@@ -1576,14 +1554,6 @@
               </a:rPr>
               <a:t>Click to edit Master title style</a:t>
             </a:r>
-            <a:endParaRPr lang="en-US" sz="4400" b="0" u="none" strike="noStrike">
-              <a:solidFill>
-                <a:schemeClr val="dk1"/>
-              </a:solidFill>
-              <a:effectLst/>
-              <a:uFillTx/>
-              <a:latin typeface="Calibri"/>
-            </a:endParaRPr>
           </a:p>
         </p:txBody>
       </p:sp>
@@ -1611,9 +1581,10 @@
           </a:ln>
         </p:spPr>
         <p:txBody>
-          <a:bodyPr lIns="91440" rIns="91440" tIns="45720" bIns="45720" anchor="t" vert="eaVert">
+          <a:bodyPr vert="eaVert" lIns="91440" tIns="45720" rIns="91440" bIns="45720" anchor="t">
             <a:noAutofit/>
           </a:bodyPr>
+          <a:lstStyle/>
           <a:p>
             <a:pPr marL="343080" indent="-343080" defTabSz="457200">
               <a:lnSpc>
@@ -1639,14 +1610,6 @@
               </a:rPr>
               <a:t>Click to edit Master text styles</a:t>
             </a:r>
-            <a:endParaRPr lang="en-US" sz="3200" b="0" u="none" strike="noStrike">
-              <a:solidFill>
-                <a:schemeClr val="dk1"/>
-              </a:solidFill>
-              <a:effectLst/>
-              <a:uFillTx/>
-              <a:latin typeface="Calibri"/>
-            </a:endParaRPr>
           </a:p>
           <a:p>
             <a:pPr marL="743040" lvl="1" indent="-285840" defTabSz="457200">
@@ -1673,14 +1636,6 @@
               </a:rPr>
               <a:t>Second level</a:t>
             </a:r>
-            <a:endParaRPr lang="en-US" sz="2800" b="0" u="none" strike="noStrike">
-              <a:solidFill>
-                <a:schemeClr val="dk1"/>
-              </a:solidFill>
-              <a:effectLst/>
-              <a:uFillTx/>
-              <a:latin typeface="Calibri"/>
-            </a:endParaRPr>
           </a:p>
           <a:p>
             <a:pPr marL="1143000" lvl="2" indent="-228600" defTabSz="457200">
@@ -1707,14 +1662,6 @@
               </a:rPr>
               <a:t>Third level</a:t>
             </a:r>
-            <a:endParaRPr lang="en-US" sz="2400" b="0" u="none" strike="noStrike">
-              <a:solidFill>
-                <a:schemeClr val="dk1"/>
-              </a:solidFill>
-              <a:effectLst/>
-              <a:uFillTx/>
-              <a:latin typeface="Calibri"/>
-            </a:endParaRPr>
           </a:p>
           <a:p>
             <a:pPr marL="1600200" lvl="3" indent="-228600" defTabSz="457200">
@@ -1741,14 +1688,6 @@
               </a:rPr>
               <a:t>Fourth level</a:t>
             </a:r>
-            <a:endParaRPr lang="en-US" sz="2000" b="0" u="none" strike="noStrike">
-              <a:solidFill>
-                <a:schemeClr val="dk1"/>
-              </a:solidFill>
-              <a:effectLst/>
-              <a:uFillTx/>
-              <a:latin typeface="Calibri"/>
-            </a:endParaRPr>
           </a:p>
           <a:p>
             <a:pPr marL="2057400" lvl="4" indent="-228600" defTabSz="457200">
@@ -1775,14 +1714,6 @@
               </a:rPr>
               <a:t>Fifth level</a:t>
             </a:r>
-            <a:endParaRPr lang="en-US" sz="2000" b="0" u="none" strike="noStrike">
-              <a:solidFill>
-                <a:schemeClr val="dk1"/>
-              </a:solidFill>
-              <a:effectLst/>
-              <a:uFillTx/>
-              <a:latin typeface="Calibri"/>
-            </a:endParaRPr>
           </a:p>
         </p:txBody>
       </p:sp>
@@ -1810,7 +1741,7 @@
           </a:ln>
         </p:spPr>
         <p:txBody>
-          <a:bodyPr lIns="91440" rIns="91440" tIns="45720" bIns="45720" anchor="ctr">
+          <a:bodyPr lIns="91440" tIns="45720" rIns="91440" bIns="45720" anchor="ctr">
             <a:noAutofit/>
           </a:bodyPr>
           <a:lstStyle>
@@ -1886,7 +1817,7 @@
           </a:ln>
         </p:spPr>
         <p:txBody>
-          <a:bodyPr lIns="91440" rIns="91440" tIns="45720" bIns="45720" anchor="ctr">
+          <a:bodyPr lIns="91440" tIns="45720" rIns="91440" bIns="45720" anchor="ctr">
             <a:noAutofit/>
           </a:bodyPr>
           <a:lstStyle>
@@ -1917,14 +1848,6 @@
               </a:rPr>
               <a:t>&lt;footer&gt;</a:t>
             </a:r>
-            <a:endParaRPr lang="en-IN" sz="1400" b="0" u="none" strike="noStrike">
-              <a:solidFill>
-                <a:srgbClr val="000000"/>
-              </a:solidFill>
-              <a:effectLst/>
-              <a:uFillTx/>
-              <a:latin typeface="Times New Roman"/>
-            </a:endParaRPr>
           </a:p>
         </p:txBody>
       </p:sp>
@@ -1952,7 +1875,7 @@
           </a:ln>
         </p:spPr>
         <p:txBody>
-          <a:bodyPr lIns="91440" rIns="91440" tIns="45720" bIns="45720" anchor="ctr">
+          <a:bodyPr lIns="91440" tIns="45720" rIns="91440" bIns="45720" anchor="ctr">
             <a:noAutofit/>
           </a:bodyPr>
           <a:lstStyle>
@@ -1991,7 +1914,7 @@
                 <a:uFillTx/>
                 <a:latin typeface="Calibri"/>
               </a:rPr>
-              <a:t>&lt;number&gt;</a:t>
+              <a:t>‹#›</a:t>
             </a:fld>
             <a:endParaRPr lang="en-IN" sz="1200" b="0" u="none" strike="noStrike">
               <a:solidFill>
@@ -2006,17 +1929,21 @@
       </p:sp>
     </p:spTree>
   </p:cSld>
+  <p:clrMapOvr>
+    <a:masterClrMapping/>
+  </p:clrMapOvr>
 </p:sldLayout>
 </file>
 
 <file path=ppt/slideLayouts/slideLayout3.xml><?xml version="1.0" encoding="utf-8"?>
-<p:sldLayout xmlns:a="http://schemas.openxmlformats.org/drawingml/2006/main" xmlns:p="http://schemas.openxmlformats.org/presentationml/2006/main" xmlns:r="http://schemas.openxmlformats.org/officeDocument/2006/relationships" xmlns:p14="http://schemas.microsoft.com/office/powerpoint/2010/main" xmlns:p15="http://schemas.microsoft.com/office/powerpoint/2012/main" xmlns:mc="http://schemas.openxmlformats.org/markup-compatibility/2006" type="vertTitleAndTx" preserve="1">
+<p:sldLayout xmlns:a="http://schemas.openxmlformats.org/drawingml/2006/main" xmlns:r="http://schemas.openxmlformats.org/officeDocument/2006/relationships" xmlns:p="http://schemas.openxmlformats.org/presentationml/2006/main" type="vertTitleAndTx" preserve="1">
   <p:cSld name="Vertical Title and Text">
     <p:bg>
       <p:bgPr>
         <a:solidFill>
-          <a:srgbClr val="ffffff"/>
+          <a:srgbClr val="FFFFFF"/>
         </a:solidFill>
+        <a:effectLst/>
       </p:bgPr>
     </p:bg>
     <p:spTree>
@@ -2057,9 +1984,10 @@
           </a:ln>
         </p:spPr>
         <p:txBody>
-          <a:bodyPr lIns="91440" rIns="91440" tIns="45720" bIns="45720" anchor="ctr" vert="eaVert">
+          <a:bodyPr vert="eaVert" lIns="91440" tIns="45720" rIns="91440" bIns="45720" anchor="ctr">
             <a:noAutofit/>
           </a:bodyPr>
+          <a:lstStyle/>
           <a:p>
             <a:pPr indent="0" algn="ctr" defTabSz="457200">
               <a:lnSpc>
@@ -2078,14 +2006,6 @@
               </a:rPr>
               <a:t>Click to edit Master title style</a:t>
             </a:r>
-            <a:endParaRPr lang="en-US" sz="4400" b="0" u="none" strike="noStrike">
-              <a:solidFill>
-                <a:schemeClr val="dk1"/>
-              </a:solidFill>
-              <a:effectLst/>
-              <a:uFillTx/>
-              <a:latin typeface="Calibri"/>
-            </a:endParaRPr>
           </a:p>
         </p:txBody>
       </p:sp>
@@ -2113,9 +2033,10 @@
           </a:ln>
         </p:spPr>
         <p:txBody>
-          <a:bodyPr lIns="91440" rIns="91440" tIns="45720" bIns="45720" anchor="t" vert="eaVert">
+          <a:bodyPr vert="eaVert" lIns="91440" tIns="45720" rIns="91440" bIns="45720" anchor="t">
             <a:noAutofit/>
           </a:bodyPr>
+          <a:lstStyle/>
           <a:p>
             <a:pPr marL="343080" indent="-343080" defTabSz="457200">
               <a:lnSpc>
@@ -2141,14 +2062,6 @@
               </a:rPr>
               <a:t>Click to edit Master text styles</a:t>
             </a:r>
-            <a:endParaRPr lang="en-US" sz="3200" b="0" u="none" strike="noStrike">
-              <a:solidFill>
-                <a:schemeClr val="dk1"/>
-              </a:solidFill>
-              <a:effectLst/>
-              <a:uFillTx/>
-              <a:latin typeface="Calibri"/>
-            </a:endParaRPr>
           </a:p>
           <a:p>
             <a:pPr marL="743040" lvl="1" indent="-285840" defTabSz="457200">
@@ -2175,14 +2088,6 @@
               </a:rPr>
               <a:t>Second level</a:t>
             </a:r>
-            <a:endParaRPr lang="en-US" sz="2800" b="0" u="none" strike="noStrike">
-              <a:solidFill>
-                <a:schemeClr val="dk1"/>
-              </a:solidFill>
-              <a:effectLst/>
-              <a:uFillTx/>
-              <a:latin typeface="Calibri"/>
-            </a:endParaRPr>
           </a:p>
           <a:p>
             <a:pPr marL="1143000" lvl="2" indent="-228600" defTabSz="457200">
@@ -2209,14 +2114,6 @@
               </a:rPr>
               <a:t>Third level</a:t>
             </a:r>
-            <a:endParaRPr lang="en-US" sz="2400" b="0" u="none" strike="noStrike">
-              <a:solidFill>
-                <a:schemeClr val="dk1"/>
-              </a:solidFill>
-              <a:effectLst/>
-              <a:uFillTx/>
-              <a:latin typeface="Calibri"/>
-            </a:endParaRPr>
           </a:p>
           <a:p>
             <a:pPr marL="1600200" lvl="3" indent="-228600" defTabSz="457200">
@@ -2243,14 +2140,6 @@
               </a:rPr>
               <a:t>Fourth level</a:t>
             </a:r>
-            <a:endParaRPr lang="en-US" sz="2000" b="0" u="none" strike="noStrike">
-              <a:solidFill>
-                <a:schemeClr val="dk1"/>
-              </a:solidFill>
-              <a:effectLst/>
-              <a:uFillTx/>
-              <a:latin typeface="Calibri"/>
-            </a:endParaRPr>
           </a:p>
           <a:p>
             <a:pPr marL="2057400" lvl="4" indent="-228600" defTabSz="457200">
@@ -2277,14 +2166,6 @@
               </a:rPr>
               <a:t>Fifth level</a:t>
             </a:r>
-            <a:endParaRPr lang="en-US" sz="2000" b="0" u="none" strike="noStrike">
-              <a:solidFill>
-                <a:schemeClr val="dk1"/>
-              </a:solidFill>
-              <a:effectLst/>
-              <a:uFillTx/>
-              <a:latin typeface="Calibri"/>
-            </a:endParaRPr>
           </a:p>
         </p:txBody>
       </p:sp>
@@ -2312,7 +2193,7 @@
           </a:ln>
         </p:spPr>
         <p:txBody>
-          <a:bodyPr lIns="91440" rIns="91440" tIns="45720" bIns="45720" anchor="ctr">
+          <a:bodyPr lIns="91440" tIns="45720" rIns="91440" bIns="45720" anchor="ctr">
             <a:noAutofit/>
           </a:bodyPr>
           <a:lstStyle>
@@ -2388,7 +2269,7 @@
           </a:ln>
         </p:spPr>
         <p:txBody>
-          <a:bodyPr lIns="91440" rIns="91440" tIns="45720" bIns="45720" anchor="ctr">
+          <a:bodyPr lIns="91440" tIns="45720" rIns="91440" bIns="45720" anchor="ctr">
             <a:noAutofit/>
           </a:bodyPr>
           <a:lstStyle>
@@ -2419,14 +2300,6 @@
               </a:rPr>
               <a:t>&lt;footer&gt;</a:t>
             </a:r>
-            <a:endParaRPr lang="en-IN" sz="1400" b="0" u="none" strike="noStrike">
-              <a:solidFill>
-                <a:srgbClr val="000000"/>
-              </a:solidFill>
-              <a:effectLst/>
-              <a:uFillTx/>
-              <a:latin typeface="Times New Roman"/>
-            </a:endParaRPr>
           </a:p>
         </p:txBody>
       </p:sp>
@@ -2454,7 +2327,7 @@
           </a:ln>
         </p:spPr>
         <p:txBody>
-          <a:bodyPr lIns="91440" rIns="91440" tIns="45720" bIns="45720" anchor="ctr">
+          <a:bodyPr lIns="91440" tIns="45720" rIns="91440" bIns="45720" anchor="ctr">
             <a:noAutofit/>
           </a:bodyPr>
           <a:lstStyle>
@@ -2493,7 +2366,7 @@
                 <a:uFillTx/>
                 <a:latin typeface="Calibri"/>
               </a:rPr>
-              <a:t>&lt;number&gt;</a:t>
+              <a:t>‹#›</a:t>
             </a:fld>
             <a:endParaRPr lang="en-IN" sz="1200" b="0" u="none" strike="noStrike">
               <a:solidFill>
@@ -2508,17 +2381,21 @@
       </p:sp>
     </p:spTree>
   </p:cSld>
+  <p:clrMapOvr>
+    <a:masterClrMapping/>
+  </p:clrMapOvr>
 </p:sldLayout>
 </file>
 
 <file path=ppt/slideLayouts/slideLayout4.xml><?xml version="1.0" encoding="utf-8"?>
-<p:sldLayout xmlns:a="http://schemas.openxmlformats.org/drawingml/2006/main" xmlns:p="http://schemas.openxmlformats.org/presentationml/2006/main" xmlns:r="http://schemas.openxmlformats.org/officeDocument/2006/relationships" xmlns:p14="http://schemas.microsoft.com/office/powerpoint/2010/main" xmlns:p15="http://schemas.microsoft.com/office/powerpoint/2012/main" xmlns:mc="http://schemas.openxmlformats.org/markup-compatibility/2006" type="obj" preserve="1">
+<p:sldLayout xmlns:a="http://schemas.openxmlformats.org/drawingml/2006/main" xmlns:r="http://schemas.openxmlformats.org/officeDocument/2006/relationships" xmlns:p="http://schemas.openxmlformats.org/presentationml/2006/main" type="obj" preserve="1">
   <p:cSld name="Title and Content">
     <p:bg>
       <p:bgPr>
         <a:solidFill>
-          <a:srgbClr val="ffffff"/>
+          <a:srgbClr val="FFFFFF"/>
         </a:solidFill>
+        <a:effectLst/>
       </p:bgPr>
     </p:bg>
     <p:spTree>
@@ -2559,9 +2436,10 @@
           </a:ln>
         </p:spPr>
         <p:txBody>
-          <a:bodyPr lIns="91440" rIns="91440" tIns="45720" bIns="45720" anchor="ctr">
+          <a:bodyPr lIns="91440" tIns="45720" rIns="91440" bIns="45720" anchor="ctr">
             <a:noAutofit/>
           </a:bodyPr>
+          <a:lstStyle/>
           <a:p>
             <a:pPr indent="0" algn="ctr" defTabSz="457200">
               <a:lnSpc>
@@ -2580,14 +2458,6 @@
               </a:rPr>
               <a:t>Click to edit Master title style</a:t>
             </a:r>
-            <a:endParaRPr lang="en-US" sz="4400" b="0" u="none" strike="noStrike">
-              <a:solidFill>
-                <a:schemeClr val="dk1"/>
-              </a:solidFill>
-              <a:effectLst/>
-              <a:uFillTx/>
-              <a:latin typeface="Calibri"/>
-            </a:endParaRPr>
           </a:p>
         </p:txBody>
       </p:sp>
@@ -2615,9 +2485,10 @@
           </a:ln>
         </p:spPr>
         <p:txBody>
-          <a:bodyPr lIns="91440" rIns="91440" tIns="45720" bIns="45720" anchor="t">
+          <a:bodyPr lIns="91440" tIns="45720" rIns="91440" bIns="45720" anchor="t">
             <a:noAutofit/>
           </a:bodyPr>
+          <a:lstStyle/>
           <a:p>
             <a:pPr marL="343080" indent="-343080" defTabSz="457200">
               <a:lnSpc>
@@ -2643,14 +2514,6 @@
               </a:rPr>
               <a:t>Click to edit Master text styles</a:t>
             </a:r>
-            <a:endParaRPr lang="en-US" sz="3200" b="0" u="none" strike="noStrike">
-              <a:solidFill>
-                <a:schemeClr val="dk1"/>
-              </a:solidFill>
-              <a:effectLst/>
-              <a:uFillTx/>
-              <a:latin typeface="Calibri"/>
-            </a:endParaRPr>
           </a:p>
           <a:p>
             <a:pPr marL="743040" lvl="1" indent="-285840" defTabSz="457200">
@@ -2677,14 +2540,6 @@
               </a:rPr>
               <a:t>Second level</a:t>
             </a:r>
-            <a:endParaRPr lang="en-US" sz="2800" b="0" u="none" strike="noStrike">
-              <a:solidFill>
-                <a:schemeClr val="dk1"/>
-              </a:solidFill>
-              <a:effectLst/>
-              <a:uFillTx/>
-              <a:latin typeface="Calibri"/>
-            </a:endParaRPr>
           </a:p>
           <a:p>
             <a:pPr marL="1143000" lvl="2" indent="-228600" defTabSz="457200">
@@ -2711,14 +2566,6 @@
               </a:rPr>
               <a:t>Third level</a:t>
             </a:r>
-            <a:endParaRPr lang="en-US" sz="2400" b="0" u="none" strike="noStrike">
-              <a:solidFill>
-                <a:schemeClr val="dk1"/>
-              </a:solidFill>
-              <a:effectLst/>
-              <a:uFillTx/>
-              <a:latin typeface="Calibri"/>
-            </a:endParaRPr>
           </a:p>
           <a:p>
             <a:pPr marL="1600200" lvl="3" indent="-228600" defTabSz="457200">
@@ -2745,14 +2592,6 @@
               </a:rPr>
               <a:t>Fourth level</a:t>
             </a:r>
-            <a:endParaRPr lang="en-US" sz="2000" b="0" u="none" strike="noStrike">
-              <a:solidFill>
-                <a:schemeClr val="dk1"/>
-              </a:solidFill>
-              <a:effectLst/>
-              <a:uFillTx/>
-              <a:latin typeface="Calibri"/>
-            </a:endParaRPr>
           </a:p>
           <a:p>
             <a:pPr marL="2057400" lvl="4" indent="-228600" defTabSz="457200">
@@ -2779,14 +2618,6 @@
               </a:rPr>
               <a:t>Fifth level</a:t>
             </a:r>
-            <a:endParaRPr lang="en-US" sz="2000" b="0" u="none" strike="noStrike">
-              <a:solidFill>
-                <a:schemeClr val="dk1"/>
-              </a:solidFill>
-              <a:effectLst/>
-              <a:uFillTx/>
-              <a:latin typeface="Calibri"/>
-            </a:endParaRPr>
           </a:p>
         </p:txBody>
       </p:sp>
@@ -2814,7 +2645,7 @@
           </a:ln>
         </p:spPr>
         <p:txBody>
-          <a:bodyPr lIns="91440" rIns="91440" tIns="45720" bIns="45720" anchor="ctr">
+          <a:bodyPr lIns="91440" tIns="45720" rIns="91440" bIns="45720" anchor="ctr">
             <a:noAutofit/>
           </a:bodyPr>
           <a:lstStyle>
@@ -2890,7 +2721,7 @@
           </a:ln>
         </p:spPr>
         <p:txBody>
-          <a:bodyPr lIns="91440" rIns="91440" tIns="45720" bIns="45720" anchor="ctr">
+          <a:bodyPr lIns="91440" tIns="45720" rIns="91440" bIns="45720" anchor="ctr">
             <a:noAutofit/>
           </a:bodyPr>
           <a:lstStyle>
@@ -2921,14 +2752,6 @@
               </a:rPr>
               <a:t>&lt;footer&gt;</a:t>
             </a:r>
-            <a:endParaRPr lang="en-IN" sz="1400" b="0" u="none" strike="noStrike">
-              <a:solidFill>
-                <a:srgbClr val="000000"/>
-              </a:solidFill>
-              <a:effectLst/>
-              <a:uFillTx/>
-              <a:latin typeface="Times New Roman"/>
-            </a:endParaRPr>
           </a:p>
         </p:txBody>
       </p:sp>
@@ -2956,7 +2779,7 @@
           </a:ln>
         </p:spPr>
         <p:txBody>
-          <a:bodyPr lIns="91440" rIns="91440" tIns="45720" bIns="45720" anchor="ctr">
+          <a:bodyPr lIns="91440" tIns="45720" rIns="91440" bIns="45720" anchor="ctr">
             <a:noAutofit/>
           </a:bodyPr>
           <a:lstStyle>
@@ -2995,7 +2818,7 @@
                 <a:uFillTx/>
                 <a:latin typeface="Calibri"/>
               </a:rPr>
-              <a:t>&lt;number&gt;</a:t>
+              <a:t>‹#›</a:t>
             </a:fld>
             <a:endParaRPr lang="en-IN" sz="1200" b="0" u="none" strike="noStrike">
               <a:solidFill>
@@ -3010,17 +2833,21 @@
       </p:sp>
     </p:spTree>
   </p:cSld>
+  <p:clrMapOvr>
+    <a:masterClrMapping/>
+  </p:clrMapOvr>
 </p:sldLayout>
 </file>
 
 <file path=ppt/slideLayouts/slideLayout5.xml><?xml version="1.0" encoding="utf-8"?>
-<p:sldLayout xmlns:a="http://schemas.openxmlformats.org/drawingml/2006/main" xmlns:p="http://schemas.openxmlformats.org/presentationml/2006/main" xmlns:r="http://schemas.openxmlformats.org/officeDocument/2006/relationships" xmlns:p14="http://schemas.microsoft.com/office/powerpoint/2010/main" xmlns:p15="http://schemas.microsoft.com/office/powerpoint/2012/main" xmlns:mc="http://schemas.openxmlformats.org/markup-compatibility/2006" type="blank" preserve="1">
+<p:sldLayout xmlns:a="http://schemas.openxmlformats.org/drawingml/2006/main" xmlns:r="http://schemas.openxmlformats.org/officeDocument/2006/relationships" xmlns:p="http://schemas.openxmlformats.org/presentationml/2006/main" type="blank" preserve="1">
   <p:cSld name="Section Header">
     <p:bg>
       <p:bgPr>
         <a:solidFill>
-          <a:srgbClr val="ffffff"/>
+          <a:srgbClr val="FFFFFF"/>
         </a:solidFill>
+        <a:effectLst/>
       </p:bgPr>
     </p:bg>
     <p:spTree>
@@ -3061,9 +2888,10 @@
           </a:ln>
         </p:spPr>
         <p:txBody>
-          <a:bodyPr lIns="91440" rIns="91440" tIns="45720" bIns="45720" anchor="t">
+          <a:bodyPr lIns="91440" tIns="45720" rIns="91440" bIns="45720" anchor="t">
             <a:noAutofit/>
           </a:bodyPr>
+          <a:lstStyle/>
           <a:p>
             <a:pPr indent="0" defTabSz="457200">
               <a:lnSpc>
@@ -3117,9 +2945,10 @@
           </a:ln>
         </p:spPr>
         <p:txBody>
-          <a:bodyPr lIns="91440" rIns="91440" tIns="45720" bIns="45720" anchor="b">
+          <a:bodyPr lIns="91440" tIns="45720" rIns="91440" bIns="45720" anchor="b">
             <a:noAutofit/>
           </a:bodyPr>
+          <a:lstStyle/>
           <a:p>
             <a:pPr indent="0" defTabSz="457200">
               <a:lnSpc>
@@ -3130,7 +2959,7 @@
               </a:spcBef>
               <a:buNone/>
               <a:tabLst>
-                <a:tab algn="l" pos="0"/>
+                <a:tab pos="0" algn="l"/>
               </a:tabLst>
             </a:pPr>
             <a:r>
@@ -3181,7 +3010,7 @@
           </a:ln>
         </p:spPr>
         <p:txBody>
-          <a:bodyPr lIns="91440" rIns="91440" tIns="45720" bIns="45720" anchor="ctr">
+          <a:bodyPr lIns="91440" tIns="45720" rIns="91440" bIns="45720" anchor="ctr">
             <a:noAutofit/>
           </a:bodyPr>
           <a:lstStyle>
@@ -3257,7 +3086,7 @@
           </a:ln>
         </p:spPr>
         <p:txBody>
-          <a:bodyPr lIns="91440" rIns="91440" tIns="45720" bIns="45720" anchor="ctr">
+          <a:bodyPr lIns="91440" tIns="45720" rIns="91440" bIns="45720" anchor="ctr">
             <a:noAutofit/>
           </a:bodyPr>
           <a:lstStyle>
@@ -3288,14 +3117,6 @@
               </a:rPr>
               <a:t>&lt;footer&gt;</a:t>
             </a:r>
-            <a:endParaRPr lang="en-IN" sz="1400" b="0" u="none" strike="noStrike">
-              <a:solidFill>
-                <a:srgbClr val="000000"/>
-              </a:solidFill>
-              <a:effectLst/>
-              <a:uFillTx/>
-              <a:latin typeface="Times New Roman"/>
-            </a:endParaRPr>
           </a:p>
         </p:txBody>
       </p:sp>
@@ -3323,7 +3144,7 @@
           </a:ln>
         </p:spPr>
         <p:txBody>
-          <a:bodyPr lIns="91440" rIns="91440" tIns="45720" bIns="45720" anchor="ctr">
+          <a:bodyPr lIns="91440" tIns="45720" rIns="91440" bIns="45720" anchor="ctr">
             <a:noAutofit/>
           </a:bodyPr>
           <a:lstStyle>
@@ -3362,7 +3183,7 @@
                 <a:uFillTx/>
                 <a:latin typeface="Calibri"/>
               </a:rPr>
-              <a:t>&lt;number&gt;</a:t>
+              <a:t>‹#›</a:t>
             </a:fld>
             <a:endParaRPr lang="en-IN" sz="1200" b="0" u="none" strike="noStrike">
               <a:solidFill>
@@ -3377,17 +3198,21 @@
       </p:sp>
     </p:spTree>
   </p:cSld>
+  <p:clrMapOvr>
+    <a:masterClrMapping/>
+  </p:clrMapOvr>
 </p:sldLayout>
 </file>
 
 <file path=ppt/slideLayouts/slideLayout6.xml><?xml version="1.0" encoding="utf-8"?>
-<p:sldLayout xmlns:a="http://schemas.openxmlformats.org/drawingml/2006/main" xmlns:p="http://schemas.openxmlformats.org/presentationml/2006/main" xmlns:r="http://schemas.openxmlformats.org/officeDocument/2006/relationships" xmlns:p14="http://schemas.microsoft.com/office/powerpoint/2010/main" xmlns:p15="http://schemas.microsoft.com/office/powerpoint/2012/main" xmlns:mc="http://schemas.openxmlformats.org/markup-compatibility/2006" type="twoObj" preserve="1">
+<p:sldLayout xmlns:a="http://schemas.openxmlformats.org/drawingml/2006/main" xmlns:r="http://schemas.openxmlformats.org/officeDocument/2006/relationships" xmlns:p="http://schemas.openxmlformats.org/presentationml/2006/main" type="twoObj" preserve="1">
   <p:cSld name="Two Content">
     <p:bg>
       <p:bgPr>
         <a:solidFill>
-          <a:srgbClr val="ffffff"/>
+          <a:srgbClr val="FFFFFF"/>
         </a:solidFill>
+        <a:effectLst/>
       </p:bgPr>
     </p:bg>
     <p:spTree>
@@ -3428,9 +3253,10 @@
           </a:ln>
         </p:spPr>
         <p:txBody>
-          <a:bodyPr lIns="91440" rIns="91440" tIns="45720" bIns="45720" anchor="ctr">
+          <a:bodyPr lIns="91440" tIns="45720" rIns="91440" bIns="45720" anchor="ctr">
             <a:noAutofit/>
           </a:bodyPr>
+          <a:lstStyle/>
           <a:p>
             <a:pPr indent="0" algn="ctr" defTabSz="457200">
               <a:lnSpc>
@@ -3449,14 +3275,6 @@
               </a:rPr>
               <a:t>Click to edit Master title style</a:t>
             </a:r>
-            <a:endParaRPr lang="en-US" sz="4400" b="0" u="none" strike="noStrike">
-              <a:solidFill>
-                <a:schemeClr val="dk1"/>
-              </a:solidFill>
-              <a:effectLst/>
-              <a:uFillTx/>
-              <a:latin typeface="Calibri"/>
-            </a:endParaRPr>
           </a:p>
         </p:txBody>
       </p:sp>
@@ -3484,9 +3302,10 @@
           </a:ln>
         </p:spPr>
         <p:txBody>
-          <a:bodyPr lIns="91440" rIns="91440" tIns="45720" bIns="45720" anchor="t">
+          <a:bodyPr lIns="91440" tIns="45720" rIns="91440" bIns="45720" anchor="t">
             <a:noAutofit/>
           </a:bodyPr>
+          <a:lstStyle/>
           <a:p>
             <a:pPr marL="343080" indent="-343080" defTabSz="457200">
               <a:lnSpc>
@@ -3512,14 +3331,6 @@
               </a:rPr>
               <a:t>Click to edit Master text styles</a:t>
             </a:r>
-            <a:endParaRPr lang="en-US" sz="2800" b="0" u="none" strike="noStrike">
-              <a:solidFill>
-                <a:schemeClr val="dk1"/>
-              </a:solidFill>
-              <a:effectLst/>
-              <a:uFillTx/>
-              <a:latin typeface="Calibri"/>
-            </a:endParaRPr>
           </a:p>
           <a:p>
             <a:pPr marL="743040" lvl="1" indent="-285840" defTabSz="457200">
@@ -3546,14 +3357,6 @@
               </a:rPr>
               <a:t>Second level</a:t>
             </a:r>
-            <a:endParaRPr lang="en-US" sz="2400" b="0" u="none" strike="noStrike">
-              <a:solidFill>
-                <a:schemeClr val="dk1"/>
-              </a:solidFill>
-              <a:effectLst/>
-              <a:uFillTx/>
-              <a:latin typeface="Calibri"/>
-            </a:endParaRPr>
           </a:p>
           <a:p>
             <a:pPr marL="1143000" lvl="2" indent="-228600" defTabSz="457200">
@@ -3580,14 +3383,6 @@
               </a:rPr>
               <a:t>Third level</a:t>
             </a:r>
-            <a:endParaRPr lang="en-US" sz="2000" b="0" u="none" strike="noStrike">
-              <a:solidFill>
-                <a:schemeClr val="dk1"/>
-              </a:solidFill>
-              <a:effectLst/>
-              <a:uFillTx/>
-              <a:latin typeface="Calibri"/>
-            </a:endParaRPr>
           </a:p>
           <a:p>
             <a:pPr marL="1600200" lvl="3" indent="-228600" defTabSz="457200">
@@ -3614,14 +3409,6 @@
               </a:rPr>
               <a:t>Fourth level</a:t>
             </a:r>
-            <a:endParaRPr lang="en-US" sz="1800" b="0" u="none" strike="noStrike">
-              <a:solidFill>
-                <a:schemeClr val="dk1"/>
-              </a:solidFill>
-              <a:effectLst/>
-              <a:uFillTx/>
-              <a:latin typeface="Calibri"/>
-            </a:endParaRPr>
           </a:p>
           <a:p>
             <a:pPr marL="2057400" lvl="4" indent="-228600" defTabSz="457200">
@@ -3648,14 +3435,6 @@
               </a:rPr>
               <a:t>Fifth level</a:t>
             </a:r>
-            <a:endParaRPr lang="en-US" sz="1800" b="0" u="none" strike="noStrike">
-              <a:solidFill>
-                <a:schemeClr val="dk1"/>
-              </a:solidFill>
-              <a:effectLst/>
-              <a:uFillTx/>
-              <a:latin typeface="Calibri"/>
-            </a:endParaRPr>
           </a:p>
         </p:txBody>
       </p:sp>
@@ -3683,9 +3462,10 @@
           </a:ln>
         </p:spPr>
         <p:txBody>
-          <a:bodyPr lIns="91440" rIns="91440" tIns="45720" bIns="45720" anchor="t">
+          <a:bodyPr lIns="91440" tIns="45720" rIns="91440" bIns="45720" anchor="t">
             <a:noAutofit/>
           </a:bodyPr>
+          <a:lstStyle/>
           <a:p>
             <a:pPr marL="343080" indent="-343080" defTabSz="457200">
               <a:lnSpc>
@@ -3711,14 +3491,6 @@
               </a:rPr>
               <a:t>Click to edit Master text styles</a:t>
             </a:r>
-            <a:endParaRPr lang="en-US" sz="2800" b="0" u="none" strike="noStrike">
-              <a:solidFill>
-                <a:schemeClr val="dk1"/>
-              </a:solidFill>
-              <a:effectLst/>
-              <a:uFillTx/>
-              <a:latin typeface="Calibri"/>
-            </a:endParaRPr>
           </a:p>
           <a:p>
             <a:pPr marL="743040" lvl="1" indent="-285840" defTabSz="457200">
@@ -3745,14 +3517,6 @@
               </a:rPr>
               <a:t>Second level</a:t>
             </a:r>
-            <a:endParaRPr lang="en-US" sz="2400" b="0" u="none" strike="noStrike">
-              <a:solidFill>
-                <a:schemeClr val="dk1"/>
-              </a:solidFill>
-              <a:effectLst/>
-              <a:uFillTx/>
-              <a:latin typeface="Calibri"/>
-            </a:endParaRPr>
           </a:p>
           <a:p>
             <a:pPr marL="1143000" lvl="2" indent="-228600" defTabSz="457200">
@@ -3779,14 +3543,6 @@
               </a:rPr>
               <a:t>Third level</a:t>
             </a:r>
-            <a:endParaRPr lang="en-US" sz="2000" b="0" u="none" strike="noStrike">
-              <a:solidFill>
-                <a:schemeClr val="dk1"/>
-              </a:solidFill>
-              <a:effectLst/>
-              <a:uFillTx/>
-              <a:latin typeface="Calibri"/>
-            </a:endParaRPr>
           </a:p>
           <a:p>
             <a:pPr marL="1600200" lvl="3" indent="-228600" defTabSz="457200">
@@ -3813,14 +3569,6 @@
               </a:rPr>
               <a:t>Fourth level</a:t>
             </a:r>
-            <a:endParaRPr lang="en-US" sz="1800" b="0" u="none" strike="noStrike">
-              <a:solidFill>
-                <a:schemeClr val="dk1"/>
-              </a:solidFill>
-              <a:effectLst/>
-              <a:uFillTx/>
-              <a:latin typeface="Calibri"/>
-            </a:endParaRPr>
           </a:p>
           <a:p>
             <a:pPr marL="2057400" lvl="4" indent="-228600" defTabSz="457200">
@@ -3847,14 +3595,6 @@
               </a:rPr>
               <a:t>Fifth level</a:t>
             </a:r>
-            <a:endParaRPr lang="en-US" sz="1800" b="0" u="none" strike="noStrike">
-              <a:solidFill>
-                <a:schemeClr val="dk1"/>
-              </a:solidFill>
-              <a:effectLst/>
-              <a:uFillTx/>
-              <a:latin typeface="Calibri"/>
-            </a:endParaRPr>
           </a:p>
         </p:txBody>
       </p:sp>
@@ -3882,7 +3622,7 @@
           </a:ln>
         </p:spPr>
         <p:txBody>
-          <a:bodyPr lIns="91440" rIns="91440" tIns="45720" bIns="45720" anchor="ctr">
+          <a:bodyPr lIns="91440" tIns="45720" rIns="91440" bIns="45720" anchor="ctr">
             <a:noAutofit/>
           </a:bodyPr>
           <a:lstStyle>
@@ -3958,7 +3698,7 @@
           </a:ln>
         </p:spPr>
         <p:txBody>
-          <a:bodyPr lIns="91440" rIns="91440" tIns="45720" bIns="45720" anchor="ctr">
+          <a:bodyPr lIns="91440" tIns="45720" rIns="91440" bIns="45720" anchor="ctr">
             <a:noAutofit/>
           </a:bodyPr>
           <a:lstStyle>
@@ -3989,14 +3729,6 @@
               </a:rPr>
               <a:t>&lt;footer&gt;</a:t>
             </a:r>
-            <a:endParaRPr lang="en-IN" sz="1400" b="0" u="none" strike="noStrike">
-              <a:solidFill>
-                <a:srgbClr val="000000"/>
-              </a:solidFill>
-              <a:effectLst/>
-              <a:uFillTx/>
-              <a:latin typeface="Times New Roman"/>
-            </a:endParaRPr>
           </a:p>
         </p:txBody>
       </p:sp>
@@ -4024,7 +3756,7 @@
           </a:ln>
         </p:spPr>
         <p:txBody>
-          <a:bodyPr lIns="91440" rIns="91440" tIns="45720" bIns="45720" anchor="ctr">
+          <a:bodyPr lIns="91440" tIns="45720" rIns="91440" bIns="45720" anchor="ctr">
             <a:noAutofit/>
           </a:bodyPr>
           <a:lstStyle>
@@ -4063,7 +3795,7 @@
                 <a:uFillTx/>
                 <a:latin typeface="Calibri"/>
               </a:rPr>
-              <a:t>&lt;number&gt;</a:t>
+              <a:t>‹#›</a:t>
             </a:fld>
             <a:endParaRPr lang="en-IN" sz="1200" b="0" u="none" strike="noStrike">
               <a:solidFill>
@@ -4078,17 +3810,21 @@
       </p:sp>
     </p:spTree>
   </p:cSld>
+  <p:clrMapOvr>
+    <a:masterClrMapping/>
+  </p:clrMapOvr>
 </p:sldLayout>
 </file>
 
 <file path=ppt/slideLayouts/slideLayout7.xml><?xml version="1.0" encoding="utf-8"?>
-<p:sldLayout xmlns:a="http://schemas.openxmlformats.org/drawingml/2006/main" xmlns:p="http://schemas.openxmlformats.org/presentationml/2006/main" xmlns:r="http://schemas.openxmlformats.org/officeDocument/2006/relationships" xmlns:p14="http://schemas.microsoft.com/office/powerpoint/2010/main" xmlns:p15="http://schemas.microsoft.com/office/powerpoint/2012/main" xmlns:mc="http://schemas.openxmlformats.org/markup-compatibility/2006" type="blank" preserve="1">
+<p:sldLayout xmlns:a="http://schemas.openxmlformats.org/drawingml/2006/main" xmlns:r="http://schemas.openxmlformats.org/officeDocument/2006/relationships" xmlns:p="http://schemas.openxmlformats.org/presentationml/2006/main" type="blank" preserve="1">
   <p:cSld name="Comparison">
     <p:bg>
       <p:bgPr>
         <a:solidFill>
-          <a:srgbClr val="ffffff"/>
+          <a:srgbClr val="FFFFFF"/>
         </a:solidFill>
+        <a:effectLst/>
       </p:bgPr>
     </p:bg>
     <p:spTree>
@@ -4129,9 +3865,10 @@
           </a:ln>
         </p:spPr>
         <p:txBody>
-          <a:bodyPr lIns="91440" rIns="91440" tIns="45720" bIns="45720" anchor="ctr">
+          <a:bodyPr lIns="91440" tIns="45720" rIns="91440" bIns="45720" anchor="ctr">
             <a:noAutofit/>
           </a:bodyPr>
+          <a:lstStyle/>
           <a:p>
             <a:pPr indent="0" algn="ctr" defTabSz="457200">
               <a:lnSpc>
@@ -4150,14 +3887,6 @@
               </a:rPr>
               <a:t>Click to edit Master title style</a:t>
             </a:r>
-            <a:endParaRPr lang="en-US" sz="4400" b="0" u="none" strike="noStrike">
-              <a:solidFill>
-                <a:schemeClr val="dk1"/>
-              </a:solidFill>
-              <a:effectLst/>
-              <a:uFillTx/>
-              <a:latin typeface="Calibri"/>
-            </a:endParaRPr>
           </a:p>
         </p:txBody>
       </p:sp>
@@ -4185,9 +3914,10 @@
           </a:ln>
         </p:spPr>
         <p:txBody>
-          <a:bodyPr lIns="91440" rIns="91440" tIns="45720" bIns="45720" anchor="b">
+          <a:bodyPr lIns="91440" tIns="45720" rIns="91440" bIns="45720" anchor="b">
             <a:noAutofit/>
           </a:bodyPr>
+          <a:lstStyle/>
           <a:p>
             <a:pPr indent="0" defTabSz="457200">
               <a:lnSpc>
@@ -4198,7 +3928,7 @@
               </a:spcBef>
               <a:buNone/>
               <a:tabLst>
-                <a:tab algn="l" pos="0"/>
+                <a:tab pos="0" algn="l"/>
               </a:tabLst>
             </a:pPr>
             <a:r>
@@ -4247,9 +3977,10 @@
           </a:ln>
         </p:spPr>
         <p:txBody>
-          <a:bodyPr lIns="91440" rIns="91440" tIns="45720" bIns="45720" anchor="t">
+          <a:bodyPr lIns="91440" tIns="45720" rIns="91440" bIns="45720" anchor="t">
             <a:noAutofit/>
           </a:bodyPr>
+          <a:lstStyle/>
           <a:p>
             <a:pPr marL="343080" indent="-343080" defTabSz="457200">
               <a:lnSpc>
@@ -4275,6 +4006,165 @@
               </a:rPr>
               <a:t>Click to edit Master text styles</a:t>
             </a:r>
+          </a:p>
+          <a:p>
+            <a:pPr marL="743040" lvl="1" indent="-285840" defTabSz="457200">
+              <a:lnSpc>
+                <a:spcPct val="100000"/>
+              </a:lnSpc>
+              <a:spcBef>
+                <a:spcPts val="400"/>
+              </a:spcBef>
+              <a:buClr>
+                <a:srgbClr val="000000"/>
+              </a:buClr>
+              <a:buFont typeface="Arial"/>
+              <a:buChar char="–"/>
+            </a:pPr>
+            <a:r>
+              <a:rPr lang="en-US" sz="2000" b="0" u="none" strike="noStrike">
+                <a:solidFill>
+                  <a:schemeClr val="dk1"/>
+                </a:solidFill>
+                <a:effectLst/>
+                <a:uFillTx/>
+                <a:latin typeface="Calibri"/>
+              </a:rPr>
+              <a:t>Second level</a:t>
+            </a:r>
+          </a:p>
+          <a:p>
+            <a:pPr marL="1143000" lvl="2" indent="-228600" defTabSz="457200">
+              <a:lnSpc>
+                <a:spcPct val="100000"/>
+              </a:lnSpc>
+              <a:spcBef>
+                <a:spcPts val="360"/>
+              </a:spcBef>
+              <a:buClr>
+                <a:srgbClr val="000000"/>
+              </a:buClr>
+              <a:buFont typeface="Arial"/>
+              <a:buChar char="•"/>
+            </a:pPr>
+            <a:r>
+              <a:rPr lang="en-US" sz="1800" b="0" u="none" strike="noStrike">
+                <a:solidFill>
+                  <a:schemeClr val="dk1"/>
+                </a:solidFill>
+                <a:effectLst/>
+                <a:uFillTx/>
+                <a:latin typeface="Calibri"/>
+              </a:rPr>
+              <a:t>Third level</a:t>
+            </a:r>
+          </a:p>
+          <a:p>
+            <a:pPr marL="1600200" lvl="3" indent="-228600" defTabSz="457200">
+              <a:lnSpc>
+                <a:spcPct val="100000"/>
+              </a:lnSpc>
+              <a:spcBef>
+                <a:spcPts val="320"/>
+              </a:spcBef>
+              <a:buClr>
+                <a:srgbClr val="000000"/>
+              </a:buClr>
+              <a:buFont typeface="Arial"/>
+              <a:buChar char="–"/>
+            </a:pPr>
+            <a:r>
+              <a:rPr lang="en-US" sz="1600" b="0" u="none" strike="noStrike">
+                <a:solidFill>
+                  <a:schemeClr val="dk1"/>
+                </a:solidFill>
+                <a:effectLst/>
+                <a:uFillTx/>
+                <a:latin typeface="Calibri"/>
+              </a:rPr>
+              <a:t>Fourth level</a:t>
+            </a:r>
+          </a:p>
+          <a:p>
+            <a:pPr marL="2057400" lvl="4" indent="-228600" defTabSz="457200">
+              <a:lnSpc>
+                <a:spcPct val="100000"/>
+              </a:lnSpc>
+              <a:spcBef>
+                <a:spcPts val="320"/>
+              </a:spcBef>
+              <a:buClr>
+                <a:srgbClr val="000000"/>
+              </a:buClr>
+              <a:buFont typeface="Arial"/>
+              <a:buChar char="»"/>
+            </a:pPr>
+            <a:r>
+              <a:rPr lang="en-US" sz="1600" b="0" u="none" strike="noStrike">
+                <a:solidFill>
+                  <a:schemeClr val="dk1"/>
+                </a:solidFill>
+                <a:effectLst/>
+                <a:uFillTx/>
+                <a:latin typeface="Calibri"/>
+              </a:rPr>
+              <a:t>Fifth level</a:t>
+            </a:r>
+          </a:p>
+        </p:txBody>
+      </p:sp>
+      <p:sp>
+        <p:nvSpPr>
+          <p:cNvPr id="35" name="PlaceHolder 4"/>
+          <p:cNvSpPr>
+            <a:spLocks noGrp="1"/>
+          </p:cNvSpPr>
+          <p:nvPr>
+            <p:ph type="body"/>
+          </p:nvPr>
+        </p:nvSpPr>
+        <p:spPr>
+          <a:xfrm>
+            <a:off x="4645080" y="1535040"/>
+            <a:ext cx="4041360" cy="639360"/>
+          </a:xfrm>
+          <a:prstGeom prst="rect">
+            <a:avLst/>
+          </a:prstGeom>
+          <a:noFill/>
+          <a:ln w="0">
+            <a:noFill/>
+          </a:ln>
+        </p:spPr>
+        <p:txBody>
+          <a:bodyPr lIns="91440" tIns="45720" rIns="91440" bIns="45720" anchor="b">
+            <a:noAutofit/>
+          </a:bodyPr>
+          <a:lstStyle/>
+          <a:p>
+            <a:pPr indent="0" defTabSz="457200">
+              <a:lnSpc>
+                <a:spcPct val="100000"/>
+              </a:lnSpc>
+              <a:spcBef>
+                <a:spcPts val="479"/>
+              </a:spcBef>
+              <a:buNone/>
+              <a:tabLst>
+                <a:tab pos="0" algn="l"/>
+              </a:tabLst>
+            </a:pPr>
+            <a:r>
+              <a:rPr lang="en-US" sz="2400" b="1" u="none" strike="noStrike">
+                <a:solidFill>
+                  <a:schemeClr val="dk1"/>
+                </a:solidFill>
+                <a:effectLst/>
+                <a:uFillTx/>
+                <a:latin typeface="Calibri"/>
+              </a:rPr>
+              <a:t>Click to edit Master text styles</a:t>
+            </a:r>
             <a:endParaRPr lang="en-US" sz="2400" b="0" u="none" strike="noStrike">
               <a:solidFill>
                 <a:schemeClr val="dk1"/>
@@ -4284,6 +4174,62 @@
               <a:latin typeface="Calibri"/>
             </a:endParaRPr>
           </a:p>
+        </p:txBody>
+      </p:sp>
+      <p:sp>
+        <p:nvSpPr>
+          <p:cNvPr id="36" name="PlaceHolder 5"/>
+          <p:cNvSpPr>
+            <a:spLocks noGrp="1"/>
+          </p:cNvSpPr>
+          <p:nvPr>
+            <p:ph type="body"/>
+          </p:nvPr>
+        </p:nvSpPr>
+        <p:spPr>
+          <a:xfrm>
+            <a:off x="4645080" y="2174760"/>
+            <a:ext cx="4041360" cy="3951000"/>
+          </a:xfrm>
+          <a:prstGeom prst="rect">
+            <a:avLst/>
+          </a:prstGeom>
+          <a:noFill/>
+          <a:ln w="0">
+            <a:noFill/>
+          </a:ln>
+        </p:spPr>
+        <p:txBody>
+          <a:bodyPr lIns="91440" tIns="45720" rIns="91440" bIns="45720" anchor="t">
+            <a:noAutofit/>
+          </a:bodyPr>
+          <a:lstStyle/>
+          <a:p>
+            <a:pPr marL="343080" indent="-343080" defTabSz="457200">
+              <a:lnSpc>
+                <a:spcPct val="100000"/>
+              </a:lnSpc>
+              <a:spcBef>
+                <a:spcPts val="479"/>
+              </a:spcBef>
+              <a:buClr>
+                <a:srgbClr val="000000"/>
+              </a:buClr>
+              <a:buFont typeface="Arial"/>
+              <a:buChar char="•"/>
+            </a:pPr>
+            <a:r>
+              <a:rPr lang="en-US" sz="2400" b="0" u="none" strike="noStrike">
+                <a:solidFill>
+                  <a:schemeClr val="dk1"/>
+                </a:solidFill>
+                <a:effectLst/>
+                <a:uFillTx/>
+                <a:latin typeface="Calibri"/>
+              </a:rPr>
+              <a:t>Click to edit Master text styles</a:t>
+            </a:r>
+          </a:p>
           <a:p>
             <a:pPr marL="743040" lvl="1" indent="-285840" defTabSz="457200">
               <a:lnSpc>
@@ -4309,14 +4255,6 @@
               </a:rPr>
               <a:t>Second level</a:t>
             </a:r>
-            <a:endParaRPr lang="en-US" sz="2000" b="0" u="none" strike="noStrike">
-              <a:solidFill>
-                <a:schemeClr val="dk1"/>
-              </a:solidFill>
-              <a:effectLst/>
-              <a:uFillTx/>
-              <a:latin typeface="Calibri"/>
-            </a:endParaRPr>
           </a:p>
           <a:p>
             <a:pPr marL="1143000" lvl="2" indent="-228600" defTabSz="457200">
@@ -4343,14 +4281,6 @@
               </a:rPr>
               <a:t>Third level</a:t>
             </a:r>
-            <a:endParaRPr lang="en-US" sz="1800" b="0" u="none" strike="noStrike">
-              <a:solidFill>
-                <a:schemeClr val="dk1"/>
-              </a:solidFill>
-              <a:effectLst/>
-              <a:uFillTx/>
-              <a:latin typeface="Calibri"/>
-            </a:endParaRPr>
           </a:p>
           <a:p>
             <a:pPr marL="1600200" lvl="3" indent="-228600" defTabSz="457200">
@@ -4377,14 +4307,6 @@
               </a:rPr>
               <a:t>Fourth level</a:t>
             </a:r>
-            <a:endParaRPr lang="en-US" sz="1600" b="0" u="none" strike="noStrike">
-              <a:solidFill>
-                <a:schemeClr val="dk1"/>
-              </a:solidFill>
-              <a:effectLst/>
-              <a:uFillTx/>
-              <a:latin typeface="Calibri"/>
-            </a:endParaRPr>
           </a:p>
           <a:p>
             <a:pPr marL="2057400" lvl="4" indent="-228600" defTabSz="457200">
@@ -4411,275 +4333,6 @@
               </a:rPr>
               <a:t>Fifth level</a:t>
             </a:r>
-            <a:endParaRPr lang="en-US" sz="1600" b="0" u="none" strike="noStrike">
-              <a:solidFill>
-                <a:schemeClr val="dk1"/>
-              </a:solidFill>
-              <a:effectLst/>
-              <a:uFillTx/>
-              <a:latin typeface="Calibri"/>
-            </a:endParaRPr>
-          </a:p>
-        </p:txBody>
-      </p:sp>
-      <p:sp>
-        <p:nvSpPr>
-          <p:cNvPr id="35" name="PlaceHolder 4"/>
-          <p:cNvSpPr>
-            <a:spLocks noGrp="1"/>
-          </p:cNvSpPr>
-          <p:nvPr>
-            <p:ph type="body"/>
-          </p:nvPr>
-        </p:nvSpPr>
-        <p:spPr>
-          <a:xfrm>
-            <a:off x="4645080" y="1535040"/>
-            <a:ext cx="4041360" cy="639360"/>
-          </a:xfrm>
-          <a:prstGeom prst="rect">
-            <a:avLst/>
-          </a:prstGeom>
-          <a:noFill/>
-          <a:ln w="0">
-            <a:noFill/>
-          </a:ln>
-        </p:spPr>
-        <p:txBody>
-          <a:bodyPr lIns="91440" rIns="91440" tIns="45720" bIns="45720" anchor="b">
-            <a:noAutofit/>
-          </a:bodyPr>
-          <a:p>
-            <a:pPr indent="0" defTabSz="457200">
-              <a:lnSpc>
-                <a:spcPct val="100000"/>
-              </a:lnSpc>
-              <a:spcBef>
-                <a:spcPts val="479"/>
-              </a:spcBef>
-              <a:buNone/>
-              <a:tabLst>
-                <a:tab algn="l" pos="0"/>
-              </a:tabLst>
-            </a:pPr>
-            <a:r>
-              <a:rPr lang="en-US" sz="2400" b="1" u="none" strike="noStrike">
-                <a:solidFill>
-                  <a:schemeClr val="dk1"/>
-                </a:solidFill>
-                <a:effectLst/>
-                <a:uFillTx/>
-                <a:latin typeface="Calibri"/>
-              </a:rPr>
-              <a:t>Click to edit Master text styles</a:t>
-            </a:r>
-            <a:endParaRPr lang="en-US" sz="2400" b="0" u="none" strike="noStrike">
-              <a:solidFill>
-                <a:schemeClr val="dk1"/>
-              </a:solidFill>
-              <a:effectLst/>
-              <a:uFillTx/>
-              <a:latin typeface="Calibri"/>
-            </a:endParaRPr>
-          </a:p>
-        </p:txBody>
-      </p:sp>
-      <p:sp>
-        <p:nvSpPr>
-          <p:cNvPr id="36" name="PlaceHolder 5"/>
-          <p:cNvSpPr>
-            <a:spLocks noGrp="1"/>
-          </p:cNvSpPr>
-          <p:nvPr>
-            <p:ph type="body"/>
-          </p:nvPr>
-        </p:nvSpPr>
-        <p:spPr>
-          <a:xfrm>
-            <a:off x="4645080" y="2174760"/>
-            <a:ext cx="4041360" cy="3951000"/>
-          </a:xfrm>
-          <a:prstGeom prst="rect">
-            <a:avLst/>
-          </a:prstGeom>
-          <a:noFill/>
-          <a:ln w="0">
-            <a:noFill/>
-          </a:ln>
-        </p:spPr>
-        <p:txBody>
-          <a:bodyPr lIns="91440" rIns="91440" tIns="45720" bIns="45720" anchor="t">
-            <a:noAutofit/>
-          </a:bodyPr>
-          <a:p>
-            <a:pPr marL="343080" indent="-343080" defTabSz="457200">
-              <a:lnSpc>
-                <a:spcPct val="100000"/>
-              </a:lnSpc>
-              <a:spcBef>
-                <a:spcPts val="479"/>
-              </a:spcBef>
-              <a:buClr>
-                <a:srgbClr val="000000"/>
-              </a:buClr>
-              <a:buFont typeface="Arial"/>
-              <a:buChar char="•"/>
-            </a:pPr>
-            <a:r>
-              <a:rPr lang="en-US" sz="2400" b="0" u="none" strike="noStrike">
-                <a:solidFill>
-                  <a:schemeClr val="dk1"/>
-                </a:solidFill>
-                <a:effectLst/>
-                <a:uFillTx/>
-                <a:latin typeface="Calibri"/>
-              </a:rPr>
-              <a:t>Click to edit Master text styles</a:t>
-            </a:r>
-            <a:endParaRPr lang="en-US" sz="2400" b="0" u="none" strike="noStrike">
-              <a:solidFill>
-                <a:schemeClr val="dk1"/>
-              </a:solidFill>
-              <a:effectLst/>
-              <a:uFillTx/>
-              <a:latin typeface="Calibri"/>
-            </a:endParaRPr>
-          </a:p>
-          <a:p>
-            <a:pPr marL="743040" lvl="1" indent="-285840" defTabSz="457200">
-              <a:lnSpc>
-                <a:spcPct val="100000"/>
-              </a:lnSpc>
-              <a:spcBef>
-                <a:spcPts val="400"/>
-              </a:spcBef>
-              <a:buClr>
-                <a:srgbClr val="000000"/>
-              </a:buClr>
-              <a:buFont typeface="Arial"/>
-              <a:buChar char="–"/>
-            </a:pPr>
-            <a:r>
-              <a:rPr lang="en-US" sz="2000" b="0" u="none" strike="noStrike">
-                <a:solidFill>
-                  <a:schemeClr val="dk1"/>
-                </a:solidFill>
-                <a:effectLst/>
-                <a:uFillTx/>
-                <a:latin typeface="Calibri"/>
-              </a:rPr>
-              <a:t>Second level</a:t>
-            </a:r>
-            <a:endParaRPr lang="en-US" sz="2000" b="0" u="none" strike="noStrike">
-              <a:solidFill>
-                <a:schemeClr val="dk1"/>
-              </a:solidFill>
-              <a:effectLst/>
-              <a:uFillTx/>
-              <a:latin typeface="Calibri"/>
-            </a:endParaRPr>
-          </a:p>
-          <a:p>
-            <a:pPr marL="1143000" lvl="2" indent="-228600" defTabSz="457200">
-              <a:lnSpc>
-                <a:spcPct val="100000"/>
-              </a:lnSpc>
-              <a:spcBef>
-                <a:spcPts val="360"/>
-              </a:spcBef>
-              <a:buClr>
-                <a:srgbClr val="000000"/>
-              </a:buClr>
-              <a:buFont typeface="Arial"/>
-              <a:buChar char="•"/>
-            </a:pPr>
-            <a:r>
-              <a:rPr lang="en-US" sz="1800" b="0" u="none" strike="noStrike">
-                <a:solidFill>
-                  <a:schemeClr val="dk1"/>
-                </a:solidFill>
-                <a:effectLst/>
-                <a:uFillTx/>
-                <a:latin typeface="Calibri"/>
-              </a:rPr>
-              <a:t>Third level</a:t>
-            </a:r>
-            <a:endParaRPr lang="en-US" sz="1800" b="0" u="none" strike="noStrike">
-              <a:solidFill>
-                <a:schemeClr val="dk1"/>
-              </a:solidFill>
-              <a:effectLst/>
-              <a:uFillTx/>
-              <a:latin typeface="Calibri"/>
-            </a:endParaRPr>
-          </a:p>
-          <a:p>
-            <a:pPr marL="1600200" lvl="3" indent="-228600" defTabSz="457200">
-              <a:lnSpc>
-                <a:spcPct val="100000"/>
-              </a:lnSpc>
-              <a:spcBef>
-                <a:spcPts val="320"/>
-              </a:spcBef>
-              <a:buClr>
-                <a:srgbClr val="000000"/>
-              </a:buClr>
-              <a:buFont typeface="Arial"/>
-              <a:buChar char="–"/>
-            </a:pPr>
-            <a:r>
-              <a:rPr lang="en-US" sz="1600" b="0" u="none" strike="noStrike">
-                <a:solidFill>
-                  <a:schemeClr val="dk1"/>
-                </a:solidFill>
-                <a:effectLst/>
-                <a:uFillTx/>
-                <a:latin typeface="Calibri"/>
-              </a:rPr>
-              <a:t>Fourth level</a:t>
-            </a:r>
-            <a:endParaRPr lang="en-US" sz="1600" b="0" u="none" strike="noStrike">
-              <a:solidFill>
-                <a:schemeClr val="dk1"/>
-              </a:solidFill>
-              <a:effectLst/>
-              <a:uFillTx/>
-              <a:latin typeface="Calibri"/>
-            </a:endParaRPr>
-          </a:p>
-          <a:p>
-            <a:pPr marL="2057400" lvl="4" indent="-228600" defTabSz="457200">
-              <a:lnSpc>
-                <a:spcPct val="100000"/>
-              </a:lnSpc>
-              <a:spcBef>
-                <a:spcPts val="320"/>
-              </a:spcBef>
-              <a:buClr>
-                <a:srgbClr val="000000"/>
-              </a:buClr>
-              <a:buFont typeface="Arial"/>
-              <a:buChar char="»"/>
-            </a:pPr>
-            <a:r>
-              <a:rPr lang="en-US" sz="1600" b="0" u="none" strike="noStrike">
-                <a:solidFill>
-                  <a:schemeClr val="dk1"/>
-                </a:solidFill>
-                <a:effectLst/>
-                <a:uFillTx/>
-                <a:latin typeface="Calibri"/>
-              </a:rPr>
-              <a:t>Fifth level</a:t>
-            </a:r>
-            <a:endParaRPr lang="en-US" sz="1600" b="0" u="none" strike="noStrike">
-              <a:solidFill>
-                <a:schemeClr val="dk1"/>
-              </a:solidFill>
-              <a:effectLst/>
-              <a:uFillTx/>
-              <a:latin typeface="Calibri"/>
-            </a:endParaRPr>
           </a:p>
         </p:txBody>
       </p:sp>
@@ -4707,7 +4360,7 @@
           </a:ln>
         </p:spPr>
         <p:txBody>
-          <a:bodyPr lIns="91440" rIns="91440" tIns="45720" bIns="45720" anchor="ctr">
+          <a:bodyPr lIns="91440" tIns="45720" rIns="91440" bIns="45720" anchor="ctr">
             <a:noAutofit/>
           </a:bodyPr>
           <a:lstStyle>
@@ -4783,7 +4436,7 @@
           </a:ln>
         </p:spPr>
         <p:txBody>
-          <a:bodyPr lIns="91440" rIns="91440" tIns="45720" bIns="45720" anchor="ctr">
+          <a:bodyPr lIns="91440" tIns="45720" rIns="91440" bIns="45720" anchor="ctr">
             <a:noAutofit/>
           </a:bodyPr>
           <a:lstStyle>
@@ -4814,14 +4467,6 @@
               </a:rPr>
               <a:t>&lt;footer&gt;</a:t>
             </a:r>
-            <a:endParaRPr lang="en-IN" sz="1400" b="0" u="none" strike="noStrike">
-              <a:solidFill>
-                <a:srgbClr val="000000"/>
-              </a:solidFill>
-              <a:effectLst/>
-              <a:uFillTx/>
-              <a:latin typeface="Times New Roman"/>
-            </a:endParaRPr>
           </a:p>
         </p:txBody>
       </p:sp>
@@ -4849,7 +4494,7 @@
           </a:ln>
         </p:spPr>
         <p:txBody>
-          <a:bodyPr lIns="91440" rIns="91440" tIns="45720" bIns="45720" anchor="ctr">
+          <a:bodyPr lIns="91440" tIns="45720" rIns="91440" bIns="45720" anchor="ctr">
             <a:noAutofit/>
           </a:bodyPr>
           <a:lstStyle>
@@ -4888,7 +4533,7 @@
                 <a:uFillTx/>
                 <a:latin typeface="Calibri"/>
               </a:rPr>
-              <a:t>&lt;number&gt;</a:t>
+              <a:t>‹#›</a:t>
             </a:fld>
             <a:endParaRPr lang="en-IN" sz="1200" b="0" u="none" strike="noStrike">
               <a:solidFill>
@@ -4903,17 +4548,21 @@
       </p:sp>
     </p:spTree>
   </p:cSld>
+  <p:clrMapOvr>
+    <a:masterClrMapping/>
+  </p:clrMapOvr>
 </p:sldLayout>
 </file>
 
 <file path=ppt/slideLayouts/slideLayout8.xml><?xml version="1.0" encoding="utf-8"?>
-<p:sldLayout xmlns:a="http://schemas.openxmlformats.org/drawingml/2006/main" xmlns:p="http://schemas.openxmlformats.org/presentationml/2006/main" xmlns:r="http://schemas.openxmlformats.org/officeDocument/2006/relationships" xmlns:p14="http://schemas.microsoft.com/office/powerpoint/2010/main" xmlns:p15="http://schemas.microsoft.com/office/powerpoint/2012/main" xmlns:mc="http://schemas.openxmlformats.org/markup-compatibility/2006" type="titleOnly" preserve="1">
+<p:sldLayout xmlns:a="http://schemas.openxmlformats.org/drawingml/2006/main" xmlns:r="http://schemas.openxmlformats.org/officeDocument/2006/relationships" xmlns:p="http://schemas.openxmlformats.org/presentationml/2006/main" type="titleOnly" preserve="1">
   <p:cSld name="Title Only">
     <p:bg>
       <p:bgPr>
         <a:solidFill>
-          <a:srgbClr val="ffffff"/>
+          <a:srgbClr val="FFFFFF"/>
         </a:solidFill>
+        <a:effectLst/>
       </p:bgPr>
     </p:bg>
     <p:spTree>
@@ -4954,9 +4603,10 @@
           </a:ln>
         </p:spPr>
         <p:txBody>
-          <a:bodyPr lIns="91440" rIns="91440" tIns="45720" bIns="45720" anchor="ctr">
+          <a:bodyPr lIns="91440" tIns="45720" rIns="91440" bIns="45720" anchor="ctr">
             <a:noAutofit/>
           </a:bodyPr>
+          <a:lstStyle/>
           <a:p>
             <a:pPr indent="0" algn="ctr" defTabSz="457200">
               <a:lnSpc>
@@ -4975,14 +4625,6 @@
               </a:rPr>
               <a:t>Click to edit Master title style</a:t>
             </a:r>
-            <a:endParaRPr lang="en-US" sz="4400" b="0" u="none" strike="noStrike">
-              <a:solidFill>
-                <a:schemeClr val="dk1"/>
-              </a:solidFill>
-              <a:effectLst/>
-              <a:uFillTx/>
-              <a:latin typeface="Calibri"/>
-            </a:endParaRPr>
           </a:p>
         </p:txBody>
       </p:sp>
@@ -5010,7 +4652,7 @@
           </a:ln>
         </p:spPr>
         <p:txBody>
-          <a:bodyPr lIns="91440" rIns="91440" tIns="45720" bIns="45720" anchor="ctr">
+          <a:bodyPr lIns="91440" tIns="45720" rIns="91440" bIns="45720" anchor="ctr">
             <a:noAutofit/>
           </a:bodyPr>
           <a:lstStyle>
@@ -5086,7 +4728,7 @@
           </a:ln>
         </p:spPr>
         <p:txBody>
-          <a:bodyPr lIns="91440" rIns="91440" tIns="45720" bIns="45720" anchor="ctr">
+          <a:bodyPr lIns="91440" tIns="45720" rIns="91440" bIns="45720" anchor="ctr">
             <a:noAutofit/>
           </a:bodyPr>
           <a:lstStyle>
@@ -5117,14 +4759,6 @@
               </a:rPr>
               <a:t>&lt;footer&gt;</a:t>
             </a:r>
-            <a:endParaRPr lang="en-IN" sz="1400" b="0" u="none" strike="noStrike">
-              <a:solidFill>
-                <a:srgbClr val="000000"/>
-              </a:solidFill>
-              <a:effectLst/>
-              <a:uFillTx/>
-              <a:latin typeface="Times New Roman"/>
-            </a:endParaRPr>
           </a:p>
         </p:txBody>
       </p:sp>
@@ -5152,7 +4786,7 @@
           </a:ln>
         </p:spPr>
         <p:txBody>
-          <a:bodyPr lIns="91440" rIns="91440" tIns="45720" bIns="45720" anchor="ctr">
+          <a:bodyPr lIns="91440" tIns="45720" rIns="91440" bIns="45720" anchor="ctr">
             <a:noAutofit/>
           </a:bodyPr>
           <a:lstStyle>
@@ -5191,7 +4825,7 @@
                 <a:uFillTx/>
                 <a:latin typeface="Calibri"/>
               </a:rPr>
-              <a:t>&lt;number&gt;</a:t>
+              <a:t>‹#›</a:t>
             </a:fld>
             <a:endParaRPr lang="en-IN" sz="1200" b="0" u="none" strike="noStrike">
               <a:solidFill>
@@ -5228,9 +4862,10 @@
           </a:ln>
         </p:spPr>
         <p:txBody>
-          <a:bodyPr lIns="0" rIns="0" tIns="0" bIns="0" anchor="t">
+          <a:bodyPr lIns="0" tIns="0" rIns="0" bIns="0" anchor="t">
             <a:normAutofit/>
           </a:bodyPr>
+          <a:lstStyle/>
           <a:p>
             <a:pPr marL="432000" indent="-324000">
               <a:spcBef>
@@ -5254,14 +4889,6 @@
               </a:rPr>
               <a:t>Click to edit the outline text format</a:t>
             </a:r>
-            <a:endParaRPr lang="en-US" sz="3200" b="0" u="none" strike="noStrike">
-              <a:solidFill>
-                <a:schemeClr val="dk1"/>
-              </a:solidFill>
-              <a:effectLst/>
-              <a:uFillTx/>
-              <a:latin typeface="Calibri"/>
-            </a:endParaRPr>
           </a:p>
           <a:p>
             <a:pPr marL="864000" lvl="1" indent="-324000">
@@ -5286,14 +4913,6 @@
               </a:rPr>
               <a:t>Second Outline Level</a:t>
             </a:r>
-            <a:endParaRPr lang="en-US" sz="2400" b="0" u="none" strike="noStrike">
-              <a:solidFill>
-                <a:schemeClr val="dk1"/>
-              </a:solidFill>
-              <a:effectLst/>
-              <a:uFillTx/>
-              <a:latin typeface="Calibri"/>
-            </a:endParaRPr>
           </a:p>
           <a:p>
             <a:pPr marL="1296000" lvl="2" indent="-288000">
@@ -5318,14 +4937,6 @@
               </a:rPr>
               <a:t>Third Outline Level</a:t>
             </a:r>
-            <a:endParaRPr lang="en-US" sz="2000" b="0" u="none" strike="noStrike">
-              <a:solidFill>
-                <a:schemeClr val="dk1"/>
-              </a:solidFill>
-              <a:effectLst/>
-              <a:uFillTx/>
-              <a:latin typeface="Calibri"/>
-            </a:endParaRPr>
           </a:p>
           <a:p>
             <a:pPr marL="1728000" lvl="3" indent="-216000">
@@ -5350,14 +4961,6 @@
               </a:rPr>
               <a:t>Fourth Outline Level</a:t>
             </a:r>
-            <a:endParaRPr lang="en-US" sz="2000" b="0" u="none" strike="noStrike">
-              <a:solidFill>
-                <a:schemeClr val="dk1"/>
-              </a:solidFill>
-              <a:effectLst/>
-              <a:uFillTx/>
-              <a:latin typeface="Calibri"/>
-            </a:endParaRPr>
           </a:p>
           <a:p>
             <a:pPr marL="2160000" lvl="4" indent="-216000">
@@ -5382,14 +4985,6 @@
               </a:rPr>
               <a:t>Fifth Outline Level</a:t>
             </a:r>
-            <a:endParaRPr lang="en-US" sz="2000" b="0" u="none" strike="noStrike">
-              <a:solidFill>
-                <a:schemeClr val="dk1"/>
-              </a:solidFill>
-              <a:effectLst/>
-              <a:uFillTx/>
-              <a:latin typeface="Calibri"/>
-            </a:endParaRPr>
           </a:p>
           <a:p>
             <a:pPr marL="2592000" lvl="5" indent="-216000">
@@ -5414,14 +5009,6 @@
               </a:rPr>
               <a:t>Sixth Outline Level</a:t>
             </a:r>
-            <a:endParaRPr lang="en-US" sz="2000" b="0" u="none" strike="noStrike">
-              <a:solidFill>
-                <a:schemeClr val="dk1"/>
-              </a:solidFill>
-              <a:effectLst/>
-              <a:uFillTx/>
-              <a:latin typeface="Calibri"/>
-            </a:endParaRPr>
           </a:p>
           <a:p>
             <a:pPr marL="3024000" lvl="6" indent="-216000">
@@ -5446,30 +5033,26 @@
               </a:rPr>
               <a:t>Seventh Outline Level</a:t>
             </a:r>
-            <a:endParaRPr lang="en-US" sz="2000" b="0" u="none" strike="noStrike">
-              <a:solidFill>
-                <a:schemeClr val="dk1"/>
-              </a:solidFill>
-              <a:effectLst/>
-              <a:uFillTx/>
-              <a:latin typeface="Calibri"/>
-            </a:endParaRPr>
           </a:p>
         </p:txBody>
       </p:sp>
     </p:spTree>
   </p:cSld>
+  <p:clrMapOvr>
+    <a:masterClrMapping/>
+  </p:clrMapOvr>
 </p:sldLayout>
 </file>
 
 <file path=ppt/slideLayouts/slideLayout9.xml><?xml version="1.0" encoding="utf-8"?>
-<p:sldLayout xmlns:a="http://schemas.openxmlformats.org/drawingml/2006/main" xmlns:p="http://schemas.openxmlformats.org/presentationml/2006/main" xmlns:r="http://schemas.openxmlformats.org/officeDocument/2006/relationships" xmlns:p14="http://schemas.microsoft.com/office/powerpoint/2010/main" xmlns:p15="http://schemas.microsoft.com/office/powerpoint/2012/main" xmlns:mc="http://schemas.openxmlformats.org/markup-compatibility/2006" type="blank" preserve="1">
+<p:sldLayout xmlns:a="http://schemas.openxmlformats.org/drawingml/2006/main" xmlns:r="http://schemas.openxmlformats.org/officeDocument/2006/relationships" xmlns:p="http://schemas.openxmlformats.org/presentationml/2006/main" type="blank" preserve="1">
   <p:cSld name="Blank">
     <p:bg>
       <p:bgPr>
         <a:solidFill>
-          <a:srgbClr val="ffffff"/>
+          <a:srgbClr val="FFFFFF"/>
         </a:solidFill>
+        <a:effectLst/>
       </p:bgPr>
     </p:bg>
     <p:spTree>
@@ -5510,7 +5093,7 @@
           </a:ln>
         </p:spPr>
         <p:txBody>
-          <a:bodyPr lIns="91440" rIns="91440" tIns="45720" bIns="45720" anchor="ctr">
+          <a:bodyPr lIns="91440" tIns="45720" rIns="91440" bIns="45720" anchor="ctr">
             <a:noAutofit/>
           </a:bodyPr>
           <a:lstStyle>
@@ -5586,7 +5169,7 @@
           </a:ln>
         </p:spPr>
         <p:txBody>
-          <a:bodyPr lIns="91440" rIns="91440" tIns="45720" bIns="45720" anchor="ctr">
+          <a:bodyPr lIns="91440" tIns="45720" rIns="91440" bIns="45720" anchor="ctr">
             <a:noAutofit/>
           </a:bodyPr>
           <a:lstStyle>
@@ -5617,14 +5200,6 @@
               </a:rPr>
               <a:t>&lt;footer&gt;</a:t>
             </a:r>
-            <a:endParaRPr lang="en-IN" sz="1400" b="0" u="none" strike="noStrike">
-              <a:solidFill>
-                <a:srgbClr val="000000"/>
-              </a:solidFill>
-              <a:effectLst/>
-              <a:uFillTx/>
-              <a:latin typeface="Times New Roman"/>
-            </a:endParaRPr>
           </a:p>
         </p:txBody>
       </p:sp>
@@ -5652,7 +5227,7 @@
           </a:ln>
         </p:spPr>
         <p:txBody>
-          <a:bodyPr lIns="91440" rIns="91440" tIns="45720" bIns="45720" anchor="ctr">
+          <a:bodyPr lIns="91440" tIns="45720" rIns="91440" bIns="45720" anchor="ctr">
             <a:noAutofit/>
           </a:bodyPr>
           <a:lstStyle>
@@ -5691,7 +5266,7 @@
                 <a:uFillTx/>
                 <a:latin typeface="Calibri"/>
               </a:rPr>
-              <a:t>&lt;number&gt;</a:t>
+              <a:t>‹#›</a:t>
             </a:fld>
             <a:endParaRPr lang="en-IN" sz="1200" b="0" u="none" strike="noStrike">
               <a:solidFill>
@@ -5706,12 +5281,20 @@
       </p:sp>
     </p:spTree>
   </p:cSld>
+  <p:clrMapOvr>
+    <a:masterClrMapping/>
+  </p:clrMapOvr>
 </p:sldLayout>
 </file>
 
 <file path=ppt/slideMasters/slideMaster1.xml><?xml version="1.0" encoding="utf-8"?>
-<p:sldMaster xmlns:a="http://schemas.openxmlformats.org/drawingml/2006/main" xmlns:p="http://schemas.openxmlformats.org/presentationml/2006/main" xmlns:r="http://schemas.openxmlformats.org/officeDocument/2006/relationships" xmlns:p14="http://schemas.microsoft.com/office/powerpoint/2010/main" xmlns:p15="http://schemas.microsoft.com/office/powerpoint/2012/main" xmlns:mc="http://schemas.openxmlformats.org/markup-compatibility/2006">
+<p:sldMaster xmlns:a="http://schemas.openxmlformats.org/drawingml/2006/main" xmlns:r="http://schemas.openxmlformats.org/officeDocument/2006/relationships" xmlns:p="http://schemas.openxmlformats.org/presentationml/2006/main">
   <p:cSld>
+    <p:bg>
+      <p:bgRef idx="1001">
+        <a:schemeClr val="bg1"/>
+      </p:bgRef>
+    </p:bg>
     <p:spTree>
       <p:nvGrpSpPr>
         <p:cNvPr id="1" name=""/>
@@ -5730,23 +5313,303 @@
   </p:cSld>
   <p:clrMap bg1="lt1" tx1="dk1" bg2="lt2" tx2="dk2" accent1="accent1" accent2="accent2" accent3="accent3" accent4="accent4" accent5="accent5" accent6="accent6" hlink="hlink" folHlink="folHlink"/>
   <p:sldLayoutIdLst>
-    <p:sldLayoutId id="2147483649" r:id="rId2"/>
-    <p:sldLayoutId id="2147483650" r:id="rId3"/>
-    <p:sldLayoutId id="2147483651" r:id="rId4"/>
-    <p:sldLayoutId id="2147483652" r:id="rId5"/>
-    <p:sldLayoutId id="2147483653" r:id="rId6"/>
-    <p:sldLayoutId id="2147483654" r:id="rId7"/>
-    <p:sldLayoutId id="2147483655" r:id="rId8"/>
-    <p:sldLayoutId id="2147483656" r:id="rId9"/>
-    <p:sldLayoutId id="2147483657" r:id="rId10"/>
-    <p:sldLayoutId id="2147483658" r:id="rId11"/>
-    <p:sldLayoutId id="2147483659" r:id="rId12"/>
+    <p:sldLayoutId id="2147483649" r:id="rId1"/>
+    <p:sldLayoutId id="2147483650" r:id="rId2"/>
+    <p:sldLayoutId id="2147483651" r:id="rId3"/>
+    <p:sldLayoutId id="2147483652" r:id="rId4"/>
+    <p:sldLayoutId id="2147483653" r:id="rId5"/>
+    <p:sldLayoutId id="2147483654" r:id="rId6"/>
+    <p:sldLayoutId id="2147483655" r:id="rId7"/>
+    <p:sldLayoutId id="2147483656" r:id="rId8"/>
+    <p:sldLayoutId id="2147483657" r:id="rId9"/>
+    <p:sldLayoutId id="2147483658" r:id="rId10"/>
+    <p:sldLayoutId id="2147483659" r:id="rId11"/>
   </p:sldLayoutIdLst>
+  <p:txStyles>
+    <p:titleStyle>
+      <a:lvl1pPr algn="l" defTabSz="914400" rtl="0" eaLnBrk="1" latinLnBrk="0" hangingPunct="1">
+        <a:lnSpc>
+          <a:spcPct val="90000"/>
+        </a:lnSpc>
+        <a:spcBef>
+          <a:spcPct val="0"/>
+        </a:spcBef>
+        <a:buNone/>
+        <a:defRPr sz="4400" kern="1200">
+          <a:solidFill>
+            <a:schemeClr val="tx1"/>
+          </a:solidFill>
+          <a:latin typeface="+mj-lt"/>
+          <a:ea typeface="+mj-ea"/>
+          <a:cs typeface="+mj-cs"/>
+        </a:defRPr>
+      </a:lvl1pPr>
+    </p:titleStyle>
+    <p:bodyStyle>
+      <a:lvl1pPr marL="228600" indent="-228600" algn="l" defTabSz="914400" rtl="0" eaLnBrk="1" latinLnBrk="0" hangingPunct="1">
+        <a:lnSpc>
+          <a:spcPct val="90000"/>
+        </a:lnSpc>
+        <a:spcBef>
+          <a:spcPts val="1000"/>
+        </a:spcBef>
+        <a:buFont typeface="Arial" panose="020B0604020202020204" pitchFamily="34" charset="0"/>
+        <a:buChar char="•"/>
+        <a:defRPr sz="2800" kern="1200">
+          <a:solidFill>
+            <a:schemeClr val="tx1"/>
+          </a:solidFill>
+          <a:latin typeface="+mn-lt"/>
+          <a:ea typeface="+mn-ea"/>
+          <a:cs typeface="+mn-cs"/>
+        </a:defRPr>
+      </a:lvl1pPr>
+      <a:lvl2pPr marL="685800" indent="-228600" algn="l" defTabSz="914400" rtl="0" eaLnBrk="1" latinLnBrk="0" hangingPunct="1">
+        <a:lnSpc>
+          <a:spcPct val="90000"/>
+        </a:lnSpc>
+        <a:spcBef>
+          <a:spcPts val="500"/>
+        </a:spcBef>
+        <a:buFont typeface="Arial" panose="020B0604020202020204" pitchFamily="34" charset="0"/>
+        <a:buChar char="•"/>
+        <a:defRPr sz="2400" kern="1200">
+          <a:solidFill>
+            <a:schemeClr val="tx1"/>
+          </a:solidFill>
+          <a:latin typeface="+mn-lt"/>
+          <a:ea typeface="+mn-ea"/>
+          <a:cs typeface="+mn-cs"/>
+        </a:defRPr>
+      </a:lvl2pPr>
+      <a:lvl3pPr marL="1143000" indent="-228600" algn="l" defTabSz="914400" rtl="0" eaLnBrk="1" latinLnBrk="0" hangingPunct="1">
+        <a:lnSpc>
+          <a:spcPct val="90000"/>
+        </a:lnSpc>
+        <a:spcBef>
+          <a:spcPts val="500"/>
+        </a:spcBef>
+        <a:buFont typeface="Arial" panose="020B0604020202020204" pitchFamily="34" charset="0"/>
+        <a:buChar char="•"/>
+        <a:defRPr sz="2000" kern="1200">
+          <a:solidFill>
+            <a:schemeClr val="tx1"/>
+          </a:solidFill>
+          <a:latin typeface="+mn-lt"/>
+          <a:ea typeface="+mn-ea"/>
+          <a:cs typeface="+mn-cs"/>
+        </a:defRPr>
+      </a:lvl3pPr>
+      <a:lvl4pPr marL="1600200" indent="-228600" algn="l" defTabSz="914400" rtl="0" eaLnBrk="1" latinLnBrk="0" hangingPunct="1">
+        <a:lnSpc>
+          <a:spcPct val="90000"/>
+        </a:lnSpc>
+        <a:spcBef>
+          <a:spcPts val="500"/>
+        </a:spcBef>
+        <a:buFont typeface="Arial" panose="020B0604020202020204" pitchFamily="34" charset="0"/>
+        <a:buChar char="•"/>
+        <a:defRPr sz="1800" kern="1200">
+          <a:solidFill>
+            <a:schemeClr val="tx1"/>
+          </a:solidFill>
+          <a:latin typeface="+mn-lt"/>
+          <a:ea typeface="+mn-ea"/>
+          <a:cs typeface="+mn-cs"/>
+        </a:defRPr>
+      </a:lvl4pPr>
+      <a:lvl5pPr marL="2057400" indent="-228600" algn="l" defTabSz="914400" rtl="0" eaLnBrk="1" latinLnBrk="0" hangingPunct="1">
+        <a:lnSpc>
+          <a:spcPct val="90000"/>
+        </a:lnSpc>
+        <a:spcBef>
+          <a:spcPts val="500"/>
+        </a:spcBef>
+        <a:buFont typeface="Arial" panose="020B0604020202020204" pitchFamily="34" charset="0"/>
+        <a:buChar char="•"/>
+        <a:defRPr sz="1800" kern="1200">
+          <a:solidFill>
+            <a:schemeClr val="tx1"/>
+          </a:solidFill>
+          <a:latin typeface="+mn-lt"/>
+          <a:ea typeface="+mn-ea"/>
+          <a:cs typeface="+mn-cs"/>
+        </a:defRPr>
+      </a:lvl5pPr>
+      <a:lvl6pPr marL="2514600" indent="-228600" algn="l" defTabSz="914400" rtl="0" eaLnBrk="1" latinLnBrk="0" hangingPunct="1">
+        <a:lnSpc>
+          <a:spcPct val="90000"/>
+        </a:lnSpc>
+        <a:spcBef>
+          <a:spcPts val="500"/>
+        </a:spcBef>
+        <a:buFont typeface="Arial" panose="020B0604020202020204" pitchFamily="34" charset="0"/>
+        <a:buChar char="•"/>
+        <a:defRPr sz="1800" kern="1200">
+          <a:solidFill>
+            <a:schemeClr val="tx1"/>
+          </a:solidFill>
+          <a:latin typeface="+mn-lt"/>
+          <a:ea typeface="+mn-ea"/>
+          <a:cs typeface="+mn-cs"/>
+        </a:defRPr>
+      </a:lvl6pPr>
+      <a:lvl7pPr marL="2971800" indent="-228600" algn="l" defTabSz="914400" rtl="0" eaLnBrk="1" latinLnBrk="0" hangingPunct="1">
+        <a:lnSpc>
+          <a:spcPct val="90000"/>
+        </a:lnSpc>
+        <a:spcBef>
+          <a:spcPts val="500"/>
+        </a:spcBef>
+        <a:buFont typeface="Arial" panose="020B0604020202020204" pitchFamily="34" charset="0"/>
+        <a:buChar char="•"/>
+        <a:defRPr sz="1800" kern="1200">
+          <a:solidFill>
+            <a:schemeClr val="tx1"/>
+          </a:solidFill>
+          <a:latin typeface="+mn-lt"/>
+          <a:ea typeface="+mn-ea"/>
+          <a:cs typeface="+mn-cs"/>
+        </a:defRPr>
+      </a:lvl7pPr>
+      <a:lvl8pPr marL="3429000" indent="-228600" algn="l" defTabSz="914400" rtl="0" eaLnBrk="1" latinLnBrk="0" hangingPunct="1">
+        <a:lnSpc>
+          <a:spcPct val="90000"/>
+        </a:lnSpc>
+        <a:spcBef>
+          <a:spcPts val="500"/>
+        </a:spcBef>
+        <a:buFont typeface="Arial" panose="020B0604020202020204" pitchFamily="34" charset="0"/>
+        <a:buChar char="•"/>
+        <a:defRPr sz="1800" kern="1200">
+          <a:solidFill>
+            <a:schemeClr val="tx1"/>
+          </a:solidFill>
+          <a:latin typeface="+mn-lt"/>
+          <a:ea typeface="+mn-ea"/>
+          <a:cs typeface="+mn-cs"/>
+        </a:defRPr>
+      </a:lvl8pPr>
+      <a:lvl9pPr marL="3886200" indent="-228600" algn="l" defTabSz="914400" rtl="0" eaLnBrk="1" latinLnBrk="0" hangingPunct="1">
+        <a:lnSpc>
+          <a:spcPct val="90000"/>
+        </a:lnSpc>
+        <a:spcBef>
+          <a:spcPts val="500"/>
+        </a:spcBef>
+        <a:buFont typeface="Arial" panose="020B0604020202020204" pitchFamily="34" charset="0"/>
+        <a:buChar char="•"/>
+        <a:defRPr sz="1800" kern="1200">
+          <a:solidFill>
+            <a:schemeClr val="tx1"/>
+          </a:solidFill>
+          <a:latin typeface="+mn-lt"/>
+          <a:ea typeface="+mn-ea"/>
+          <a:cs typeface="+mn-cs"/>
+        </a:defRPr>
+      </a:lvl9pPr>
+    </p:bodyStyle>
+    <p:otherStyle>
+      <a:defPPr>
+        <a:defRPr lang="en-US"/>
+      </a:defPPr>
+      <a:lvl1pPr marL="0" algn="l" defTabSz="914400" rtl="0" eaLnBrk="1" latinLnBrk="0" hangingPunct="1">
+        <a:defRPr sz="1800" kern="1200">
+          <a:solidFill>
+            <a:schemeClr val="tx1"/>
+          </a:solidFill>
+          <a:latin typeface="+mn-lt"/>
+          <a:ea typeface="+mn-ea"/>
+          <a:cs typeface="+mn-cs"/>
+        </a:defRPr>
+      </a:lvl1pPr>
+      <a:lvl2pPr marL="457200" algn="l" defTabSz="914400" rtl="0" eaLnBrk="1" latinLnBrk="0" hangingPunct="1">
+        <a:defRPr sz="1800" kern="1200">
+          <a:solidFill>
+            <a:schemeClr val="tx1"/>
+          </a:solidFill>
+          <a:latin typeface="+mn-lt"/>
+          <a:ea typeface="+mn-ea"/>
+          <a:cs typeface="+mn-cs"/>
+        </a:defRPr>
+      </a:lvl2pPr>
+      <a:lvl3pPr marL="914400" algn="l" defTabSz="914400" rtl="0" eaLnBrk="1" latinLnBrk="0" hangingPunct="1">
+        <a:defRPr sz="1800" kern="1200">
+          <a:solidFill>
+            <a:schemeClr val="tx1"/>
+          </a:solidFill>
+          <a:latin typeface="+mn-lt"/>
+          <a:ea typeface="+mn-ea"/>
+          <a:cs typeface="+mn-cs"/>
+        </a:defRPr>
+      </a:lvl3pPr>
+      <a:lvl4pPr marL="1371600" algn="l" defTabSz="914400" rtl="0" eaLnBrk="1" latinLnBrk="0" hangingPunct="1">
+        <a:defRPr sz="1800" kern="1200">
+          <a:solidFill>
+            <a:schemeClr val="tx1"/>
+          </a:solidFill>
+          <a:latin typeface="+mn-lt"/>
+          <a:ea typeface="+mn-ea"/>
+          <a:cs typeface="+mn-cs"/>
+        </a:defRPr>
+      </a:lvl4pPr>
+      <a:lvl5pPr marL="1828800" algn="l" defTabSz="914400" rtl="0" eaLnBrk="1" latinLnBrk="0" hangingPunct="1">
+        <a:defRPr sz="1800" kern="1200">
+          <a:solidFill>
+            <a:schemeClr val="tx1"/>
+          </a:solidFill>
+          <a:latin typeface="+mn-lt"/>
+          <a:ea typeface="+mn-ea"/>
+          <a:cs typeface="+mn-cs"/>
+        </a:defRPr>
+      </a:lvl5pPr>
+      <a:lvl6pPr marL="2286000" algn="l" defTabSz="914400" rtl="0" eaLnBrk="1" latinLnBrk="0" hangingPunct="1">
+        <a:defRPr sz="1800" kern="1200">
+          <a:solidFill>
+            <a:schemeClr val="tx1"/>
+          </a:solidFill>
+          <a:latin typeface="+mn-lt"/>
+          <a:ea typeface="+mn-ea"/>
+          <a:cs typeface="+mn-cs"/>
+        </a:defRPr>
+      </a:lvl6pPr>
+      <a:lvl7pPr marL="2743200" algn="l" defTabSz="914400" rtl="0" eaLnBrk="1" latinLnBrk="0" hangingPunct="1">
+        <a:defRPr sz="1800" kern="1200">
+          <a:solidFill>
+            <a:schemeClr val="tx1"/>
+          </a:solidFill>
+          <a:latin typeface="+mn-lt"/>
+          <a:ea typeface="+mn-ea"/>
+          <a:cs typeface="+mn-cs"/>
+        </a:defRPr>
+      </a:lvl7pPr>
+      <a:lvl8pPr marL="3200400" algn="l" defTabSz="914400" rtl="0" eaLnBrk="1" latinLnBrk="0" hangingPunct="1">
+        <a:defRPr sz="1800" kern="1200">
+          <a:solidFill>
+            <a:schemeClr val="tx1"/>
+          </a:solidFill>
+          <a:latin typeface="+mn-lt"/>
+          <a:ea typeface="+mn-ea"/>
+          <a:cs typeface="+mn-cs"/>
+        </a:defRPr>
+      </a:lvl8pPr>
+      <a:lvl9pPr marL="3657600" algn="l" defTabSz="914400" rtl="0" eaLnBrk="1" latinLnBrk="0" hangingPunct="1">
+        <a:defRPr sz="1800" kern="1200">
+          <a:solidFill>
+            <a:schemeClr val="tx1"/>
+          </a:solidFill>
+          <a:latin typeface="+mn-lt"/>
+          <a:ea typeface="+mn-ea"/>
+          <a:cs typeface="+mn-cs"/>
+        </a:defRPr>
+      </a:lvl9pPr>
+    </p:otherStyle>
+  </p:txStyles>
 </p:sldMaster>
 </file>
 
 <file path=ppt/slides/slide1.xml><?xml version="1.0" encoding="utf-8"?>
-<p:sld xmlns:a="http://schemas.openxmlformats.org/drawingml/2006/main" xmlns:p="http://schemas.openxmlformats.org/presentationml/2006/main" xmlns:r="http://schemas.openxmlformats.org/officeDocument/2006/relationships" xmlns:p14="http://schemas.microsoft.com/office/powerpoint/2010/main" xmlns:p15="http://schemas.microsoft.com/office/powerpoint/2012/main" xmlns:mc="http://schemas.openxmlformats.org/markup-compatibility/2006">
+<p:sld xmlns:a="http://schemas.openxmlformats.org/drawingml/2006/main" xmlns:r="http://schemas.openxmlformats.org/officeDocument/2006/relationships" xmlns:p="http://schemas.openxmlformats.org/presentationml/2006/main">
   <p:cSld>
     <p:spTree>
       <p:nvGrpSpPr>
@@ -5786,9 +5649,10 @@
           </a:ln>
         </p:spPr>
         <p:txBody>
-          <a:bodyPr lIns="91440" rIns="91440" tIns="45720" bIns="45720" anchor="ctr">
-            <a:normAutofit fontScale="85000" lnSpcReduction="19999"/>
-          </a:bodyPr>
+          <a:bodyPr lIns="91440" tIns="45720" rIns="91440" bIns="45720" anchor="ctr">
+            <a:normAutofit fontScale="90000"/>
+          </a:bodyPr>
+          <a:lstStyle/>
           <a:p>
             <a:pPr indent="0" algn="ctr" defTabSz="457200">
               <a:lnSpc>
@@ -5830,7 +5694,7 @@
         <p:spPr>
           <a:xfrm>
             <a:off x="731520" y="1097280"/>
-            <a:ext cx="5486040" cy="4571640"/>
+            <a:ext cx="11570132" cy="1629762"/>
           </a:xfrm>
           <a:prstGeom prst="rect">
             <a:avLst/>
@@ -5841,15 +5705,22 @@
           </a:ln>
         </p:spPr>
         <p:style>
-          <a:lnRef idx="0"/>
-          <a:fillRef idx="0"/>
-          <a:effectRef idx="0"/>
+          <a:lnRef idx="0">
+            <a:scrgbClr r="0" g="0" b="0"/>
+          </a:lnRef>
+          <a:fillRef idx="0">
+            <a:scrgbClr r="0" g="0" b="0"/>
+          </a:fillRef>
+          <a:effectRef idx="0">
+            <a:scrgbClr r="0" g="0" b="0"/>
+          </a:effectRef>
           <a:fontRef idx="minor"/>
         </p:style>
         <p:txBody>
-          <a:bodyPr wrap="none" lIns="90000" rIns="90000" tIns="45000" bIns="45000" anchor="t">
+          <a:bodyPr wrap="none" lIns="90000" tIns="45000" rIns="90000" bIns="45000" anchor="t">
             <a:spAutoFit/>
           </a:bodyPr>
+          <a:lstStyle/>
           <a:p>
             <a:pPr defTabSz="457200">
               <a:lnSpc>
@@ -5857,7 +5728,7 @@
               </a:lnSpc>
             </a:pPr>
             <a:r>
-              <a:rPr lang="en-US" sz="2000" b="0" u="none" strike="noStrike">
+              <a:rPr lang="en-US" sz="2000" b="0" u="none" strike="noStrike" dirty="0">
                 <a:solidFill>
                   <a:schemeClr val="dk1"/>
                 </a:solidFill>
@@ -5867,7 +5738,37 @@
               </a:rPr>
               <a:t>• Team name</a:t>
             </a:r>
-            <a:endParaRPr lang="en-IN" sz="2000" b="0" u="none" strike="noStrike">
+            <a:r>
+              <a:rPr lang="en-US" sz="2000" dirty="0">
+                <a:solidFill>
+                  <a:schemeClr val="dk1"/>
+                </a:solidFill>
+              </a:rPr>
+              <a:t> –</a:t>
+            </a:r>
+            <a:r>
+              <a:rPr lang="en-US" sz="2000" b="0" u="none" strike="noStrike" dirty="0">
+                <a:solidFill>
+                  <a:schemeClr val="dk1"/>
+                </a:solidFill>
+                <a:effectLst/>
+                <a:uFillTx/>
+                <a:latin typeface="Calibri"/>
+              </a:rPr>
+              <a:t> </a:t>
+            </a:r>
+            <a:r>
+              <a:rPr lang="en-US" sz="2000" b="0" u="none" strike="noStrike" dirty="0" err="1">
+                <a:solidFill>
+                  <a:schemeClr val="dk1"/>
+                </a:solidFill>
+                <a:effectLst/>
+                <a:uFillTx/>
+                <a:latin typeface="Calibri"/>
+              </a:rPr>
+              <a:t>Datathon_CSF</a:t>
+            </a:r>
+            <a:endParaRPr lang="en-IN" sz="2000" b="0" u="none" strike="noStrike" dirty="0">
               <a:solidFill>
                 <a:srgbClr val="000000"/>
               </a:solidFill>
@@ -5883,7 +5784,7 @@
               </a:lnSpc>
             </a:pPr>
             <a:r>
-              <a:rPr lang="en-US" sz="2000" b="0" u="none" strike="noStrike">
+              <a:rPr lang="en-US" sz="2000" b="0" u="none" strike="noStrike" dirty="0">
                 <a:solidFill>
                   <a:schemeClr val="dk1"/>
                 </a:solidFill>
@@ -5891,9 +5792,9 @@
                 <a:uFillTx/>
                 <a:latin typeface="Calibri"/>
               </a:rPr>
-              <a:t>• Members</a:t>
-            </a:r>
-            <a:endParaRPr lang="en-IN" sz="2000" b="0" u="none" strike="noStrike">
+              <a:t>• Members – Kapil, Susmit, and Aniket</a:t>
+            </a:r>
+            <a:endParaRPr lang="en-IN" sz="2000" b="0" u="none" strike="noStrike" dirty="0">
               <a:solidFill>
                 <a:srgbClr val="000000"/>
               </a:solidFill>
@@ -5909,7 +5810,7 @@
               </a:lnSpc>
             </a:pPr>
             <a:r>
-              <a:rPr lang="en-US" sz="2000" b="0" u="none" strike="noStrike">
+              <a:rPr lang="en-US" sz="2000" b="0" u="none" strike="noStrike" dirty="0">
                 <a:solidFill>
                   <a:schemeClr val="dk1"/>
                 </a:solidFill>
@@ -5917,9 +5818,9 @@
                 <a:uFillTx/>
                 <a:latin typeface="Calibri"/>
               </a:rPr>
-              <a:t>• Challenge area</a:t>
-            </a:r>
-            <a:endParaRPr lang="en-IN" sz="2000" b="0" u="none" strike="noStrike">
+              <a:t>• Challenge area –  Prepare Policy level insights from large-scale student assessments</a:t>
+            </a:r>
+            <a:endParaRPr lang="en-IN" sz="2000" b="0" u="none" strike="noStrike" dirty="0">
               <a:solidFill>
                 <a:srgbClr val="000000"/>
               </a:solidFill>
@@ -5935,7 +5836,7 @@
               </a:lnSpc>
             </a:pPr>
             <a:r>
-              <a:rPr lang="en-US" sz="2000" b="0" u="none" strike="noStrike">
+              <a:rPr lang="en-US" sz="2000" b="0" u="none" strike="noStrike" dirty="0">
                 <a:solidFill>
                   <a:schemeClr val="dk1"/>
                 </a:solidFill>
@@ -5943,9 +5844,9 @@
                 <a:uFillTx/>
                 <a:latin typeface="Calibri"/>
               </a:rPr>
-              <a:t>• One-line solution</a:t>
-            </a:r>
-            <a:endParaRPr lang="en-IN" sz="2000" b="0" u="none" strike="noStrike">
+              <a:t>• One-line solution – Identify competencies and geographies to anchor numeracy interventions at school level</a:t>
+            </a:r>
+            <a:endParaRPr lang="en-IN" sz="2000" b="0" u="none" strike="noStrike" dirty="0">
               <a:solidFill>
                 <a:srgbClr val="000000"/>
               </a:solidFill>
@@ -5961,7 +5862,7 @@
               </a:lnSpc>
             </a:pPr>
             <a:r>
-              <a:rPr lang="en-US" sz="2000" b="0" u="none" strike="noStrike">
+              <a:rPr lang="en-US" sz="2000" b="0" u="none" strike="noStrike" dirty="0">
                 <a:solidFill>
                   <a:schemeClr val="dk1"/>
                 </a:solidFill>
@@ -5969,9 +5870,9 @@
                 <a:uFillTx/>
                 <a:latin typeface="Calibri"/>
               </a:rPr>
-              <a:t>• Contact</a:t>
-            </a:r>
-            <a:endParaRPr lang="en-IN" sz="2000" b="0" u="none" strike="noStrike">
+              <a:t>• Contact – Central Square Foundation</a:t>
+            </a:r>
+            <a:endParaRPr lang="en-IN" sz="2000" b="0" u="none" strike="noStrike" dirty="0">
               <a:solidFill>
                 <a:srgbClr val="000000"/>
               </a:solidFill>
@@ -6016,19 +5917,14 @@
       </p:sp>
     </p:spTree>
   </p:cSld>
-  <mc:AlternateContent>
-    <mc:Choice Requires="p14">
-      <p:transition spd="slow" p14:dur="2000"/>
-    </mc:Choice>
-    <mc:Fallback>
-      <p:transition spd="slow"/>
-    </mc:Fallback>
-  </mc:AlternateContent>
+  <p:clrMapOvr>
+    <a:masterClrMapping/>
+  </p:clrMapOvr>
 </p:sld>
 </file>
 
 <file path=ppt/slides/slide10.xml><?xml version="1.0" encoding="utf-8"?>
-<p:sld xmlns:a="http://schemas.openxmlformats.org/drawingml/2006/main" xmlns:p="http://schemas.openxmlformats.org/presentationml/2006/main" xmlns:r="http://schemas.openxmlformats.org/officeDocument/2006/relationships" xmlns:p14="http://schemas.microsoft.com/office/powerpoint/2010/main" xmlns:p15="http://schemas.microsoft.com/office/powerpoint/2012/main" xmlns:mc="http://schemas.openxmlformats.org/markup-compatibility/2006">
+<p:sld xmlns:a="http://schemas.openxmlformats.org/drawingml/2006/main" xmlns:r="http://schemas.openxmlformats.org/officeDocument/2006/relationships" xmlns:p="http://schemas.openxmlformats.org/presentationml/2006/main">
   <p:cSld>
     <p:spTree>
       <p:nvGrpSpPr>
@@ -6068,9 +5964,10 @@
           </a:ln>
         </p:spPr>
         <p:txBody>
-          <a:bodyPr lIns="91440" rIns="91440" tIns="45720" bIns="45720" anchor="ctr">
-            <a:normAutofit fontScale="85000" lnSpcReduction="19999"/>
-          </a:bodyPr>
+          <a:bodyPr lIns="91440" tIns="45720" rIns="91440" bIns="45720" anchor="ctr">
+            <a:normAutofit fontScale="90000"/>
+          </a:bodyPr>
+          <a:lstStyle/>
           <a:p>
             <a:pPr indent="0" algn="ctr" defTabSz="457200">
               <a:lnSpc>
@@ -6112,7 +6009,7 @@
         <p:spPr>
           <a:xfrm>
             <a:off x="731520" y="1097280"/>
-            <a:ext cx="5486040" cy="4571640"/>
+            <a:ext cx="10728960" cy="4571640"/>
           </a:xfrm>
           <a:prstGeom prst="rect">
             <a:avLst/>
@@ -6123,33 +6020,50 @@
           </a:ln>
         </p:spPr>
         <p:style>
-          <a:lnRef idx="0"/>
-          <a:fillRef idx="0"/>
-          <a:effectRef idx="0"/>
+          <a:lnRef idx="0">
+            <a:scrgbClr r="0" g="0" b="0"/>
+          </a:lnRef>
+          <a:fillRef idx="0">
+            <a:scrgbClr r="0" g="0" b="0"/>
+          </a:fillRef>
+          <a:effectRef idx="0">
+            <a:scrgbClr r="0" g="0" b="0"/>
+          </a:effectRef>
           <a:fontRef idx="minor"/>
         </p:style>
         <p:txBody>
-          <a:bodyPr wrap="none" lIns="90000" rIns="90000" tIns="45000" bIns="45000" anchor="t">
-            <a:spAutoFit/>
-          </a:bodyPr>
+          <a:bodyPr wrap="square" lIns="90000" tIns="45000" rIns="90000" bIns="45000" anchor="t">
+            <a:noAutofit/>
+          </a:bodyPr>
+          <a:lstStyle/>
           <a:p>
             <a:pPr defTabSz="457200">
               <a:lnSpc>
                 <a:spcPct val="100000"/>
               </a:lnSpc>
-            </a:pPr>
-            <a:r>
-              <a:rPr lang="en-US" sz="2000" b="0" u="none" strike="noStrike">
-                <a:solidFill>
-                  <a:schemeClr val="dk1"/>
-                </a:solidFill>
-                <a:effectLst/>
-                <a:uFillTx/>
-                <a:latin typeface="Calibri"/>
-              </a:rPr>
-              <a:t>• Novelty</a:t>
-            </a:r>
-            <a:endParaRPr lang="en-IN" sz="2000" b="0" u="none" strike="noStrike">
+              <a:spcAft>
+                <a:spcPts val="1000"/>
+              </a:spcAft>
+            </a:pPr>
+            <a:r>
+              <a:rPr sz="2000" b="1" dirty="0">
+                <a:solidFill>
+                  <a:srgbClr val="000000"/>
+                </a:solidFill>
+                <a:latin typeface="Calibri"/>
+              </a:rPr>
+              <a:t>• Novelty: </a:t>
+            </a:r>
+            <a:r>
+              <a:rPr sz="2000" b="0" dirty="0">
+                <a:solidFill>
+                  <a:srgbClr val="000000"/>
+                </a:solidFill>
+                <a:latin typeface="Calibri"/>
+              </a:rPr>
+              <a:t>Treated “the assessment just reached weaker children” as a null hypothesis and tested it six independent ways; used a fixed-GP panel design to strip out participation-composition effects; built an automatic reliability gate that refuses low-quality external joins; reported the team's own pipeline bugs and their exact numeric impact rather than quietly fixing them.</a:t>
+            </a:r>
+            <a:endParaRPr lang="en-IN" sz="3600" b="0" u="none" strike="noStrike" dirty="0">
               <a:solidFill>
                 <a:srgbClr val="000000"/>
               </a:solidFill>
@@ -6159,82 +6073,142 @@
             </a:endParaRPr>
           </a:p>
           <a:p>
-            <a:pPr defTabSz="457200">
-              <a:lnSpc>
-                <a:spcPct val="100000"/>
-              </a:lnSpc>
-            </a:pPr>
-            <a:r>
-              <a:rPr lang="en-US" sz="2000" b="0" u="none" strike="noStrike">
-                <a:solidFill>
-                  <a:schemeClr val="dk1"/>
-                </a:solidFill>
-                <a:effectLst/>
-                <a:uFillTx/>
-                <a:latin typeface="Calibri"/>
-              </a:rPr>
-              <a:t>• Scalability</a:t>
-            </a:r>
-            <a:endParaRPr lang="en-IN" sz="2000" b="0" u="none" strike="noStrike">
-              <a:solidFill>
-                <a:srgbClr val="000000"/>
-              </a:solidFill>
-              <a:effectLst/>
-              <a:uFillTx/>
-              <a:latin typeface="Arial"/>
-            </a:endParaRPr>
-          </a:p>
-          <a:p>
-            <a:pPr defTabSz="457200">
-              <a:lnSpc>
-                <a:spcPct val="100000"/>
-              </a:lnSpc>
-            </a:pPr>
-            <a:r>
-              <a:rPr lang="en-US" sz="2000" b="0" u="none" strike="noStrike">
-                <a:solidFill>
-                  <a:schemeClr val="dk1"/>
-                </a:solidFill>
-                <a:effectLst/>
-                <a:uFillTx/>
-                <a:latin typeface="Calibri"/>
-              </a:rPr>
-              <a:t>• Limitations</a:t>
-            </a:r>
-            <a:endParaRPr lang="en-IN" sz="2000" b="0" u="none" strike="noStrike">
-              <a:solidFill>
-                <a:srgbClr val="000000"/>
-              </a:solidFill>
-              <a:effectLst/>
-              <a:uFillTx/>
-              <a:latin typeface="Arial"/>
-            </a:endParaRPr>
-          </a:p>
-          <a:p>
-            <a:pPr defTabSz="457200">
-              <a:lnSpc>
-                <a:spcPct val="100000"/>
-              </a:lnSpc>
-            </a:pPr>
-            <a:r>
-              <a:rPr lang="en-US" sz="2000" b="0" u="none" strike="noStrike">
-                <a:solidFill>
-                  <a:schemeClr val="dk1"/>
-                </a:solidFill>
-                <a:effectLst/>
-                <a:uFillTx/>
-                <a:latin typeface="Calibri"/>
-              </a:rPr>
-              <a:t>• Expected impact</a:t>
-            </a:r>
-            <a:endParaRPr lang="en-IN" sz="2000" b="0" u="none" strike="noStrike">
-              <a:solidFill>
-                <a:srgbClr val="000000"/>
-              </a:solidFill>
-              <a:effectLst/>
-              <a:uFillTx/>
-              <a:latin typeface="Arial"/>
-            </a:endParaRPr>
+            <a:pPr>
+              <a:lnSpc>
+                <a:spcPct val="100000"/>
+              </a:lnSpc>
+              <a:spcAft>
+                <a:spcPts val="1000"/>
+              </a:spcAft>
+            </a:pPr>
+            <a:r>
+              <a:rPr sz="2000" b="1" dirty="0">
+                <a:solidFill>
+                  <a:srgbClr val="000000"/>
+                </a:solidFill>
+                <a:latin typeface="Calibri"/>
+              </a:rPr>
+              <a:t>• Scalability: </a:t>
+            </a:r>
+            <a:r>
+              <a:rPr sz="2000" b="0" dirty="0">
+                <a:solidFill>
+                  <a:srgbClr val="000000"/>
+                </a:solidFill>
+                <a:latin typeface="Calibri"/>
+              </a:rPr>
+              <a:t>The panel-and-gate methodology </a:t>
+            </a:r>
+            <a:r>
+              <a:rPr sz="2000" b="0" dirty="0" err="1">
+                <a:solidFill>
+                  <a:srgbClr val="000000"/>
+                </a:solidFill>
+                <a:latin typeface="Calibri"/>
+              </a:rPr>
+              <a:t>generalises</a:t>
+            </a:r>
+            <a:r>
+              <a:rPr sz="2000" b="0" dirty="0">
+                <a:solidFill>
+                  <a:srgbClr val="000000"/>
+                </a:solidFill>
+                <a:latin typeface="Calibri"/>
+              </a:rPr>
+              <a:t> to any multi-year assessment </a:t>
+            </a:r>
+            <a:r>
+              <a:rPr sz="2000" b="0" dirty="0" err="1">
+                <a:solidFill>
+                  <a:srgbClr val="000000"/>
+                </a:solidFill>
+                <a:latin typeface="Calibri"/>
+              </a:rPr>
+              <a:t>programme</a:t>
+            </a:r>
+            <a:r>
+              <a:rPr sz="2000" b="0" dirty="0">
+                <a:solidFill>
+                  <a:srgbClr val="000000"/>
+                </a:solidFill>
+                <a:latin typeface="Calibri"/>
+              </a:rPr>
+              <a:t> with changing participation; the competency-correlation and variance-decomposition pipeline reruns on future contest rounds with zero changes.</a:t>
+            </a:r>
+          </a:p>
+          <a:p>
+            <a:pPr>
+              <a:lnSpc>
+                <a:spcPct val="100000"/>
+              </a:lnSpc>
+              <a:spcAft>
+                <a:spcPts val="1000"/>
+              </a:spcAft>
+            </a:pPr>
+            <a:r>
+              <a:rPr sz="2000" b="1" dirty="0">
+                <a:solidFill>
+                  <a:srgbClr val="000000"/>
+                </a:solidFill>
+                <a:latin typeface="Calibri"/>
+              </a:rPr>
+              <a:t>• Limitations: </a:t>
+            </a:r>
+            <a:r>
+              <a:rPr sz="2000" b="0" dirty="0">
+                <a:solidFill>
+                  <a:srgbClr val="000000"/>
+                </a:solidFill>
+                <a:latin typeface="Calibri"/>
+              </a:rPr>
+              <a:t>No school identifier, so within-GP variation can't be attributed to specific schools; GP-level external covariates are excluded outright (37% match, below the 60% gate); no raw item-score gain claims, only competency-level statements; all findings are observational, not causal.</a:t>
+            </a:r>
+          </a:p>
+          <a:p>
+            <a:pPr>
+              <a:lnSpc>
+                <a:spcPct val="100000"/>
+              </a:lnSpc>
+              <a:spcAft>
+                <a:spcPts val="1000"/>
+              </a:spcAft>
+            </a:pPr>
+            <a:r>
+              <a:rPr sz="2000" b="1" dirty="0">
+                <a:solidFill>
+                  <a:srgbClr val="000000"/>
+                </a:solidFill>
+                <a:latin typeface="Calibri"/>
+              </a:rPr>
+              <a:t>• Expected impact: </a:t>
+            </a:r>
+            <a:r>
+              <a:rPr sz="2000" b="0" dirty="0">
+                <a:solidFill>
+                  <a:srgbClr val="000000"/>
+                </a:solidFill>
+                <a:latin typeface="Calibri"/>
+              </a:rPr>
+              <a:t>A measurable Grade 6 multiplicative-reasoning recovery within one contest cycle if Action 2 succeeds; a narrowing 13.3pp regional gap over subsequent cycles if Action 1 succeeds; </a:t>
+            </a:r>
+            <a:r>
+              <a:rPr sz="2000" b="0" dirty="0" err="1">
+                <a:solidFill>
+                  <a:srgbClr val="000000"/>
+                </a:solidFill>
+                <a:latin typeface="Calibri"/>
+              </a:rPr>
+              <a:t>institutionalised</a:t>
+            </a:r>
+            <a:r>
+              <a:rPr sz="2000" b="0" dirty="0">
+                <a:solidFill>
+                  <a:srgbClr val="000000"/>
+                </a:solidFill>
+                <a:latin typeface="Calibri"/>
+              </a:rPr>
+              <a:t> coverage-aware reporting so this analytical trap doesn't recur.</a:t>
+            </a:r>
           </a:p>
         </p:txBody>
       </p:sp>
@@ -6272,19 +6246,14 @@
       </p:sp>
     </p:spTree>
   </p:cSld>
-  <mc:AlternateContent>
-    <mc:Choice Requires="p14">
-      <p:transition spd="slow" p14:dur="2000"/>
-    </mc:Choice>
-    <mc:Fallback>
-      <p:transition spd="slow"/>
-    </mc:Fallback>
-  </mc:AlternateContent>
+  <p:clrMapOvr>
+    <a:masterClrMapping/>
+  </p:clrMapOvr>
 </p:sld>
 </file>
 
 <file path=ppt/slides/slide11.xml><?xml version="1.0" encoding="utf-8"?>
-<p:sld xmlns:a="http://schemas.openxmlformats.org/drawingml/2006/main" xmlns:p="http://schemas.openxmlformats.org/presentationml/2006/main" xmlns:r="http://schemas.openxmlformats.org/officeDocument/2006/relationships" xmlns:p14="http://schemas.microsoft.com/office/powerpoint/2010/main" xmlns:p15="http://schemas.microsoft.com/office/powerpoint/2012/main" xmlns:mc="http://schemas.openxmlformats.org/markup-compatibility/2006">
+<p:sld xmlns:a="http://schemas.openxmlformats.org/drawingml/2006/main" xmlns:r="http://schemas.openxmlformats.org/officeDocument/2006/relationships" xmlns:p="http://schemas.openxmlformats.org/presentationml/2006/main">
   <p:cSld>
     <p:spTree>
       <p:nvGrpSpPr>
@@ -6324,9 +6293,10 @@
           </a:ln>
         </p:spPr>
         <p:txBody>
-          <a:bodyPr lIns="91440" rIns="91440" tIns="45720" bIns="45720" anchor="ctr">
-            <a:normAutofit fontScale="85000" lnSpcReduction="19999"/>
-          </a:bodyPr>
+          <a:bodyPr lIns="91440" tIns="45720" rIns="91440" bIns="45720" anchor="ctr">
+            <a:normAutofit fontScale="90000"/>
+          </a:bodyPr>
+          <a:lstStyle/>
           <a:p>
             <a:pPr indent="0" algn="ctr" defTabSz="457200">
               <a:lnSpc>
@@ -6368,7 +6338,7 @@
         <p:spPr>
           <a:xfrm>
             <a:off x="731520" y="1097280"/>
-            <a:ext cx="5486040" cy="4571640"/>
+            <a:ext cx="10728960" cy="4571640"/>
           </a:xfrm>
           <a:prstGeom prst="rect">
             <a:avLst/>
@@ -6379,33 +6349,50 @@
           </a:ln>
         </p:spPr>
         <p:style>
-          <a:lnRef idx="0"/>
-          <a:fillRef idx="0"/>
-          <a:effectRef idx="0"/>
+          <a:lnRef idx="0">
+            <a:scrgbClr r="0" g="0" b="0"/>
+          </a:lnRef>
+          <a:fillRef idx="0">
+            <a:scrgbClr r="0" g="0" b="0"/>
+          </a:fillRef>
+          <a:effectRef idx="0">
+            <a:scrgbClr r="0" g="0" b="0"/>
+          </a:effectRef>
           <a:fontRef idx="minor"/>
         </p:style>
         <p:txBody>
-          <a:bodyPr wrap="none" lIns="90000" rIns="90000" tIns="45000" bIns="45000" anchor="t">
-            <a:spAutoFit/>
-          </a:bodyPr>
+          <a:bodyPr wrap="square" lIns="90000" tIns="45000" rIns="90000" bIns="45000" anchor="t">
+            <a:noAutofit/>
+          </a:bodyPr>
+          <a:lstStyle/>
           <a:p>
             <a:pPr defTabSz="457200">
               <a:lnSpc>
                 <a:spcPct val="100000"/>
               </a:lnSpc>
-            </a:pPr>
-            <a:r>
-              <a:rPr lang="en-US" sz="2000" b="0" u="none" strike="noStrike">
-                <a:solidFill>
-                  <a:schemeClr val="dk1"/>
-                </a:solidFill>
-                <a:effectLst/>
-                <a:uFillTx/>
-                <a:latin typeface="Calibri"/>
-              </a:rPr>
-              <a:t>• Top takeaways</a:t>
-            </a:r>
-            <a:endParaRPr lang="en-IN" sz="2000" b="0" u="none" strike="noStrike">
+              <a:spcAft>
+                <a:spcPts val="1000"/>
+              </a:spcAft>
+            </a:pPr>
+            <a:r>
+              <a:rPr sz="2400" b="1" dirty="0">
+                <a:solidFill>
+                  <a:srgbClr val="000000"/>
+                </a:solidFill>
+                <a:latin typeface="Calibri"/>
+              </a:rPr>
+              <a:t>• Top takeaways: </a:t>
+            </a:r>
+            <a:r>
+              <a:rPr sz="2400" b="0" dirty="0">
+                <a:solidFill>
+                  <a:srgbClr val="000000"/>
+                </a:solidFill>
+                <a:latin typeface="Calibri"/>
+              </a:rPr>
+              <a:t>Grade 6 multiplicative reasoning has genuinely collapsed, confirmed by three independent methods. The learning gap lives mostly inside Gram Panchayats (78.1% of variance), not between districts. Kalyana Karnataka's 13.3pp gap is a resourcing problem, and it's widening. Gender is real but small. Two external assessments corroborate the district-level map.</a:t>
+            </a:r>
+            <a:endParaRPr lang="en-IN" sz="4000" b="0" u="none" strike="noStrike" dirty="0">
               <a:solidFill>
                 <a:srgbClr val="000000"/>
               </a:solidFill>
@@ -6415,56 +6402,32 @@
             </a:endParaRPr>
           </a:p>
           <a:p>
-            <a:pPr defTabSz="457200">
-              <a:lnSpc>
-                <a:spcPct val="100000"/>
-              </a:lnSpc>
-            </a:pPr>
-            <a:r>
-              <a:rPr lang="en-US" sz="2000" b="0" u="none" strike="noStrike">
-                <a:solidFill>
-                  <a:schemeClr val="dk1"/>
-                </a:solidFill>
-                <a:effectLst/>
-                <a:uFillTx/>
-                <a:latin typeface="Calibri"/>
-              </a:rPr>
-              <a:t>• Next steps</a:t>
-            </a:r>
-            <a:endParaRPr lang="en-IN" sz="2000" b="0" u="none" strike="noStrike">
-              <a:solidFill>
-                <a:srgbClr val="000000"/>
-              </a:solidFill>
-              <a:effectLst/>
-              <a:uFillTx/>
-              <a:latin typeface="Arial"/>
-            </a:endParaRPr>
-          </a:p>
-          <a:p>
-            <a:pPr defTabSz="457200">
-              <a:lnSpc>
-                <a:spcPct val="100000"/>
-              </a:lnSpc>
-            </a:pPr>
-            <a:r>
-              <a:rPr lang="en-US" sz="2000" b="0" u="none" strike="noStrike">
-                <a:solidFill>
-                  <a:schemeClr val="dk1"/>
-                </a:solidFill>
-                <a:effectLst/>
-                <a:uFillTx/>
-                <a:latin typeface="Calibri"/>
-              </a:rPr>
-              <a:t>• Thank you</a:t>
-            </a:r>
-            <a:endParaRPr lang="en-IN" sz="2000" b="0" u="none" strike="noStrike">
-              <a:solidFill>
-                <a:srgbClr val="000000"/>
-              </a:solidFill>
-              <a:effectLst/>
-              <a:uFillTx/>
-              <a:latin typeface="Arial"/>
-            </a:endParaRPr>
+            <a:pPr>
+              <a:lnSpc>
+                <a:spcPct val="100000"/>
+              </a:lnSpc>
+              <a:spcAft>
+                <a:spcPts val="1000"/>
+              </a:spcAft>
+            </a:pPr>
+            <a:r>
+              <a:rPr sz="2400" b="1" dirty="0">
+                <a:solidFill>
+                  <a:srgbClr val="000000"/>
+                </a:solidFill>
+                <a:latin typeface="Calibri"/>
+              </a:rPr>
+              <a:t>• Next steps: </a:t>
+            </a:r>
+            <a:r>
+              <a:rPr sz="2400" b="0" dirty="0">
+                <a:solidFill>
+                  <a:srgbClr val="000000"/>
+                </a:solidFill>
+                <a:latin typeface="Calibri"/>
+              </a:rPr>
+              <a:t>Implement the three recommendations against their stated owners and dates; re-run the fixed-GP-panel check on next year's data before declaring any recovery real; extend the reliability-gated covariate framework to GP level once better-matched inputs exist.</a:t>
+            </a:r>
           </a:p>
         </p:txBody>
       </p:sp>
@@ -6502,19 +6465,14 @@
       </p:sp>
     </p:spTree>
   </p:cSld>
-  <mc:AlternateContent>
-    <mc:Choice Requires="p14">
-      <p:transition spd="slow" p14:dur="2000"/>
-    </mc:Choice>
-    <mc:Fallback>
-      <p:transition spd="slow"/>
-    </mc:Fallback>
-  </mc:AlternateContent>
+  <p:clrMapOvr>
+    <a:masterClrMapping/>
+  </p:clrMapOvr>
 </p:sld>
 </file>
 
-<file path=ppt/slides/slide2.xml><?xml version="1.0" encoding="utf-8"?>
-<p:sld xmlns:a="http://schemas.openxmlformats.org/drawingml/2006/main" xmlns:p="http://schemas.openxmlformats.org/presentationml/2006/main" xmlns:r="http://schemas.openxmlformats.org/officeDocument/2006/relationships" xmlns:p14="http://schemas.microsoft.com/office/powerpoint/2010/main" xmlns:p15="http://schemas.microsoft.com/office/powerpoint/2012/main" xmlns:mc="http://schemas.openxmlformats.org/markup-compatibility/2006">
+<file path=ppt/slides/slide12.xml><?xml version="1.0" encoding="utf-8"?>
+<p:sld xmlns:a="http://schemas.openxmlformats.org/drawingml/2006/main" xmlns:r="http://schemas.openxmlformats.org/officeDocument/2006/relationships" xmlns:p="http://schemas.openxmlformats.org/presentationml/2006/main">
   <p:cSld>
     <p:spTree>
       <p:nvGrpSpPr>
@@ -6532,7 +6490,13 @@
       </p:grpSpPr>
       <p:sp>
         <p:nvSpPr>
-          <p:cNvPr id="62" name="PlaceHolder 1"/>
+          <p:cNvPr id="4" name="Title 3">
+            <a:extLst>
+              <a:ext uri="{FF2B5EF4-FFF2-40B4-BE49-F238E27FC236}">
+                <a16:creationId xmlns:a16="http://schemas.microsoft.com/office/drawing/2014/main" id="{B0A86018-CC22-D1CF-F39D-553FDA2CF29C}"/>
+              </a:ext>
+            </a:extLst>
+          </p:cNvPr>
           <p:cNvSpPr>
             <a:spLocks noGrp="1"/>
           </p:cNvSpPr>
@@ -6540,237 +6504,45 @@
             <p:ph type="title"/>
           </p:nvPr>
         </p:nvSpPr>
-        <p:spPr>
-          <a:xfrm>
-            <a:off x="1828800" y="278640"/>
-            <a:ext cx="8229240" cy="1142640"/>
-          </a:xfrm>
-          <a:prstGeom prst="rect">
-            <a:avLst/>
-          </a:prstGeom>
-          <a:noFill/>
-          <a:ln w="0">
-            <a:noFill/>
-          </a:ln>
-        </p:spPr>
-        <p:txBody>
-          <a:bodyPr lIns="91440" rIns="91440" tIns="45720" bIns="45720" anchor="ctr">
-            <a:normAutofit fontScale="85000" lnSpcReduction="19999"/>
-          </a:bodyPr>
-          <a:p>
-            <a:pPr indent="0" algn="ctr" defTabSz="457200">
-              <a:lnSpc>
-                <a:spcPct val="100000"/>
-              </a:lnSpc>
-              <a:buNone/>
-            </a:pPr>
-            <a:r>
-              <a:rPr lang="en-US" sz="4400" b="0" u="none" strike="noStrike">
-                <a:solidFill>
-                  <a:schemeClr val="dk1"/>
-                </a:solidFill>
-                <a:effectLst/>
-                <a:uFillTx/>
-                <a:latin typeface="Calibri"/>
-              </a:rPr>
-              <a:t>Problem Statement</a:t>
+        <p:spPr/>
+        <p:txBody>
+          <a:bodyPr/>
+          <a:lstStyle/>
+          <a:p>
+            <a:r>
+              <a:rPr lang="en-IN" b="1" dirty="0">
+                <a:solidFill>
+                  <a:srgbClr val="000000"/>
+                </a:solidFill>
+              </a:rPr>
+              <a:t>Thank you</a:t>
             </a:r>
             <a:br>
-              <a:rPr sz="4400"/>
+              <a:rPr lang="en-IN" dirty="0">
+                <a:solidFill>
+                  <a:srgbClr val="000000"/>
+                </a:solidFill>
+              </a:rPr>
             </a:br>
-            <a:endParaRPr lang="en-US" sz="4400" b="0" u="none" strike="noStrike">
-              <a:solidFill>
-                <a:schemeClr val="dk1"/>
-              </a:solidFill>
-              <a:effectLst/>
-              <a:uFillTx/>
-              <a:latin typeface="Calibri"/>
-            </a:endParaRPr>
-          </a:p>
-        </p:txBody>
-      </p:sp>
-      <p:sp>
-        <p:nvSpPr>
-          <p:cNvPr id="63" name="TextBox 4"/>
-          <p:cNvSpPr/>
-          <p:nvPr/>
-        </p:nvSpPr>
-        <p:spPr>
-          <a:xfrm>
-            <a:off x="731520" y="1097280"/>
-            <a:ext cx="5486040" cy="4571640"/>
-          </a:xfrm>
-          <a:prstGeom prst="rect">
-            <a:avLst/>
-          </a:prstGeom>
-          <a:noFill/>
-          <a:ln w="0">
-            <a:noFill/>
-          </a:ln>
-        </p:spPr>
-        <p:style>
-          <a:lnRef idx="0"/>
-          <a:fillRef idx="0"/>
-          <a:effectRef idx="0"/>
-          <a:fontRef idx="minor"/>
-        </p:style>
-        <p:txBody>
-          <a:bodyPr wrap="none" lIns="90000" rIns="90000" tIns="45000" bIns="45000" anchor="t">
-            <a:spAutoFit/>
-          </a:bodyPr>
-          <a:p>
-            <a:pPr defTabSz="457200">
-              <a:lnSpc>
-                <a:spcPct val="100000"/>
-              </a:lnSpc>
-            </a:pPr>
-            <a:r>
-              <a:rPr lang="en-US" sz="2000" b="0" u="none" strike="noStrike">
-                <a:solidFill>
-                  <a:schemeClr val="dk1"/>
-                </a:solidFill>
-                <a:effectLst/>
-                <a:uFillTx/>
-                <a:latin typeface="Calibri"/>
-              </a:rPr>
-              <a:t>• Educational challenge</a:t>
-            </a:r>
-            <a:endParaRPr lang="en-IN" sz="2000" b="0" u="none" strike="noStrike">
-              <a:solidFill>
-                <a:srgbClr val="000000"/>
-              </a:solidFill>
-              <a:effectLst/>
-              <a:uFillTx/>
-              <a:latin typeface="Arial"/>
-            </a:endParaRPr>
-          </a:p>
-          <a:p>
-            <a:pPr defTabSz="457200">
-              <a:lnSpc>
-                <a:spcPct val="100000"/>
-              </a:lnSpc>
-            </a:pPr>
-            <a:r>
-              <a:rPr lang="en-US" sz="2000" b="0" u="none" strike="noStrike">
-                <a:solidFill>
-                  <a:schemeClr val="dk1"/>
-                </a:solidFill>
-                <a:effectLst/>
-                <a:uFillTx/>
-                <a:latin typeface="Calibri"/>
-              </a:rPr>
-              <a:t>• Objectives</a:t>
-            </a:r>
-            <a:endParaRPr lang="en-IN" sz="2000" b="0" u="none" strike="noStrike">
-              <a:solidFill>
-                <a:srgbClr val="000000"/>
-              </a:solidFill>
-              <a:effectLst/>
-              <a:uFillTx/>
-              <a:latin typeface="Arial"/>
-            </a:endParaRPr>
-          </a:p>
-          <a:p>
-            <a:pPr defTabSz="457200">
-              <a:lnSpc>
-                <a:spcPct val="100000"/>
-              </a:lnSpc>
-            </a:pPr>
-            <a:r>
-              <a:rPr lang="en-US" sz="2000" b="0" u="none" strike="noStrike">
-                <a:solidFill>
-                  <a:schemeClr val="dk1"/>
-                </a:solidFill>
-                <a:effectLst/>
-                <a:uFillTx/>
-                <a:latin typeface="Calibri"/>
-              </a:rPr>
-              <a:t>• Key questions</a:t>
-            </a:r>
-            <a:endParaRPr lang="en-IN" sz="2000" b="0" u="none" strike="noStrike">
-              <a:solidFill>
-                <a:srgbClr val="000000"/>
-              </a:solidFill>
-              <a:effectLst/>
-              <a:uFillTx/>
-              <a:latin typeface="Arial"/>
-            </a:endParaRPr>
-          </a:p>
-          <a:p>
-            <a:pPr defTabSz="457200">
-              <a:lnSpc>
-                <a:spcPct val="100000"/>
-              </a:lnSpc>
-            </a:pPr>
-            <a:r>
-              <a:rPr lang="en-US" sz="2000" b="0" u="none" strike="noStrike">
-                <a:solidFill>
-                  <a:schemeClr val="dk1"/>
-                </a:solidFill>
-                <a:effectLst/>
-                <a:uFillTx/>
-                <a:latin typeface="Calibri"/>
-              </a:rPr>
-              <a:t>• Why it matters</a:t>
-            </a:r>
-            <a:endParaRPr lang="en-IN" sz="2000" b="0" u="none" strike="noStrike">
-              <a:solidFill>
-                <a:srgbClr val="000000"/>
-              </a:solidFill>
-              <a:effectLst/>
-              <a:uFillTx/>
-              <a:latin typeface="Arial"/>
-            </a:endParaRPr>
-          </a:p>
-        </p:txBody>
-      </p:sp>
-      <p:sp>
-        <p:nvSpPr>
-          <p:cNvPr id="64" name="EvalFooter"/>
-          <p:cNvSpPr txBox="1"/>
-          <p:nvPr/>
-        </p:nvSpPr>
-        <p:spPr>
-          <a:xfrm>
-            <a:off x="457200" y="6217920"/>
-            <a:ext cx="8229600" cy="246221"/>
-          </a:xfrm>
-          <a:prstGeom prst="rect">
-            <a:avLst/>
-          </a:prstGeom>
-          <a:noFill/>
-        </p:spPr>
-        <p:txBody>
-          <a:bodyPr wrap="square">
-            <a:normAutofit/>
-          </a:bodyPr>
-          <a:lstStyle/>
-          <a:p>
-            <a:pPr>
-              <a:defRPr sz="1000"/>
-            </a:pPr>
-            <a:r>
-              <a:rPr lang="en-US" sz="1000" dirty="0"/>
-              <a:t>Evaluation: Depth of analysis | Policy relevance | Cross-dataset analysis | Innovation | Clarity of insights | Visualisation &amp; presentation</a:t>
-            </a:r>
+            <a:endParaRPr lang="en-IN" dirty="0"/>
           </a:p>
         </p:txBody>
       </p:sp>
     </p:spTree>
+    <p:extLst>
+      <p:ext uri="{BB962C8B-B14F-4D97-AF65-F5344CB8AC3E}">
+        <p14:creationId xmlns:p14="http://schemas.microsoft.com/office/powerpoint/2010/main" val="3899730301"/>
+      </p:ext>
+    </p:extLst>
   </p:cSld>
-  <mc:AlternateContent>
-    <mc:Choice Requires="p14">
-      <p:transition spd="slow" p14:dur="2000"/>
-    </mc:Choice>
-    <mc:Fallback>
-      <p:transition spd="slow"/>
-    </mc:Fallback>
-  </mc:AlternateContent>
+  <p:clrMapOvr>
+    <a:masterClrMapping/>
+  </p:clrMapOvr>
 </p:sld>
 </file>
 
-<file path=ppt/slides/slide3.xml><?xml version="1.0" encoding="utf-8"?>
-<p:sld xmlns:a="http://schemas.openxmlformats.org/drawingml/2006/main" xmlns:p="http://schemas.openxmlformats.org/presentationml/2006/main" xmlns:r="http://schemas.openxmlformats.org/officeDocument/2006/relationships" xmlns:p14="http://schemas.microsoft.com/office/powerpoint/2010/main" xmlns:p15="http://schemas.microsoft.com/office/powerpoint/2012/main" xmlns:mc="http://schemas.openxmlformats.org/markup-compatibility/2006">
+<file path=ppt/slides/slide2.xml><?xml version="1.0" encoding="utf-8"?>
+<p:sld xmlns:a="http://schemas.openxmlformats.org/drawingml/2006/main" xmlns:r="http://schemas.openxmlformats.org/officeDocument/2006/relationships" xmlns:p="http://schemas.openxmlformats.org/presentationml/2006/main">
   <p:cSld>
     <p:spTree>
       <p:nvGrpSpPr>
@@ -6788,7 +6560,7 @@
       </p:grpSpPr>
       <p:sp>
         <p:nvSpPr>
-          <p:cNvPr id="64" name="PlaceHolder 1"/>
+          <p:cNvPr id="62" name="PlaceHolder 1"/>
           <p:cNvSpPr>
             <a:spLocks noGrp="1"/>
           </p:cNvSpPr>
@@ -6798,7 +6570,7 @@
         </p:nvSpPr>
         <p:spPr>
           <a:xfrm>
-            <a:off x="1828800" y="353880"/>
+            <a:off x="1828800" y="278640"/>
             <a:ext cx="8229240" cy="1142640"/>
           </a:xfrm>
           <a:prstGeom prst="rect">
@@ -6810,9 +6582,10 @@
           </a:ln>
         </p:spPr>
         <p:txBody>
-          <a:bodyPr lIns="91440" rIns="91440" tIns="45720" bIns="45720" anchor="ctr">
-            <a:normAutofit fontScale="85000" lnSpcReduction="19999"/>
-          </a:bodyPr>
+          <a:bodyPr lIns="91440" tIns="45720" rIns="91440" bIns="45720" anchor="ctr">
+            <a:normAutofit fontScale="90000"/>
+          </a:bodyPr>
+          <a:lstStyle/>
           <a:p>
             <a:pPr indent="0" algn="ctr" defTabSz="457200">
               <a:lnSpc>
@@ -6829,7 +6602,7 @@
                 <a:uFillTx/>
                 <a:latin typeface="Calibri"/>
               </a:rPr>
-              <a:t>Dataset Understanding</a:t>
+              <a:t>Problem Statement</a:t>
             </a:r>
             <a:br>
               <a:rPr sz="4400"/>
@@ -6847,14 +6620,14 @@
       </p:sp>
       <p:sp>
         <p:nvSpPr>
-          <p:cNvPr id="65" name="TextBox 4"/>
+          <p:cNvPr id="63" name="TextBox 4"/>
           <p:cNvSpPr/>
           <p:nvPr/>
         </p:nvSpPr>
         <p:spPr>
           <a:xfrm>
             <a:off x="731520" y="1097280"/>
-            <a:ext cx="5486040" cy="4571640"/>
+            <a:ext cx="10728960" cy="4571640"/>
           </a:xfrm>
           <a:prstGeom prst="rect">
             <a:avLst/>
@@ -6865,33 +6638,68 @@
           </a:ln>
         </p:spPr>
         <p:style>
-          <a:lnRef idx="0"/>
-          <a:fillRef idx="0"/>
-          <a:effectRef idx="0"/>
+          <a:lnRef idx="0">
+            <a:scrgbClr r="0" g="0" b="0"/>
+          </a:lnRef>
+          <a:fillRef idx="0">
+            <a:scrgbClr r="0" g="0" b="0"/>
+          </a:fillRef>
+          <a:effectRef idx="0">
+            <a:scrgbClr r="0" g="0" b="0"/>
+          </a:effectRef>
           <a:fontRef idx="minor"/>
         </p:style>
         <p:txBody>
-          <a:bodyPr wrap="none" lIns="90000" rIns="90000" tIns="45000" bIns="45000" anchor="t">
-            <a:spAutoFit/>
-          </a:bodyPr>
+          <a:bodyPr wrap="square" lIns="90000" tIns="45000" rIns="90000" bIns="45000" anchor="t">
+            <a:noAutofit/>
+          </a:bodyPr>
+          <a:lstStyle/>
           <a:p>
             <a:pPr defTabSz="457200">
               <a:lnSpc>
                 <a:spcPct val="100000"/>
               </a:lnSpc>
-            </a:pPr>
-            <a:r>
-              <a:rPr lang="en-US" sz="2000" b="0" u="none" strike="noStrike">
-                <a:solidFill>
-                  <a:schemeClr val="dk1"/>
-                </a:solidFill>
-                <a:effectLst/>
-                <a:uFillTx/>
-                <a:latin typeface="Calibri"/>
-              </a:rPr>
-              <a:t>• Dataset summary</a:t>
-            </a:r>
-            <a:endParaRPr lang="en-IN" sz="2000" b="0" u="none" strike="noStrike">
+              <a:spcAft>
+                <a:spcPts val="1000"/>
+              </a:spcAft>
+            </a:pPr>
+            <a:r>
+              <a:rPr sz="2000" b="1" dirty="0">
+                <a:solidFill>
+                  <a:srgbClr val="000000"/>
+                </a:solidFill>
+                <a:latin typeface="Calibri"/>
+              </a:rPr>
+              <a:t>Educational challenge: </a:t>
+            </a:r>
+            <a:r>
+              <a:rPr sz="2000" b="0" dirty="0">
+                <a:solidFill>
+                  <a:srgbClr val="000000"/>
+                </a:solidFill>
+                <a:latin typeface="Calibri"/>
+              </a:rPr>
+              <a:t>Karnataka's rural government-school children in Grades 4-6 take an annual </a:t>
+            </a:r>
+            <a:r>
+              <a:rPr sz="2000" b="0" dirty="0" err="1">
+                <a:solidFill>
+                  <a:srgbClr val="000000"/>
+                </a:solidFill>
+                <a:latin typeface="Calibri"/>
+              </a:rPr>
+              <a:t>maths</a:t>
+            </a:r>
+            <a:r>
+              <a:rPr sz="2000" b="0" dirty="0">
+                <a:solidFill>
+                  <a:srgbClr val="000000"/>
+                </a:solidFill>
+                <a:latin typeface="Calibri"/>
+              </a:rPr>
+              <a:t> contest, but scores are falling in the upper grades and it was unclear where, by how much, or whether it reflects real learning loss versus who happened to get tested.</a:t>
+            </a:r>
+            <a:endParaRPr lang="en-IN" sz="3600" b="0" u="none" strike="noStrike" dirty="0">
               <a:solidFill>
                 <a:srgbClr val="000000"/>
               </a:solidFill>
@@ -6901,88 +6709,121 @@
             </a:endParaRPr>
           </a:p>
           <a:p>
-            <a:pPr defTabSz="457200">
-              <a:lnSpc>
-                <a:spcPct val="100000"/>
-              </a:lnSpc>
-            </a:pPr>
-            <a:r>
-              <a:rPr lang="en-US" sz="2000" b="0" u="none" strike="noStrike">
-                <a:solidFill>
-                  <a:schemeClr val="dk1"/>
-                </a:solidFill>
-                <a:effectLst/>
-                <a:uFillTx/>
-                <a:latin typeface="Calibri"/>
-              </a:rPr>
-              <a:t>• Variables</a:t>
-            </a:r>
-            <a:endParaRPr lang="en-IN" sz="2000" b="0" u="none" strike="noStrike">
-              <a:solidFill>
-                <a:srgbClr val="000000"/>
-              </a:solidFill>
-              <a:effectLst/>
-              <a:uFillTx/>
-              <a:latin typeface="Arial"/>
-            </a:endParaRPr>
-          </a:p>
-          <a:p>
-            <a:pPr defTabSz="457200">
-              <a:lnSpc>
-                <a:spcPct val="100000"/>
-              </a:lnSpc>
-            </a:pPr>
-            <a:r>
-              <a:rPr lang="en-US" sz="2000" b="0" u="none" strike="noStrike">
-                <a:solidFill>
-                  <a:schemeClr val="dk1"/>
-                </a:solidFill>
-                <a:effectLst/>
-                <a:uFillTx/>
-                <a:latin typeface="Calibri"/>
-              </a:rPr>
-              <a:t>• Cleaning</a:t>
-            </a:r>
-            <a:endParaRPr lang="en-IN" sz="2000" b="0" u="none" strike="noStrike">
-              <a:solidFill>
-                <a:srgbClr val="000000"/>
-              </a:solidFill>
-              <a:effectLst/>
-              <a:uFillTx/>
-              <a:latin typeface="Arial"/>
-            </a:endParaRPr>
-          </a:p>
-          <a:p>
-            <a:pPr defTabSz="457200">
-              <a:lnSpc>
-                <a:spcPct val="100000"/>
-              </a:lnSpc>
-            </a:pPr>
-            <a:r>
-              <a:rPr lang="en-US" sz="2000" b="0" u="none" strike="noStrike">
-                <a:solidFill>
-                  <a:schemeClr val="dk1"/>
-                </a:solidFill>
-                <a:effectLst/>
-                <a:uFillTx/>
-                <a:latin typeface="Calibri"/>
-              </a:rPr>
-              <a:t>• Assumptions</a:t>
-            </a:r>
-            <a:endParaRPr lang="en-IN" sz="2000" b="0" u="none" strike="noStrike">
-              <a:solidFill>
-                <a:srgbClr val="000000"/>
-              </a:solidFill>
-              <a:effectLst/>
-              <a:uFillTx/>
-              <a:latin typeface="Arial"/>
-            </a:endParaRPr>
-          </a:p>
-        </p:txBody>
-      </p:sp>
-      <p:sp>
-        <p:nvSpPr>
-          <p:cNvPr id="66" name="EvalFooter"/>
+            <a:pPr>
+              <a:lnSpc>
+                <a:spcPct val="100000"/>
+              </a:lnSpc>
+              <a:spcAft>
+                <a:spcPts val="1000"/>
+              </a:spcAft>
+            </a:pPr>
+            <a:r>
+              <a:rPr sz="2000" b="1" dirty="0">
+                <a:solidFill>
+                  <a:srgbClr val="000000"/>
+                </a:solidFill>
+                <a:latin typeface="Calibri"/>
+              </a:rPr>
+              <a:t>Objectives: </a:t>
+            </a:r>
+            <a:r>
+              <a:rPr sz="2000" b="0" dirty="0">
+                <a:solidFill>
+                  <a:srgbClr val="000000"/>
+                </a:solidFill>
+                <a:latin typeface="Calibri"/>
+              </a:rPr>
+              <a:t>Confirm whether the decline is genuine and not a participation artefact; find where in the state and in which competencies the problem concentrates; identify inputs and geographies that can actually be targeted.</a:t>
+            </a:r>
+          </a:p>
+          <a:p>
+            <a:pPr>
+              <a:lnSpc>
+                <a:spcPct val="100000"/>
+              </a:lnSpc>
+              <a:spcAft>
+                <a:spcPts val="1000"/>
+              </a:spcAft>
+            </a:pPr>
+            <a:r>
+              <a:rPr sz="2000" b="1" dirty="0">
+                <a:solidFill>
+                  <a:srgbClr val="000000"/>
+                </a:solidFill>
+                <a:latin typeface="Calibri"/>
+              </a:rPr>
+              <a:t>Key questions: </a:t>
+            </a:r>
+            <a:r>
+              <a:rPr sz="2000" b="0" dirty="0">
+                <a:solidFill>
+                  <a:srgbClr val="000000"/>
+                </a:solidFill>
+                <a:latin typeface="Calibri"/>
+              </a:rPr>
+              <a:t>Did scores really fall, or did the assessment simply reach weaker children over time? Which grade and competencies drive the decline? Where does the learning gap physically live — district, block, cluster, or GP? Does gender or region explain the pattern?</a:t>
+            </a:r>
+          </a:p>
+          <a:p>
+            <a:pPr>
+              <a:lnSpc>
+                <a:spcPct val="100000"/>
+              </a:lnSpc>
+              <a:spcAft>
+                <a:spcPts val="1000"/>
+              </a:spcAft>
+            </a:pPr>
+            <a:r>
+              <a:rPr sz="2000" b="1" dirty="0">
+                <a:solidFill>
+                  <a:srgbClr val="000000"/>
+                </a:solidFill>
+                <a:latin typeface="Calibri"/>
+              </a:rPr>
+              <a:t>Why it matters: </a:t>
+            </a:r>
+            <a:r>
+              <a:rPr sz="2000" b="0" dirty="0">
+                <a:solidFill>
+                  <a:srgbClr val="000000"/>
+                </a:solidFill>
+                <a:latin typeface="Calibri"/>
+              </a:rPr>
+              <a:t>1.38 million assessment records across three years is one of the largest rural </a:t>
+            </a:r>
+            <a:r>
+              <a:rPr sz="2000" b="0" dirty="0" err="1">
+                <a:solidFill>
+                  <a:srgbClr val="000000"/>
+                </a:solidFill>
+                <a:latin typeface="Calibri"/>
+              </a:rPr>
+              <a:t>maths</a:t>
+            </a:r>
+            <a:r>
+              <a:rPr sz="2000" b="0" dirty="0">
+                <a:solidFill>
+                  <a:srgbClr val="000000"/>
+                </a:solidFill>
+                <a:latin typeface="Calibri"/>
+              </a:rPr>
+              <a:t> datasets available for Karnataka — getting the diagnosis right determines whether remediation money reaches the right grade, competency, and geography</a:t>
+            </a:r>
+            <a:r>
+              <a:rPr sz="1300" b="0" dirty="0">
+                <a:solidFill>
+                  <a:srgbClr val="000000"/>
+                </a:solidFill>
+                <a:latin typeface="Calibri"/>
+              </a:rPr>
+              <a:t>.</a:t>
+            </a:r>
+          </a:p>
+        </p:txBody>
+      </p:sp>
+      <p:sp>
+        <p:nvSpPr>
+          <p:cNvPr id="64" name="EvalFooter"/>
           <p:cNvSpPr txBox="1"/>
           <p:nvPr/>
         </p:nvSpPr>
@@ -7014,19 +6855,14 @@
       </p:sp>
     </p:spTree>
   </p:cSld>
-  <mc:AlternateContent>
-    <mc:Choice Requires="p14">
-      <p:transition spd="slow" p14:dur="2000"/>
-    </mc:Choice>
-    <mc:Fallback>
-      <p:transition spd="slow"/>
-    </mc:Fallback>
-  </mc:AlternateContent>
+  <p:clrMapOvr>
+    <a:masterClrMapping/>
+  </p:clrMapOvr>
 </p:sld>
 </file>
 
-<file path=ppt/slides/slide4.xml><?xml version="1.0" encoding="utf-8"?>
-<p:sld xmlns:a="http://schemas.openxmlformats.org/drawingml/2006/main" xmlns:p="http://schemas.openxmlformats.org/presentationml/2006/main" xmlns:r="http://schemas.openxmlformats.org/officeDocument/2006/relationships" xmlns:p14="http://schemas.microsoft.com/office/powerpoint/2010/main" xmlns:p15="http://schemas.microsoft.com/office/powerpoint/2012/main" xmlns:mc="http://schemas.openxmlformats.org/markup-compatibility/2006">
+<file path=ppt/slides/slide3.xml><?xml version="1.0" encoding="utf-8"?>
+<p:sld xmlns:a="http://schemas.openxmlformats.org/drawingml/2006/main" xmlns:r="http://schemas.openxmlformats.org/officeDocument/2006/relationships" xmlns:p="http://schemas.openxmlformats.org/presentationml/2006/main">
   <p:cSld>
     <p:spTree>
       <p:nvGrpSpPr>
@@ -7044,7 +6880,7 @@
       </p:grpSpPr>
       <p:sp>
         <p:nvSpPr>
-          <p:cNvPr id="66" name="PlaceHolder 1"/>
+          <p:cNvPr id="64" name="PlaceHolder 1"/>
           <p:cNvSpPr>
             <a:spLocks noGrp="1"/>
           </p:cNvSpPr>
@@ -7054,7 +6890,7 @@
         </p:nvSpPr>
         <p:spPr>
           <a:xfrm>
-            <a:off x="1828800" y="226080"/>
+            <a:off x="1828800" y="353880"/>
             <a:ext cx="8229240" cy="1142640"/>
           </a:xfrm>
           <a:prstGeom prst="rect">
@@ -7066,9 +6902,10 @@
           </a:ln>
         </p:spPr>
         <p:txBody>
-          <a:bodyPr lIns="91440" rIns="91440" tIns="45720" bIns="45720" anchor="ctr">
-            <a:normAutofit fontScale="85000" lnSpcReduction="19999"/>
-          </a:bodyPr>
+          <a:bodyPr lIns="91440" tIns="45720" rIns="91440" bIns="45720" anchor="ctr">
+            <a:normAutofit fontScale="90000"/>
+          </a:bodyPr>
+          <a:lstStyle/>
           <a:p>
             <a:pPr indent="0" algn="ctr" defTabSz="457200">
               <a:lnSpc>
@@ -7085,7 +6922,7 @@
                 <a:uFillTx/>
                 <a:latin typeface="Calibri"/>
               </a:rPr>
-              <a:t>Analytical Approach</a:t>
+              <a:t>Dataset Understanding</a:t>
             </a:r>
             <a:br>
               <a:rPr sz="4400"/>
@@ -7103,14 +6940,14 @@
       </p:sp>
       <p:sp>
         <p:nvSpPr>
-          <p:cNvPr id="67" name="TextBox 4"/>
+          <p:cNvPr id="65" name="TextBox 4"/>
           <p:cNvSpPr/>
           <p:nvPr/>
         </p:nvSpPr>
         <p:spPr>
           <a:xfrm>
             <a:off x="731520" y="1097280"/>
-            <a:ext cx="5486040" cy="4571640"/>
+            <a:ext cx="10728960" cy="4571640"/>
           </a:xfrm>
           <a:prstGeom prst="rect">
             <a:avLst/>
@@ -7121,33 +6958,68 @@
           </a:ln>
         </p:spPr>
         <p:style>
-          <a:lnRef idx="0"/>
-          <a:fillRef idx="0"/>
-          <a:effectRef idx="0"/>
+          <a:lnRef idx="0">
+            <a:scrgbClr r="0" g="0" b="0"/>
+          </a:lnRef>
+          <a:fillRef idx="0">
+            <a:scrgbClr r="0" g="0" b="0"/>
+          </a:fillRef>
+          <a:effectRef idx="0">
+            <a:scrgbClr r="0" g="0" b="0"/>
+          </a:effectRef>
           <a:fontRef idx="minor"/>
         </p:style>
         <p:txBody>
-          <a:bodyPr wrap="none" lIns="90000" rIns="90000" tIns="45000" bIns="45000" anchor="t">
-            <a:spAutoFit/>
-          </a:bodyPr>
+          <a:bodyPr wrap="square" lIns="90000" tIns="45000" rIns="90000" bIns="45000" anchor="t">
+            <a:noAutofit/>
+          </a:bodyPr>
+          <a:lstStyle/>
           <a:p>
             <a:pPr defTabSz="457200">
               <a:lnSpc>
                 <a:spcPct val="100000"/>
               </a:lnSpc>
-            </a:pPr>
-            <a:r>
-              <a:rPr lang="en-US" sz="2000" b="0" u="none" strike="noStrike">
-                <a:solidFill>
-                  <a:schemeClr val="dk1"/>
-                </a:solidFill>
-                <a:effectLst/>
-                <a:uFillTx/>
-                <a:latin typeface="Calibri"/>
-              </a:rPr>
-              <a:t>• Workflow</a:t>
-            </a:r>
-            <a:endParaRPr lang="en-IN" sz="2000" b="0" u="none" strike="noStrike">
+              <a:spcAft>
+                <a:spcPts val="1000"/>
+              </a:spcAft>
+            </a:pPr>
+            <a:r>
+              <a:rPr sz="2000" b="1" dirty="0">
+                <a:solidFill>
+                  <a:srgbClr val="000000"/>
+                </a:solidFill>
+                <a:latin typeface="Calibri"/>
+              </a:rPr>
+              <a:t>Dataset summary: </a:t>
+            </a:r>
+            <a:r>
+              <a:rPr sz="2000" b="0" dirty="0">
+                <a:solidFill>
+                  <a:srgbClr val="000000"/>
+                </a:solidFill>
+                <a:latin typeface="Calibri"/>
+              </a:rPr>
+              <a:t>1,379,087 assessment records from Akshara Foundation's Gram Panchayat </a:t>
+            </a:r>
+            <a:r>
+              <a:rPr sz="2000" b="0" dirty="0" err="1">
+                <a:solidFill>
+                  <a:srgbClr val="000000"/>
+                </a:solidFill>
+                <a:latin typeface="Calibri"/>
+              </a:rPr>
+              <a:t>Maths</a:t>
+            </a:r>
+            <a:r>
+              <a:rPr sz="2000" b="0" dirty="0">
+                <a:solidFill>
+                  <a:srgbClr val="000000"/>
+                </a:solidFill>
+                <a:latin typeface="Calibri"/>
+              </a:rPr>
+              <a:t> Contest, rural State Government schools only, Grades 4-6, across three academic years (2022-23 to 2024-25).</a:t>
+            </a:r>
+            <a:endParaRPr lang="en-IN" sz="3600" b="0" u="none" strike="noStrike" dirty="0">
               <a:solidFill>
                 <a:srgbClr val="000000"/>
               </a:solidFill>
@@ -7157,88 +7029,112 @@
             </a:endParaRPr>
           </a:p>
           <a:p>
-            <a:pPr defTabSz="457200">
-              <a:lnSpc>
-                <a:spcPct val="100000"/>
-              </a:lnSpc>
-            </a:pPr>
-            <a:r>
-              <a:rPr lang="en-US" sz="2000" b="0" u="none" strike="noStrike">
-                <a:solidFill>
-                  <a:schemeClr val="dk1"/>
-                </a:solidFill>
-                <a:effectLst/>
-                <a:uFillTx/>
-                <a:latin typeface="Calibri"/>
-              </a:rPr>
-              <a:t>• Methods</a:t>
-            </a:r>
-            <a:endParaRPr lang="en-IN" sz="2000" b="0" u="none" strike="noStrike">
-              <a:solidFill>
-                <a:srgbClr val="000000"/>
-              </a:solidFill>
-              <a:effectLst/>
-              <a:uFillTx/>
-              <a:latin typeface="Arial"/>
-            </a:endParaRPr>
-          </a:p>
-          <a:p>
-            <a:pPr defTabSz="457200">
-              <a:lnSpc>
-                <a:spcPct val="100000"/>
-              </a:lnSpc>
-            </a:pPr>
-            <a:r>
-              <a:rPr lang="en-US" sz="2000" b="0" u="none" strike="noStrike">
-                <a:solidFill>
-                  <a:schemeClr val="dk1"/>
-                </a:solidFill>
-                <a:effectLst/>
-                <a:uFillTx/>
-                <a:latin typeface="Calibri"/>
-              </a:rPr>
-              <a:t>• Models</a:t>
-            </a:r>
-            <a:endParaRPr lang="en-IN" sz="2000" b="0" u="none" strike="noStrike">
-              <a:solidFill>
-                <a:srgbClr val="000000"/>
-              </a:solidFill>
-              <a:effectLst/>
-              <a:uFillTx/>
-              <a:latin typeface="Arial"/>
-            </a:endParaRPr>
-          </a:p>
-          <a:p>
-            <a:pPr defTabSz="457200">
-              <a:lnSpc>
-                <a:spcPct val="100000"/>
-              </a:lnSpc>
-            </a:pPr>
-            <a:r>
-              <a:rPr lang="en-US" sz="2000" b="0" u="none" strike="noStrike">
-                <a:solidFill>
-                  <a:schemeClr val="dk1"/>
-                </a:solidFill>
-                <a:effectLst/>
-                <a:uFillTx/>
-                <a:latin typeface="Calibri"/>
-              </a:rPr>
-              <a:t>• Validation</a:t>
-            </a:r>
-            <a:endParaRPr lang="en-IN" sz="2000" b="0" u="none" strike="noStrike">
-              <a:solidFill>
-                <a:srgbClr val="000000"/>
-              </a:solidFill>
-              <a:effectLst/>
-              <a:uFillTx/>
-              <a:latin typeface="Arial"/>
-            </a:endParaRPr>
-          </a:p>
-        </p:txBody>
-      </p:sp>
-      <p:sp>
-        <p:nvSpPr>
-          <p:cNvPr id="68" name="EvalFooter"/>
+            <a:pPr>
+              <a:lnSpc>
+                <a:spcPct val="100000"/>
+              </a:lnSpc>
+              <a:spcAft>
+                <a:spcPts val="1000"/>
+              </a:spcAft>
+            </a:pPr>
+            <a:r>
+              <a:rPr sz="2000" b="1" dirty="0">
+                <a:solidFill>
+                  <a:srgbClr val="000000"/>
+                </a:solidFill>
+                <a:latin typeface="Calibri"/>
+              </a:rPr>
+              <a:t>Variables: </a:t>
+            </a:r>
+            <a:r>
+              <a:rPr sz="2000" b="0" dirty="0">
+                <a:solidFill>
+                  <a:srgbClr val="000000"/>
+                </a:solidFill>
+                <a:latin typeface="Calibri"/>
+              </a:rPr>
+              <a:t>Gender, Grade, Year; full geography hierarchy (District, Block, Cluster, GP); 11 competency scores (Number Sense, Place Value, Addition, Subtraction, Multiplication, Division, Fractions, Measurement, Shapes/Geometry, Data Handling, Mensuration); Total Score and Score %.</a:t>
+            </a:r>
+          </a:p>
+          <a:p>
+            <a:pPr>
+              <a:lnSpc>
+                <a:spcPct val="100000"/>
+              </a:lnSpc>
+              <a:spcAft>
+                <a:spcPts val="1000"/>
+              </a:spcAft>
+            </a:pPr>
+            <a:r>
+              <a:rPr sz="2000" b="1" dirty="0">
+                <a:solidFill>
+                  <a:srgbClr val="000000"/>
+                </a:solidFill>
+                <a:latin typeface="Calibri"/>
+              </a:rPr>
+              <a:t>Cleaning: </a:t>
+            </a:r>
+            <a:r>
+              <a:rPr sz="2000" b="0" dirty="0">
+                <a:solidFill>
+                  <a:srgbClr val="000000"/>
+                </a:solidFill>
+                <a:latin typeface="Calibri"/>
+              </a:rPr>
+              <a:t>Headers standardized, Year/Grade typed as ordered categories, geography strings normalized. Duplicate rows are kept, since no persistent student ID exists. Competency </a:t>
+            </a:r>
+            <a:r>
+              <a:rPr sz="2000" b="0" dirty="0" err="1">
+                <a:solidFill>
+                  <a:srgbClr val="000000"/>
+                </a:solidFill>
+                <a:latin typeface="Calibri"/>
+              </a:rPr>
+              <a:t>NaNs</a:t>
+            </a:r>
+            <a:r>
+              <a:rPr sz="2000" b="0" dirty="0">
+                <a:solidFill>
+                  <a:srgbClr val="000000"/>
+                </a:solidFill>
+                <a:latin typeface="Calibri"/>
+              </a:rPr>
+              <a:t> are treated as structural (item absent from that year's/grade's 20-question set), not random missingness.</a:t>
+            </a:r>
+          </a:p>
+          <a:p>
+            <a:pPr>
+              <a:lnSpc>
+                <a:spcPct val="100000"/>
+              </a:lnSpc>
+              <a:spcAft>
+                <a:spcPts val="1000"/>
+              </a:spcAft>
+            </a:pPr>
+            <a:r>
+              <a:rPr sz="2000" b="1" dirty="0">
+                <a:solidFill>
+                  <a:srgbClr val="000000"/>
+                </a:solidFill>
+                <a:latin typeface="Calibri"/>
+              </a:rPr>
+              <a:t>Assumptions: </a:t>
+            </a:r>
+            <a:r>
+              <a:rPr sz="2000" b="0" dirty="0">
+                <a:solidFill>
+                  <a:srgbClr val="000000"/>
+                </a:solidFill>
+                <a:latin typeface="Calibri"/>
+              </a:rPr>
+              <a:t>No school identifier by design, so within-GP variation stays unattributed. GP and Cluster do not nest cleanly (1,718 GP IDs span more than one cluster). Items change every year within a constant competency framework, so cross-year claims are made at competency level, never as raw item-score gains.</a:t>
+            </a:r>
+          </a:p>
+        </p:txBody>
+      </p:sp>
+      <p:sp>
+        <p:nvSpPr>
+          <p:cNvPr id="66" name="EvalFooter"/>
           <p:cNvSpPr txBox="1"/>
           <p:nvPr/>
         </p:nvSpPr>
@@ -7270,19 +7166,14 @@
       </p:sp>
     </p:spTree>
   </p:cSld>
-  <mc:AlternateContent>
-    <mc:Choice Requires="p14">
-      <p:transition spd="slow" p14:dur="2000"/>
-    </mc:Choice>
-    <mc:Fallback>
-      <p:transition spd="slow"/>
-    </mc:Fallback>
-  </mc:AlternateContent>
+  <p:clrMapOvr>
+    <a:masterClrMapping/>
+  </p:clrMapOvr>
 </p:sld>
 </file>
 
-<file path=ppt/slides/slide5.xml><?xml version="1.0" encoding="utf-8"?>
-<p:sld xmlns:a="http://schemas.openxmlformats.org/drawingml/2006/main" xmlns:p="http://schemas.openxmlformats.org/presentationml/2006/main" xmlns:r="http://schemas.openxmlformats.org/officeDocument/2006/relationships" xmlns:p14="http://schemas.microsoft.com/office/powerpoint/2010/main" xmlns:p15="http://schemas.microsoft.com/office/powerpoint/2012/main" xmlns:mc="http://schemas.openxmlformats.org/markup-compatibility/2006">
+<file path=ppt/slides/slide4.xml><?xml version="1.0" encoding="utf-8"?>
+<p:sld xmlns:a="http://schemas.openxmlformats.org/drawingml/2006/main" xmlns:r="http://schemas.openxmlformats.org/officeDocument/2006/relationships" xmlns:p="http://schemas.openxmlformats.org/presentationml/2006/main">
   <p:cSld>
     <p:spTree>
       <p:nvGrpSpPr>
@@ -7300,7 +7191,7 @@
       </p:grpSpPr>
       <p:sp>
         <p:nvSpPr>
-          <p:cNvPr id="68" name="PlaceHolder 1"/>
+          <p:cNvPr id="66" name="PlaceHolder 1"/>
           <p:cNvSpPr>
             <a:spLocks noGrp="1"/>
           </p:cNvSpPr>
@@ -7322,9 +7213,10 @@
           </a:ln>
         </p:spPr>
         <p:txBody>
-          <a:bodyPr lIns="91440" rIns="91440" tIns="45720" bIns="45720" anchor="ctr">
-            <a:normAutofit fontScale="85000" lnSpcReduction="19999"/>
-          </a:bodyPr>
+          <a:bodyPr lIns="91440" tIns="45720" rIns="91440" bIns="45720" anchor="ctr">
+            <a:normAutofit fontScale="90000"/>
+          </a:bodyPr>
+          <a:lstStyle/>
           <a:p>
             <a:pPr indent="0" algn="ctr" defTabSz="457200">
               <a:lnSpc>
@@ -7341,7 +7233,7 @@
                 <a:uFillTx/>
                 <a:latin typeface="Calibri"/>
               </a:rPr>
-              <a:t>Key Insight 1</a:t>
+              <a:t>Analytical Approach</a:t>
             </a:r>
             <a:br>
               <a:rPr sz="4400"/>
@@ -7359,14 +7251,14 @@
       </p:sp>
       <p:sp>
         <p:nvSpPr>
-          <p:cNvPr id="69" name="TextBox 4"/>
+          <p:cNvPr id="67" name="TextBox 4"/>
           <p:cNvSpPr/>
           <p:nvPr/>
         </p:nvSpPr>
         <p:spPr>
           <a:xfrm>
             <a:off x="731520" y="1097280"/>
-            <a:ext cx="5486040" cy="4571640"/>
+            <a:ext cx="10962640" cy="4571640"/>
           </a:xfrm>
           <a:prstGeom prst="rect">
             <a:avLst/>
@@ -7377,33 +7269,50 @@
           </a:ln>
         </p:spPr>
         <p:style>
-          <a:lnRef idx="0"/>
-          <a:fillRef idx="0"/>
-          <a:effectRef idx="0"/>
+          <a:lnRef idx="0">
+            <a:scrgbClr r="0" g="0" b="0"/>
+          </a:lnRef>
+          <a:fillRef idx="0">
+            <a:scrgbClr r="0" g="0" b="0"/>
+          </a:fillRef>
+          <a:effectRef idx="0">
+            <a:scrgbClr r="0" g="0" b="0"/>
+          </a:effectRef>
           <a:fontRef idx="minor"/>
         </p:style>
         <p:txBody>
-          <a:bodyPr wrap="none" lIns="90000" rIns="90000" tIns="45000" bIns="45000" anchor="t">
-            <a:spAutoFit/>
-          </a:bodyPr>
+          <a:bodyPr wrap="square" lIns="90000" tIns="45000" rIns="90000" bIns="45000" anchor="t">
+            <a:noAutofit/>
+          </a:bodyPr>
+          <a:lstStyle/>
           <a:p>
             <a:pPr defTabSz="457200">
               <a:lnSpc>
                 <a:spcPct val="100000"/>
               </a:lnSpc>
-            </a:pPr>
-            <a:r>
-              <a:rPr lang="en-US" sz="2000" b="0" u="none" strike="noStrike">
-                <a:solidFill>
-                  <a:schemeClr val="dk1"/>
-                </a:solidFill>
-                <a:effectLst/>
-                <a:uFillTx/>
-                <a:latin typeface="Calibri"/>
-              </a:rPr>
-              <a:t>• Finding</a:t>
-            </a:r>
-            <a:endParaRPr lang="en-IN" sz="2000" b="0" u="none" strike="noStrike">
+              <a:spcAft>
+                <a:spcPts val="1000"/>
+              </a:spcAft>
+            </a:pPr>
+            <a:r>
+              <a:rPr sz="2400" b="1" dirty="0">
+                <a:solidFill>
+                  <a:srgbClr val="000000"/>
+                </a:solidFill>
+                <a:latin typeface="Calibri"/>
+              </a:rPr>
+              <a:t>Workflow: </a:t>
+            </a:r>
+            <a:r>
+              <a:rPr sz="2400" b="0" dirty="0">
+                <a:solidFill>
+                  <a:srgbClr val="000000"/>
+                </a:solidFill>
+                <a:latin typeface="Calibri"/>
+              </a:rPr>
+              <a:t>Load and type the raw files → reconcile against UDISE+ enrolment to establish participation coverage → descriptive cuts across Year/Grade/Gender/District/Block/Cluster/GP → test the decline against 36 explicit hypotheses → model competency-to-score relationships → triangulate against ASER and PARAKH.</a:t>
+            </a:r>
+            <a:endParaRPr lang="en-IN" sz="4000" b="0" u="none" strike="noStrike" dirty="0">
               <a:solidFill>
                 <a:srgbClr val="000000"/>
               </a:solidFill>
@@ -7413,62 +7322,66 @@
             </a:endParaRPr>
           </a:p>
           <a:p>
-            <a:pPr defTabSz="457200">
-              <a:lnSpc>
-                <a:spcPct val="100000"/>
-              </a:lnSpc>
-            </a:pPr>
-            <a:r>
-              <a:rPr lang="en-US" sz="2000" b="0" u="none" strike="noStrike">
-                <a:solidFill>
-                  <a:schemeClr val="dk1"/>
-                </a:solidFill>
-                <a:effectLst/>
-                <a:uFillTx/>
-                <a:latin typeface="Calibri"/>
-              </a:rPr>
-              <a:t>• Evidence</a:t>
-            </a:r>
-            <a:endParaRPr lang="en-IN" sz="2000" b="0" u="none" strike="noStrike">
-              <a:solidFill>
-                <a:srgbClr val="000000"/>
-              </a:solidFill>
-              <a:effectLst/>
-              <a:uFillTx/>
-              <a:latin typeface="Arial"/>
-            </a:endParaRPr>
-          </a:p>
-          <a:p>
-            <a:pPr defTabSz="457200">
-              <a:lnSpc>
-                <a:spcPct val="100000"/>
-              </a:lnSpc>
-            </a:pPr>
-            <a:r>
-              <a:rPr lang="en-US" sz="2000" b="0" u="none" strike="noStrike">
-                <a:solidFill>
-                  <a:schemeClr val="dk1"/>
-                </a:solidFill>
-                <a:effectLst/>
-                <a:uFillTx/>
-                <a:latin typeface="Calibri"/>
-              </a:rPr>
-              <a:t>• Interpretation</a:t>
-            </a:r>
-            <a:endParaRPr lang="en-IN" sz="2000" b="0" u="none" strike="noStrike">
-              <a:solidFill>
-                <a:srgbClr val="000000"/>
-              </a:solidFill>
-              <a:effectLst/>
-              <a:uFillTx/>
-              <a:latin typeface="Arial"/>
-            </a:endParaRPr>
-          </a:p>
-        </p:txBody>
-      </p:sp>
-      <p:sp>
-        <p:nvSpPr>
-          <p:cNvPr id="70" name="EvalFooter"/>
+            <a:pPr>
+              <a:lnSpc>
+                <a:spcPct val="100000"/>
+              </a:lnSpc>
+              <a:spcAft>
+                <a:spcPts val="1000"/>
+              </a:spcAft>
+            </a:pPr>
+            <a:r>
+              <a:rPr sz="2400" b="1" dirty="0">
+                <a:solidFill>
+                  <a:srgbClr val="000000"/>
+                </a:solidFill>
+                <a:latin typeface="Calibri"/>
+              </a:rPr>
+              <a:t>Methods: </a:t>
+            </a:r>
+            <a:r>
+              <a:rPr sz="2400" b="0" dirty="0">
+                <a:solidFill>
+                  <a:srgbClr val="000000"/>
+                </a:solidFill>
+                <a:latin typeface="Calibri"/>
+              </a:rPr>
+              <a:t>Nested variance decomposition; Cohen's d effect sizes for every year-pair and competency; a fixed-GP panel (GPs present in all three years) to rule out “the assessment reached weaker children”; Spearman correlation against two independent external assessments.</a:t>
+            </a:r>
+          </a:p>
+          <a:p>
+            <a:pPr>
+              <a:lnSpc>
+                <a:spcPct val="100000"/>
+              </a:lnSpc>
+              <a:spcAft>
+                <a:spcPts val="1000"/>
+              </a:spcAft>
+            </a:pPr>
+            <a:r>
+              <a:rPr sz="2400" b="1" dirty="0">
+                <a:solidFill>
+                  <a:srgbClr val="000000"/>
+                </a:solidFill>
+                <a:latin typeface="Calibri"/>
+              </a:rPr>
+              <a:t>Models: </a:t>
+            </a:r>
+            <a:r>
+              <a:rPr sz="2400" b="0" dirty="0">
+                <a:solidFill>
+                  <a:srgbClr val="000000"/>
+                </a:solidFill>
+                <a:latin typeface="Calibri"/>
+              </a:rPr>
+              <a:t>Univariate and standardized multivariate linear regression of Total Score on all 11 competencies (R² = 0.989); Random Forest as a non-linear cross-check (R² = 0.953, train); a GP-level early-warning model using only prior-year persistence features.</a:t>
+            </a:r>
+          </a:p>
+        </p:txBody>
+      </p:sp>
+      <p:sp>
+        <p:nvSpPr>
+          <p:cNvPr id="68" name="EvalFooter"/>
           <p:cNvSpPr txBox="1"/>
           <p:nvPr/>
         </p:nvSpPr>
@@ -7500,19 +7413,14 @@
       </p:sp>
     </p:spTree>
   </p:cSld>
-  <mc:AlternateContent>
-    <mc:Choice Requires="p14">
-      <p:transition spd="slow" p14:dur="2000"/>
-    </mc:Choice>
-    <mc:Fallback>
-      <p:transition spd="slow"/>
-    </mc:Fallback>
-  </mc:AlternateContent>
+  <p:clrMapOvr>
+    <a:masterClrMapping/>
+  </p:clrMapOvr>
 </p:sld>
 </file>
 
-<file path=ppt/slides/slide6.xml><?xml version="1.0" encoding="utf-8"?>
-<p:sld xmlns:a="http://schemas.openxmlformats.org/drawingml/2006/main" xmlns:p="http://schemas.openxmlformats.org/presentationml/2006/main" xmlns:r="http://schemas.openxmlformats.org/officeDocument/2006/relationships" xmlns:p14="http://schemas.microsoft.com/office/powerpoint/2010/main" xmlns:p15="http://schemas.microsoft.com/office/powerpoint/2012/main" xmlns:mc="http://schemas.openxmlformats.org/markup-compatibility/2006">
+<file path=ppt/slides/slide5.xml><?xml version="1.0" encoding="utf-8"?>
+<p:sld xmlns:a="http://schemas.openxmlformats.org/drawingml/2006/main" xmlns:r="http://schemas.openxmlformats.org/officeDocument/2006/relationships" xmlns:p="http://schemas.openxmlformats.org/presentationml/2006/main">
   <p:cSld>
     <p:spTree>
       <p:nvGrpSpPr>
@@ -7530,7 +7438,7 @@
       </p:grpSpPr>
       <p:sp>
         <p:nvSpPr>
-          <p:cNvPr id="70" name="PlaceHolder 1"/>
+          <p:cNvPr id="68" name="PlaceHolder 1"/>
           <p:cNvSpPr>
             <a:spLocks noGrp="1"/>
           </p:cNvSpPr>
@@ -7552,9 +7460,10 @@
           </a:ln>
         </p:spPr>
         <p:txBody>
-          <a:bodyPr lIns="91440" rIns="91440" tIns="45720" bIns="45720" anchor="ctr">
-            <a:normAutofit fontScale="85000" lnSpcReduction="19999"/>
-          </a:bodyPr>
+          <a:bodyPr lIns="91440" tIns="45720" rIns="91440" bIns="45720" anchor="ctr">
+            <a:normAutofit fontScale="90000"/>
+          </a:bodyPr>
+          <a:lstStyle/>
           <a:p>
             <a:pPr indent="0" algn="ctr" defTabSz="457200">
               <a:lnSpc>
@@ -7571,7 +7480,7 @@
                 <a:uFillTx/>
                 <a:latin typeface="Calibri"/>
               </a:rPr>
-              <a:t>Key Insight 2</a:t>
+              <a:t>Key Insight 1</a:t>
             </a:r>
             <a:br>
               <a:rPr sz="4400"/>
@@ -7589,7 +7498,7 @@
       </p:sp>
       <p:sp>
         <p:nvSpPr>
-          <p:cNvPr id="71" name="TextBox 4"/>
+          <p:cNvPr id="69" name="TextBox 4"/>
           <p:cNvSpPr/>
           <p:nvPr/>
         </p:nvSpPr>
@@ -7607,33 +7516,50 @@
           </a:ln>
         </p:spPr>
         <p:style>
-          <a:lnRef idx="0"/>
-          <a:fillRef idx="0"/>
-          <a:effectRef idx="0"/>
+          <a:lnRef idx="0">
+            <a:scrgbClr r="0" g="0" b="0"/>
+          </a:lnRef>
+          <a:fillRef idx="0">
+            <a:scrgbClr r="0" g="0" b="0"/>
+          </a:fillRef>
+          <a:effectRef idx="0">
+            <a:scrgbClr r="0" g="0" b="0"/>
+          </a:effectRef>
           <a:fontRef idx="minor"/>
         </p:style>
         <p:txBody>
-          <a:bodyPr wrap="none" lIns="90000" rIns="90000" tIns="45000" bIns="45000" anchor="t">
-            <a:spAutoFit/>
-          </a:bodyPr>
+          <a:bodyPr wrap="square" lIns="90000" tIns="45000" rIns="90000" bIns="45000" anchor="t">
+            <a:noAutofit/>
+          </a:bodyPr>
+          <a:lstStyle/>
           <a:p>
             <a:pPr defTabSz="457200">
               <a:lnSpc>
                 <a:spcPct val="100000"/>
               </a:lnSpc>
-            </a:pPr>
-            <a:r>
-              <a:rPr lang="en-US" sz="2000" b="0" u="none" strike="noStrike">
-                <a:solidFill>
-                  <a:schemeClr val="dk1"/>
-                </a:solidFill>
-                <a:effectLst/>
-                <a:uFillTx/>
-                <a:latin typeface="Calibri"/>
-              </a:rPr>
-              <a:t>• Finding</a:t>
-            </a:r>
-            <a:endParaRPr lang="en-IN" sz="2000" b="0" u="none" strike="noStrike">
+              <a:spcAft>
+                <a:spcPts val="1000"/>
+              </a:spcAft>
+            </a:pPr>
+            <a:r>
+              <a:rPr b="1" dirty="0">
+                <a:solidFill>
+                  <a:srgbClr val="000000"/>
+                </a:solidFill>
+                <a:latin typeface="Calibri"/>
+              </a:rPr>
+              <a:t>• Finding: </a:t>
+            </a:r>
+            <a:r>
+              <a:rPr b="0" dirty="0">
+                <a:solidFill>
+                  <a:srgbClr val="000000"/>
+                </a:solidFill>
+                <a:latin typeface="Calibri"/>
+              </a:rPr>
+              <a:t>Grade 6 multiplication fell from 51.0% to 35.1%, division from 55.0% to 37.6%. The grade gradient inverted — Class 6 children now score lower than Class 4, the opposite of a normal learning trajectory.</a:t>
+            </a:r>
+            <a:endParaRPr lang="en-IN" sz="3200" b="0" u="none" strike="noStrike" dirty="0">
               <a:solidFill>
                 <a:srgbClr val="000000"/>
               </a:solidFill>
@@ -7643,62 +7569,66 @@
             </a:endParaRPr>
           </a:p>
           <a:p>
-            <a:pPr defTabSz="457200">
-              <a:lnSpc>
-                <a:spcPct val="100000"/>
-              </a:lnSpc>
-            </a:pPr>
-            <a:r>
-              <a:rPr lang="en-US" sz="2000" b="0" u="none" strike="noStrike">
-                <a:solidFill>
-                  <a:schemeClr val="dk1"/>
-                </a:solidFill>
-                <a:effectLst/>
-                <a:uFillTx/>
-                <a:latin typeface="Calibri"/>
-              </a:rPr>
-              <a:t>• Evidence</a:t>
-            </a:r>
-            <a:endParaRPr lang="en-IN" sz="2000" b="0" u="none" strike="noStrike">
-              <a:solidFill>
-                <a:srgbClr val="000000"/>
-              </a:solidFill>
-              <a:effectLst/>
-              <a:uFillTx/>
-              <a:latin typeface="Arial"/>
-            </a:endParaRPr>
-          </a:p>
-          <a:p>
-            <a:pPr defTabSz="457200">
-              <a:lnSpc>
-                <a:spcPct val="100000"/>
-              </a:lnSpc>
-            </a:pPr>
-            <a:r>
-              <a:rPr lang="en-US" sz="2000" b="0" u="none" strike="noStrike">
-                <a:solidFill>
-                  <a:schemeClr val="dk1"/>
-                </a:solidFill>
-                <a:effectLst/>
-                <a:uFillTx/>
-                <a:latin typeface="Calibri"/>
-              </a:rPr>
-              <a:t>• Implications</a:t>
-            </a:r>
-            <a:endParaRPr lang="en-IN" sz="2000" b="0" u="none" strike="noStrike">
-              <a:solidFill>
-                <a:srgbClr val="000000"/>
-              </a:solidFill>
-              <a:effectLst/>
-              <a:uFillTx/>
-              <a:latin typeface="Arial"/>
-            </a:endParaRPr>
-          </a:p>
-        </p:txBody>
-      </p:sp>
-      <p:sp>
-        <p:nvSpPr>
-          <p:cNvPr id="72" name="EvalFooter"/>
+            <a:pPr>
+              <a:lnSpc>
+                <a:spcPct val="100000"/>
+              </a:lnSpc>
+              <a:spcAft>
+                <a:spcPts val="1000"/>
+              </a:spcAft>
+            </a:pPr>
+            <a:r>
+              <a:rPr b="1" dirty="0">
+                <a:solidFill>
+                  <a:srgbClr val="000000"/>
+                </a:solidFill>
+                <a:latin typeface="Calibri"/>
+              </a:rPr>
+              <a:t>• Evidence: </a:t>
+            </a:r>
+            <a:r>
+              <a:rPr b="0" dirty="0">
+                <a:solidFill>
+                  <a:srgbClr val="000000"/>
+                </a:solidFill>
+                <a:latin typeface="Calibri"/>
+              </a:rPr>
+              <a:t>Reproduced by an independent, code-isolated figure pipeline; survives the fixed-GP panel test (decline is larger inside the panel, -19.7pp/-22.0pp, not smaller); corroborated by three methods — the raw grade trend, the competency correlation structure, and year-over-year Cohen's d.</a:t>
+            </a:r>
+          </a:p>
+          <a:p>
+            <a:pPr>
+              <a:lnSpc>
+                <a:spcPct val="100000"/>
+              </a:lnSpc>
+              <a:spcAft>
+                <a:spcPts val="1000"/>
+              </a:spcAft>
+            </a:pPr>
+            <a:r>
+              <a:rPr b="1" dirty="0">
+                <a:solidFill>
+                  <a:srgbClr val="000000"/>
+                </a:solidFill>
+                <a:latin typeface="Calibri"/>
+              </a:rPr>
+              <a:t>• Interpretation: </a:t>
+            </a:r>
+            <a:r>
+              <a:rPr b="0" dirty="0">
+                <a:solidFill>
+                  <a:srgbClr val="000000"/>
+                </a:solidFill>
+                <a:latin typeface="Calibri"/>
+              </a:rPr>
+              <a:t>Not a sampling artefact or a one-off dip — a genuine, persistent, multiplicative-reasoning-specific decline concentrated in the oldest tested grade, and the load-bearing part of the assessment itself.</a:t>
+            </a:r>
+          </a:p>
+        </p:txBody>
+      </p:sp>
+      <p:sp>
+        <p:nvSpPr>
+          <p:cNvPr id="70" name="EvalFooter"/>
           <p:cNvSpPr txBox="1"/>
           <p:nvPr/>
         </p:nvSpPr>
@@ -7728,21 +7658,74 @@
           </a:p>
         </p:txBody>
       </p:sp>
+      <p:pic>
+        <p:nvPicPr>
+          <p:cNvPr id="71" name="Picture 70" descr="image1.png"/>
+          <p:cNvPicPr>
+            <a:picLocks noChangeAspect="1"/>
+          </p:cNvPicPr>
+          <p:nvPr/>
+        </p:nvPicPr>
+        <p:blipFill>
+          <a:blip r:embed="rId2"/>
+          <a:stretch>
+            <a:fillRect/>
+          </a:stretch>
+        </p:blipFill>
+        <p:spPr>
+          <a:xfrm>
+            <a:off x="6330802" y="2123440"/>
+            <a:ext cx="5369198" cy="2277841"/>
+          </a:xfrm>
+          <a:prstGeom prst="rect">
+            <a:avLst/>
+          </a:prstGeom>
+        </p:spPr>
+      </p:pic>
+      <p:sp>
+        <p:nvSpPr>
+          <p:cNvPr id="72" name="TextBox 71"/>
+          <p:cNvSpPr txBox="1"/>
+          <p:nvPr/>
+        </p:nvSpPr>
+        <p:spPr>
+          <a:xfrm>
+            <a:off x="6900000" y="4447001"/>
+            <a:ext cx="4800000" cy="300000"/>
+          </a:xfrm>
+          <a:prstGeom prst="rect">
+            <a:avLst/>
+          </a:prstGeom>
+          <a:noFill/>
+        </p:spPr>
+        <p:txBody>
+          <a:bodyPr wrap="square">
+            <a:spAutoFit/>
+          </a:bodyPr>
+          <a:lstStyle/>
+          <a:p>
+            <a:r>
+              <a:rPr sz="1000" i="1">
+                <a:solidFill>
+                  <a:srgbClr val="595959"/>
+                </a:solidFill>
+                <a:latin typeface="Calibri"/>
+              </a:rPr>
+              <a:t>Grade gradient inversion, 2022-23 vs 2024-25</a:t>
+            </a:r>
+          </a:p>
+        </p:txBody>
+      </p:sp>
     </p:spTree>
   </p:cSld>
-  <mc:AlternateContent>
-    <mc:Choice Requires="p14">
-      <p:transition spd="slow" p14:dur="2000"/>
-    </mc:Choice>
-    <mc:Fallback>
-      <p:transition spd="slow"/>
-    </mc:Fallback>
-  </mc:AlternateContent>
+  <p:clrMapOvr>
+    <a:masterClrMapping/>
+  </p:clrMapOvr>
 </p:sld>
 </file>
 
-<file path=ppt/slides/slide7.xml><?xml version="1.0" encoding="utf-8"?>
-<p:sld xmlns:a="http://schemas.openxmlformats.org/drawingml/2006/main" xmlns:p="http://schemas.openxmlformats.org/presentationml/2006/main" xmlns:r="http://schemas.openxmlformats.org/officeDocument/2006/relationships" xmlns:p14="http://schemas.microsoft.com/office/powerpoint/2010/main" xmlns:p15="http://schemas.microsoft.com/office/powerpoint/2012/main" xmlns:mc="http://schemas.openxmlformats.org/markup-compatibility/2006">
+<file path=ppt/slides/slide6.xml><?xml version="1.0" encoding="utf-8"?>
+<p:sld xmlns:a="http://schemas.openxmlformats.org/drawingml/2006/main" xmlns:r="http://schemas.openxmlformats.org/officeDocument/2006/relationships" xmlns:p="http://schemas.openxmlformats.org/presentationml/2006/main">
   <p:cSld>
     <p:spTree>
       <p:nvGrpSpPr>
@@ -7760,7 +7743,7 @@
       </p:grpSpPr>
       <p:sp>
         <p:nvSpPr>
-          <p:cNvPr id="72" name="PlaceHolder 1"/>
+          <p:cNvPr id="70" name="PlaceHolder 1"/>
           <p:cNvSpPr>
             <a:spLocks noGrp="1"/>
           </p:cNvSpPr>
@@ -7770,7 +7753,7 @@
         </p:nvSpPr>
         <p:spPr>
           <a:xfrm>
-            <a:off x="1828800" y="251640"/>
+            <a:off x="1828800" y="226080"/>
             <a:ext cx="8229240" cy="1142640"/>
           </a:xfrm>
           <a:prstGeom prst="rect">
@@ -7782,9 +7765,10 @@
           </a:ln>
         </p:spPr>
         <p:txBody>
-          <a:bodyPr lIns="91440" rIns="91440" tIns="45720" bIns="45720" anchor="ctr">
-            <a:normAutofit fontScale="85000" lnSpcReduction="19999"/>
-          </a:bodyPr>
+          <a:bodyPr lIns="91440" tIns="45720" rIns="91440" bIns="45720" anchor="ctr">
+            <a:normAutofit fontScale="90000"/>
+          </a:bodyPr>
+          <a:lstStyle/>
           <a:p>
             <a:pPr indent="0" algn="ctr" defTabSz="457200">
               <a:lnSpc>
@@ -7801,7 +7785,7 @@
                 <a:uFillTx/>
                 <a:latin typeface="Calibri"/>
               </a:rPr>
-              <a:t>Predictive / Diagnostic Analysis</a:t>
+              <a:t>Key Insight 2</a:t>
             </a:r>
             <a:br>
               <a:rPr sz="4400"/>
@@ -7819,7 +7803,7 @@
       </p:sp>
       <p:sp>
         <p:nvSpPr>
-          <p:cNvPr id="73" name="TextBox 4"/>
+          <p:cNvPr id="71" name="TextBox 4"/>
           <p:cNvSpPr/>
           <p:nvPr/>
         </p:nvSpPr>
@@ -7837,33 +7821,50 @@
           </a:ln>
         </p:spPr>
         <p:style>
-          <a:lnRef idx="0"/>
-          <a:fillRef idx="0"/>
-          <a:effectRef idx="0"/>
+          <a:lnRef idx="0">
+            <a:scrgbClr r="0" g="0" b="0"/>
+          </a:lnRef>
+          <a:fillRef idx="0">
+            <a:scrgbClr r="0" g="0" b="0"/>
+          </a:fillRef>
+          <a:effectRef idx="0">
+            <a:scrgbClr r="0" g="0" b="0"/>
+          </a:effectRef>
           <a:fontRef idx="minor"/>
         </p:style>
         <p:txBody>
-          <a:bodyPr wrap="none" lIns="90000" rIns="90000" tIns="45000" bIns="45000" anchor="t">
-            <a:spAutoFit/>
-          </a:bodyPr>
+          <a:bodyPr wrap="square" lIns="90000" tIns="45000" rIns="90000" bIns="45000" anchor="t">
+            <a:noAutofit/>
+          </a:bodyPr>
+          <a:lstStyle/>
           <a:p>
             <a:pPr defTabSz="457200">
               <a:lnSpc>
                 <a:spcPct val="100000"/>
               </a:lnSpc>
-            </a:pPr>
-            <a:r>
-              <a:rPr lang="en-US" sz="2000" b="0" u="none" strike="noStrike">
-                <a:solidFill>
-                  <a:schemeClr val="dk1"/>
-                </a:solidFill>
-                <a:effectLst/>
-                <a:uFillTx/>
-                <a:latin typeface="Calibri"/>
-              </a:rPr>
-              <a:t>• Model</a:t>
-            </a:r>
-            <a:endParaRPr lang="en-IN" sz="2000" b="0" u="none" strike="noStrike">
+              <a:spcAft>
+                <a:spcPts val="1000"/>
+              </a:spcAft>
+            </a:pPr>
+            <a:r>
+              <a:rPr b="1" dirty="0">
+                <a:solidFill>
+                  <a:srgbClr val="000000"/>
+                </a:solidFill>
+                <a:latin typeface="Calibri"/>
+              </a:rPr>
+              <a:t>• Finding: </a:t>
+            </a:r>
+            <a:r>
+              <a:rPr b="0" dirty="0">
+                <a:solidFill>
+                  <a:srgbClr val="000000"/>
+                </a:solidFill>
+                <a:latin typeface="Calibri"/>
+              </a:rPr>
+              <a:t>The seven Article 371J Kalyana Karnataka districts score 13.3pp below the rest of the state, occupy the entire bottom ten of thirty-one districts, and the gap is widening: -10.0pp → -11.9pp → -15.8pp across the three years.</a:t>
+            </a:r>
+            <a:endParaRPr lang="en-IN" sz="3200" b="0" u="none" strike="noStrike" dirty="0">
               <a:solidFill>
                 <a:srgbClr val="000000"/>
               </a:solidFill>
@@ -7873,88 +7874,66 @@
             </a:endParaRPr>
           </a:p>
           <a:p>
-            <a:pPr defTabSz="457200">
-              <a:lnSpc>
-                <a:spcPct val="100000"/>
-              </a:lnSpc>
-            </a:pPr>
-            <a:r>
-              <a:rPr lang="en-US" sz="2000" b="0" u="none" strike="noStrike">
-                <a:solidFill>
-                  <a:schemeClr val="dk1"/>
-                </a:solidFill>
-                <a:effectLst/>
-                <a:uFillTx/>
-                <a:latin typeface="Calibri"/>
-              </a:rPr>
-              <a:t>• Metrics</a:t>
-            </a:r>
-            <a:endParaRPr lang="en-IN" sz="2000" b="0" u="none" strike="noStrike">
-              <a:solidFill>
-                <a:srgbClr val="000000"/>
-              </a:solidFill>
-              <a:effectLst/>
-              <a:uFillTx/>
-              <a:latin typeface="Arial"/>
-            </a:endParaRPr>
-          </a:p>
-          <a:p>
-            <a:pPr defTabSz="457200">
-              <a:lnSpc>
-                <a:spcPct val="100000"/>
-              </a:lnSpc>
-            </a:pPr>
-            <a:r>
-              <a:rPr lang="en-US" sz="2000" b="0" u="none" strike="noStrike">
-                <a:solidFill>
-                  <a:schemeClr val="dk1"/>
-                </a:solidFill>
-                <a:effectLst/>
-                <a:uFillTx/>
-                <a:latin typeface="Calibri"/>
-              </a:rPr>
-              <a:t>• Important predictors</a:t>
-            </a:r>
-            <a:endParaRPr lang="en-IN" sz="2000" b="0" u="none" strike="noStrike">
-              <a:solidFill>
-                <a:srgbClr val="000000"/>
-              </a:solidFill>
-              <a:effectLst/>
-              <a:uFillTx/>
-              <a:latin typeface="Arial"/>
-            </a:endParaRPr>
-          </a:p>
-          <a:p>
-            <a:pPr defTabSz="457200">
-              <a:lnSpc>
-                <a:spcPct val="100000"/>
-              </a:lnSpc>
-            </a:pPr>
-            <a:r>
-              <a:rPr lang="en-US" sz="2000" b="0" u="none" strike="noStrike">
-                <a:solidFill>
-                  <a:schemeClr val="dk1"/>
-                </a:solidFill>
-                <a:effectLst/>
-                <a:uFillTx/>
-                <a:latin typeface="Calibri"/>
-              </a:rPr>
-              <a:t>• Early warning</a:t>
-            </a:r>
-            <a:endParaRPr lang="en-IN" sz="2000" b="0" u="none" strike="noStrike">
-              <a:solidFill>
-                <a:srgbClr val="000000"/>
-              </a:solidFill>
-              <a:effectLst/>
-              <a:uFillTx/>
-              <a:latin typeface="Arial"/>
-            </a:endParaRPr>
-          </a:p>
-        </p:txBody>
-      </p:sp>
-      <p:sp>
-        <p:nvSpPr>
-          <p:cNvPr id="74" name="EvalFooter"/>
+            <a:pPr>
+              <a:lnSpc>
+                <a:spcPct val="100000"/>
+              </a:lnSpc>
+              <a:spcAft>
+                <a:spcPts val="1000"/>
+              </a:spcAft>
+            </a:pPr>
+            <a:r>
+              <a:rPr b="1" dirty="0">
+                <a:solidFill>
+                  <a:srgbClr val="000000"/>
+                </a:solidFill>
+                <a:latin typeface="Calibri"/>
+              </a:rPr>
+              <a:t>• Evidence: </a:t>
+            </a:r>
+            <a:r>
+              <a:rPr b="0" dirty="0">
+                <a:solidFill>
+                  <a:srgbClr val="000000"/>
+                </a:solidFill>
+                <a:latin typeface="Calibri"/>
+              </a:rPr>
+              <a:t>Controlling for pupil-teacher ratio, adult literacy, and early-childhood stunting shrinks the gap from 13.3pp to 4.8pp. Kalyana Karnataka runs 33.6 children per teacher against 20.4 elsewhere, and has less than half the internet connectivity (16.9% vs 39.2%).</a:t>
+            </a:r>
+          </a:p>
+          <a:p>
+            <a:pPr>
+              <a:lnSpc>
+                <a:spcPct val="100000"/>
+              </a:lnSpc>
+              <a:spcAft>
+                <a:spcPts val="1000"/>
+              </a:spcAft>
+            </a:pPr>
+            <a:r>
+              <a:rPr b="1" dirty="0">
+                <a:solidFill>
+                  <a:srgbClr val="000000"/>
+                </a:solidFill>
+                <a:latin typeface="Calibri"/>
+              </a:rPr>
+              <a:t>• Implications: </a:t>
+            </a:r>
+            <a:r>
+              <a:rPr b="0" dirty="0">
+                <a:solidFill>
+                  <a:srgbClr val="000000"/>
+                </a:solidFill>
+                <a:latin typeface="Calibri"/>
+              </a:rPr>
+              <a:t>Most of the gap is explained by measurable, changeable resourcing inputs, not an unexplained regional effect — making teacher-deployment rebalancing directly actionable, and the widening trend means the window to act is closing.</a:t>
+            </a:r>
+          </a:p>
+        </p:txBody>
+      </p:sp>
+      <p:sp>
+        <p:nvSpPr>
+          <p:cNvPr id="72" name="EvalFooter"/>
           <p:cNvSpPr txBox="1"/>
           <p:nvPr/>
         </p:nvSpPr>
@@ -7984,21 +7963,74 @@
           </a:p>
         </p:txBody>
       </p:sp>
+      <p:pic>
+        <p:nvPicPr>
+          <p:cNvPr id="73" name="Picture 72" descr="image7.png"/>
+          <p:cNvPicPr>
+            <a:picLocks noChangeAspect="1"/>
+          </p:cNvPicPr>
+          <p:nvPr/>
+        </p:nvPicPr>
+        <p:blipFill>
+          <a:blip r:embed="rId2"/>
+          <a:stretch>
+            <a:fillRect/>
+          </a:stretch>
+        </p:blipFill>
+        <p:spPr>
+          <a:xfrm>
+            <a:off x="6280416" y="2439573"/>
+            <a:ext cx="5419584" cy="1693454"/>
+          </a:xfrm>
+          <a:prstGeom prst="rect">
+            <a:avLst/>
+          </a:prstGeom>
+        </p:spPr>
+      </p:pic>
+      <p:sp>
+        <p:nvSpPr>
+          <p:cNvPr id="74" name="TextBox 73"/>
+          <p:cNvSpPr txBox="1"/>
+          <p:nvPr/>
+        </p:nvSpPr>
+        <p:spPr>
+          <a:xfrm>
+            <a:off x="6900000" y="4178746"/>
+            <a:ext cx="4800000" cy="300000"/>
+          </a:xfrm>
+          <a:prstGeom prst="rect">
+            <a:avLst/>
+          </a:prstGeom>
+          <a:noFill/>
+        </p:spPr>
+        <p:txBody>
+          <a:bodyPr wrap="square">
+            <a:spAutoFit/>
+          </a:bodyPr>
+          <a:lstStyle/>
+          <a:p>
+            <a:r>
+              <a:rPr sz="1000" i="1">
+                <a:solidFill>
+                  <a:srgbClr val="595959"/>
+                </a:solidFill>
+                <a:latin typeface="Calibri"/>
+              </a:rPr>
+              <a:t>Kalyana Karnataka vs rest: PTR &amp; connectivity</a:t>
+            </a:r>
+          </a:p>
+        </p:txBody>
+      </p:sp>
     </p:spTree>
   </p:cSld>
-  <mc:AlternateContent>
-    <mc:Choice Requires="p14">
-      <p:transition spd="slow" p14:dur="2000"/>
-    </mc:Choice>
-    <mc:Fallback>
-      <p:transition spd="slow"/>
-    </mc:Fallback>
-  </mc:AlternateContent>
+  <p:clrMapOvr>
+    <a:masterClrMapping/>
+  </p:clrMapOvr>
 </p:sld>
 </file>
 
-<file path=ppt/slides/slide8.xml><?xml version="1.0" encoding="utf-8"?>
-<p:sld xmlns:a="http://schemas.openxmlformats.org/drawingml/2006/main" xmlns:p="http://schemas.openxmlformats.org/presentationml/2006/main" xmlns:r="http://schemas.openxmlformats.org/officeDocument/2006/relationships" xmlns:p14="http://schemas.microsoft.com/office/powerpoint/2010/main" xmlns:p15="http://schemas.microsoft.com/office/powerpoint/2012/main" xmlns:mc="http://schemas.openxmlformats.org/markup-compatibility/2006">
+<file path=ppt/slides/slide7.xml><?xml version="1.0" encoding="utf-8"?>
+<p:sld xmlns:a="http://schemas.openxmlformats.org/drawingml/2006/main" xmlns:r="http://schemas.openxmlformats.org/officeDocument/2006/relationships" xmlns:p="http://schemas.openxmlformats.org/presentationml/2006/main">
   <p:cSld>
     <p:spTree>
       <p:nvGrpSpPr>
@@ -8016,7 +8048,7 @@
       </p:grpSpPr>
       <p:sp>
         <p:nvSpPr>
-          <p:cNvPr id="74" name="PlaceHolder 1"/>
+          <p:cNvPr id="72" name="PlaceHolder 1"/>
           <p:cNvSpPr>
             <a:spLocks noGrp="1"/>
           </p:cNvSpPr>
@@ -8026,7 +8058,7 @@
         </p:nvSpPr>
         <p:spPr>
           <a:xfrm>
-            <a:off x="1828800" y="226080"/>
+            <a:off x="1828800" y="251640"/>
             <a:ext cx="8229240" cy="1142640"/>
           </a:xfrm>
           <a:prstGeom prst="rect">
@@ -8038,9 +8070,10 @@
           </a:ln>
         </p:spPr>
         <p:txBody>
-          <a:bodyPr lIns="91440" rIns="91440" tIns="45720" bIns="45720" anchor="ctr">
-            <a:normAutofit fontScale="85000" lnSpcReduction="19999"/>
-          </a:bodyPr>
+          <a:bodyPr lIns="91440" tIns="45720" rIns="91440" bIns="45720" anchor="ctr">
+            <a:normAutofit fontScale="90000"/>
+          </a:bodyPr>
+          <a:lstStyle/>
           <a:p>
             <a:pPr indent="0" algn="ctr" defTabSz="457200">
               <a:lnSpc>
@@ -8057,7 +8090,7 @@
                 <a:uFillTx/>
                 <a:latin typeface="Calibri"/>
               </a:rPr>
-              <a:t>Visualization / Dashboard</a:t>
+              <a:t>Predictive / Diagnostic Analysis</a:t>
             </a:r>
             <a:br>
               <a:rPr sz="4400"/>
@@ -8075,14 +8108,14 @@
       </p:sp>
       <p:sp>
         <p:nvSpPr>
-          <p:cNvPr id="75" name="TextBox 2"/>
+          <p:cNvPr id="73" name="TextBox 4"/>
           <p:cNvSpPr/>
           <p:nvPr/>
         </p:nvSpPr>
         <p:spPr>
           <a:xfrm>
-            <a:off x="457200" y="274320"/>
-            <a:ext cx="184320" cy="522720"/>
+            <a:off x="731520" y="1097280"/>
+            <a:ext cx="5486040" cy="4571640"/>
           </a:xfrm>
           <a:prstGeom prst="rect">
             <a:avLst/>
@@ -8093,79 +8126,50 @@
           </a:ln>
         </p:spPr>
         <p:style>
-          <a:lnRef idx="0"/>
-          <a:fillRef idx="0"/>
-          <a:effectRef idx="0"/>
+          <a:lnRef idx="0">
+            <a:scrgbClr r="0" g="0" b="0"/>
+          </a:lnRef>
+          <a:fillRef idx="0">
+            <a:scrgbClr r="0" g="0" b="0"/>
+          </a:fillRef>
+          <a:effectRef idx="0">
+            <a:scrgbClr r="0" g="0" b="0"/>
+          </a:effectRef>
           <a:fontRef idx="minor"/>
         </p:style>
         <p:txBody>
-          <a:bodyPr wrap="none" lIns="90000" rIns="90000" tIns="45000" bIns="45000" anchor="t">
-            <a:spAutoFit/>
-          </a:bodyPr>
+          <a:bodyPr wrap="square" lIns="90000" tIns="45000" rIns="90000" bIns="45000" anchor="t">
+            <a:noAutofit/>
+          </a:bodyPr>
+          <a:lstStyle/>
           <a:p>
             <a:pPr defTabSz="457200">
               <a:lnSpc>
                 <a:spcPct val="100000"/>
               </a:lnSpc>
-            </a:pPr>
-            <a:endParaRPr lang="en-US" sz="2800" b="1" u="none" strike="noStrike">
-              <a:solidFill>
-                <a:schemeClr val="dk1"/>
-              </a:solidFill>
-              <a:effectLst/>
-              <a:uFillTx/>
-              <a:latin typeface="Calibri"/>
-            </a:endParaRPr>
-          </a:p>
-        </p:txBody>
-      </p:sp>
-      <p:sp>
-        <p:nvSpPr>
-          <p:cNvPr id="76" name="TextBox 4"/>
-          <p:cNvSpPr/>
-          <p:nvPr/>
-        </p:nvSpPr>
-        <p:spPr>
-          <a:xfrm>
-            <a:off x="731520" y="1097280"/>
-            <a:ext cx="5486040" cy="4571640"/>
-          </a:xfrm>
-          <a:prstGeom prst="rect">
-            <a:avLst/>
-          </a:prstGeom>
-          <a:noFill/>
-          <a:ln w="0">
-            <a:noFill/>
-          </a:ln>
-        </p:spPr>
-        <p:style>
-          <a:lnRef idx="0"/>
-          <a:fillRef idx="0"/>
-          <a:effectRef idx="0"/>
-          <a:fontRef idx="minor"/>
-        </p:style>
-        <p:txBody>
-          <a:bodyPr wrap="none" lIns="90000" rIns="90000" tIns="45000" bIns="45000" anchor="t">
-            <a:spAutoFit/>
-          </a:bodyPr>
-          <a:p>
-            <a:pPr defTabSz="457200">
-              <a:lnSpc>
-                <a:spcPct val="100000"/>
-              </a:lnSpc>
-            </a:pPr>
-            <a:r>
-              <a:rPr lang="en-US" sz="2000" b="0" u="none" strike="noStrike">
-                <a:solidFill>
-                  <a:schemeClr val="dk1"/>
-                </a:solidFill>
-                <a:effectLst/>
-                <a:uFillTx/>
-                <a:latin typeface="Calibri"/>
-              </a:rPr>
-              <a:t>• Dashboard screenshots</a:t>
-            </a:r>
-            <a:endParaRPr lang="en-IN" sz="2000" b="0" u="none" strike="noStrike">
+              <a:spcAft>
+                <a:spcPts val="1000"/>
+              </a:spcAft>
+            </a:pPr>
+            <a:r>
+              <a:rPr sz="1600" b="1" dirty="0">
+                <a:solidFill>
+                  <a:srgbClr val="000000"/>
+                </a:solidFill>
+                <a:latin typeface="Calibri"/>
+              </a:rPr>
+              <a:t>• Model: </a:t>
+            </a:r>
+            <a:r>
+              <a:rPr sz="1600" b="0" dirty="0">
+                <a:solidFill>
+                  <a:srgbClr val="000000"/>
+                </a:solidFill>
+                <a:latin typeface="Calibri"/>
+              </a:rPr>
+              <a:t>Univariate correlation, standardized multivariate regression, and Random Forest on the 11 competency scores; plus a GP-level early-warning model using only same-as-last-year persistence features, since GP-level external joins fail the reliability gate.</a:t>
+            </a:r>
+            <a:endParaRPr lang="en-IN" sz="2800" b="0" u="none" strike="noStrike" dirty="0">
               <a:solidFill>
                 <a:srgbClr val="000000"/>
               </a:solidFill>
@@ -8175,62 +8179,94 @@
             </a:endParaRPr>
           </a:p>
           <a:p>
-            <a:pPr defTabSz="457200">
-              <a:lnSpc>
-                <a:spcPct val="100000"/>
-              </a:lnSpc>
-            </a:pPr>
-            <a:r>
-              <a:rPr lang="en-US" sz="2000" b="0" u="none" strike="noStrike">
-                <a:solidFill>
-                  <a:schemeClr val="dk1"/>
-                </a:solidFill>
-                <a:effectLst/>
-                <a:uFillTx/>
-                <a:latin typeface="Calibri"/>
-              </a:rPr>
-              <a:t>• KPIs</a:t>
-            </a:r>
-            <a:endParaRPr lang="en-IN" sz="2000" b="0" u="none" strike="noStrike">
-              <a:solidFill>
-                <a:srgbClr val="000000"/>
-              </a:solidFill>
-              <a:effectLst/>
-              <a:uFillTx/>
-              <a:latin typeface="Arial"/>
-            </a:endParaRPr>
-          </a:p>
-          <a:p>
-            <a:pPr defTabSz="457200">
-              <a:lnSpc>
-                <a:spcPct val="100000"/>
-              </a:lnSpc>
-            </a:pPr>
-            <a:r>
-              <a:rPr lang="en-US" sz="2000" b="0" u="none" strike="noStrike">
-                <a:solidFill>
-                  <a:schemeClr val="dk1"/>
-                </a:solidFill>
-                <a:effectLst/>
-                <a:uFillTx/>
-                <a:latin typeface="Calibri"/>
-              </a:rPr>
-              <a:t>• Maps/Charts</a:t>
-            </a:r>
-            <a:endParaRPr lang="en-IN" sz="2000" b="0" u="none" strike="noStrike">
-              <a:solidFill>
-                <a:srgbClr val="000000"/>
-              </a:solidFill>
-              <a:effectLst/>
-              <a:uFillTx/>
-              <a:latin typeface="Arial"/>
-            </a:endParaRPr>
-          </a:p>
-        </p:txBody>
-      </p:sp>
-      <p:sp>
-        <p:nvSpPr>
-          <p:cNvPr id="77" name="EvalFooter"/>
+            <a:pPr>
+              <a:lnSpc>
+                <a:spcPct val="100000"/>
+              </a:lnSpc>
+              <a:spcAft>
+                <a:spcPts val="1000"/>
+              </a:spcAft>
+            </a:pPr>
+            <a:r>
+              <a:rPr sz="1600" b="1" dirty="0">
+                <a:solidFill>
+                  <a:srgbClr val="000000"/>
+                </a:solidFill>
+                <a:latin typeface="Calibri"/>
+              </a:rPr>
+              <a:t>• Metrics: </a:t>
+            </a:r>
+            <a:r>
+              <a:rPr sz="1600" b="0" dirty="0">
+                <a:solidFill>
+                  <a:srgbClr val="000000"/>
+                </a:solidFill>
+                <a:latin typeface="Calibri"/>
+              </a:rPr>
+              <a:t>Multivariate R² = 0.989; Random Forest R² = 0.953 (train, diagnostic only); early-warning GP model cv RMSE = 10.5pp, R² = 0.49 across 1,939 GPs — no engineered feature beat the simple persistence baseline.</a:t>
+            </a:r>
+          </a:p>
+          <a:p>
+            <a:pPr>
+              <a:lnSpc>
+                <a:spcPct val="100000"/>
+              </a:lnSpc>
+              <a:spcAft>
+                <a:spcPts val="1000"/>
+              </a:spcAft>
+            </a:pPr>
+            <a:r>
+              <a:rPr sz="1600" b="1" dirty="0">
+                <a:solidFill>
+                  <a:srgbClr val="000000"/>
+                </a:solidFill>
+                <a:latin typeface="Calibri"/>
+              </a:rPr>
+              <a:t>• Important predictors: </a:t>
+            </a:r>
+            <a:r>
+              <a:rPr sz="1600" b="0" dirty="0">
+                <a:solidFill>
+                  <a:srgbClr val="000000"/>
+                </a:solidFill>
+                <a:latin typeface="Calibri"/>
+              </a:rPr>
+              <a:t>Measurement and Division dominate every method that sees them cleanly (r = 0.78 / 0.76 univariate; Division alone carries 53.5% of Random Forest importance). Place Value, Fractions, and Data Handling rank lowest — an artefact of missing data, not low importance.</a:t>
+            </a:r>
+          </a:p>
+          <a:p>
+            <a:pPr>
+              <a:lnSpc>
+                <a:spcPct val="100000"/>
+              </a:lnSpc>
+              <a:spcAft>
+                <a:spcPts val="1000"/>
+              </a:spcAft>
+            </a:pPr>
+            <a:r>
+              <a:rPr sz="1600" b="1" dirty="0">
+                <a:solidFill>
+                  <a:srgbClr val="000000"/>
+                </a:solidFill>
+                <a:latin typeface="Calibri"/>
+              </a:rPr>
+              <a:t>• Early warning: </a:t>
+            </a:r>
+            <a:r>
+              <a:rPr sz="1600" b="0" dirty="0">
+                <a:solidFill>
+                  <a:srgbClr val="000000"/>
+                </a:solidFill>
+                <a:latin typeface="Calibri"/>
+              </a:rPr>
+              <a:t>A GP's own prior-year score is the single best predictor of its next-year score. Reported honestly as a baseline, not a breakthrough — no feature set beat it.</a:t>
+            </a:r>
+          </a:p>
+        </p:txBody>
+      </p:sp>
+      <p:sp>
+        <p:nvSpPr>
+          <p:cNvPr id="74" name="EvalFooter"/>
           <p:cNvSpPr txBox="1"/>
           <p:nvPr/>
         </p:nvSpPr>
@@ -8260,21 +8296,74 @@
           </a:p>
         </p:txBody>
       </p:sp>
+      <p:pic>
+        <p:nvPicPr>
+          <p:cNvPr id="75" name="Picture 74" descr="image6.png"/>
+          <p:cNvPicPr>
+            <a:picLocks noChangeAspect="1"/>
+          </p:cNvPicPr>
+          <p:nvPr/>
+        </p:nvPicPr>
+        <p:blipFill>
+          <a:blip r:embed="rId2"/>
+          <a:stretch>
+            <a:fillRect/>
+          </a:stretch>
+        </p:blipFill>
+        <p:spPr>
+          <a:xfrm>
+            <a:off x="6900000" y="1408971"/>
+            <a:ext cx="4800000" cy="3948258"/>
+          </a:xfrm>
+          <a:prstGeom prst="rect">
+            <a:avLst/>
+          </a:prstGeom>
+        </p:spPr>
+      </p:pic>
+      <p:sp>
+        <p:nvSpPr>
+          <p:cNvPr id="76" name="TextBox 75"/>
+          <p:cNvSpPr txBox="1"/>
+          <p:nvPr/>
+        </p:nvSpPr>
+        <p:spPr>
+          <a:xfrm>
+            <a:off x="6900000" y="5402949"/>
+            <a:ext cx="4800000" cy="300000"/>
+          </a:xfrm>
+          <a:prstGeom prst="rect">
+            <a:avLst/>
+          </a:prstGeom>
+          <a:noFill/>
+        </p:spPr>
+        <p:txBody>
+          <a:bodyPr wrap="square">
+            <a:spAutoFit/>
+          </a:bodyPr>
+          <a:lstStyle/>
+          <a:p>
+            <a:r>
+              <a:rPr sz="1000" i="1">
+                <a:solidFill>
+                  <a:srgbClr val="595959"/>
+                </a:solidFill>
+                <a:latin typeface="Calibri"/>
+              </a:rPr>
+              <a:t>Competency correlation with Total Score</a:t>
+            </a:r>
+          </a:p>
+        </p:txBody>
+      </p:sp>
     </p:spTree>
   </p:cSld>
-  <mc:AlternateContent>
-    <mc:Choice Requires="p14">
-      <p:transition spd="slow" p14:dur="2000"/>
-    </mc:Choice>
-    <mc:Fallback>
-      <p:transition spd="slow"/>
-    </mc:Fallback>
-  </mc:AlternateContent>
+  <p:clrMapOvr>
+    <a:masterClrMapping/>
+  </p:clrMapOvr>
 </p:sld>
 </file>
 
-<file path=ppt/slides/slide9.xml><?xml version="1.0" encoding="utf-8"?>
-<p:sld xmlns:a="http://schemas.openxmlformats.org/drawingml/2006/main" xmlns:p="http://schemas.openxmlformats.org/presentationml/2006/main" xmlns:r="http://schemas.openxmlformats.org/officeDocument/2006/relationships" xmlns:p14="http://schemas.microsoft.com/office/powerpoint/2010/main" xmlns:p15="http://schemas.microsoft.com/office/powerpoint/2012/main" xmlns:mc="http://schemas.openxmlformats.org/markup-compatibility/2006">
+<file path=ppt/slides/slide8.xml><?xml version="1.0" encoding="utf-8"?>
+<p:sld xmlns:a="http://schemas.openxmlformats.org/drawingml/2006/main" xmlns:r="http://schemas.openxmlformats.org/officeDocument/2006/relationships" xmlns:p="http://schemas.openxmlformats.org/presentationml/2006/main">
   <p:cSld>
     <p:spTree>
       <p:nvGrpSpPr>
@@ -8292,6 +8381,394 @@
       </p:grpSpPr>
       <p:sp>
         <p:nvSpPr>
+          <p:cNvPr id="74" name="PlaceHolder 1"/>
+          <p:cNvSpPr>
+            <a:spLocks noGrp="1"/>
+          </p:cNvSpPr>
+          <p:nvPr>
+            <p:ph type="title"/>
+          </p:nvPr>
+        </p:nvSpPr>
+        <p:spPr>
+          <a:xfrm>
+            <a:off x="1828800" y="226080"/>
+            <a:ext cx="8229240" cy="1142640"/>
+          </a:xfrm>
+          <a:prstGeom prst="rect">
+            <a:avLst/>
+          </a:prstGeom>
+          <a:noFill/>
+          <a:ln w="0">
+            <a:noFill/>
+          </a:ln>
+        </p:spPr>
+        <p:txBody>
+          <a:bodyPr lIns="91440" tIns="45720" rIns="91440" bIns="45720" anchor="ctr">
+            <a:normAutofit fontScale="90000"/>
+          </a:bodyPr>
+          <a:lstStyle/>
+          <a:p>
+            <a:pPr indent="0" algn="ctr" defTabSz="457200">
+              <a:lnSpc>
+                <a:spcPct val="100000"/>
+              </a:lnSpc>
+              <a:buNone/>
+            </a:pPr>
+            <a:r>
+              <a:rPr lang="en-US" sz="4400" b="0" u="none" strike="noStrike" dirty="0">
+                <a:solidFill>
+                  <a:schemeClr val="dk1"/>
+                </a:solidFill>
+                <a:effectLst/>
+                <a:uFillTx/>
+                <a:latin typeface="Calibri"/>
+              </a:rPr>
+              <a:t>Visualization / Dashboard</a:t>
+            </a:r>
+            <a:br>
+              <a:rPr sz="4400" dirty="0"/>
+            </a:br>
+            <a:endParaRPr lang="en-US" sz="4400" b="0" u="none" strike="noStrike" dirty="0">
+              <a:solidFill>
+                <a:schemeClr val="dk1"/>
+              </a:solidFill>
+              <a:effectLst/>
+              <a:uFillTx/>
+              <a:latin typeface="Calibri"/>
+            </a:endParaRPr>
+          </a:p>
+        </p:txBody>
+      </p:sp>
+      <p:sp>
+        <p:nvSpPr>
+          <p:cNvPr id="75" name="TextBox 2"/>
+          <p:cNvSpPr/>
+          <p:nvPr/>
+        </p:nvSpPr>
+        <p:spPr>
+          <a:xfrm>
+            <a:off x="457200" y="274320"/>
+            <a:ext cx="184320" cy="522720"/>
+          </a:xfrm>
+          <a:prstGeom prst="rect">
+            <a:avLst/>
+          </a:prstGeom>
+          <a:noFill/>
+          <a:ln w="0">
+            <a:noFill/>
+          </a:ln>
+        </p:spPr>
+        <p:style>
+          <a:lnRef idx="0">
+            <a:scrgbClr r="0" g="0" b="0"/>
+          </a:lnRef>
+          <a:fillRef idx="0">
+            <a:scrgbClr r="0" g="0" b="0"/>
+          </a:fillRef>
+          <a:effectRef idx="0">
+            <a:scrgbClr r="0" g="0" b="0"/>
+          </a:effectRef>
+          <a:fontRef idx="minor"/>
+        </p:style>
+        <p:txBody>
+          <a:bodyPr wrap="none" lIns="90000" tIns="45000" rIns="90000" bIns="45000" anchor="t">
+            <a:spAutoFit/>
+          </a:bodyPr>
+          <a:lstStyle/>
+          <a:p>
+            <a:pPr defTabSz="457200">
+              <a:lnSpc>
+                <a:spcPct val="100000"/>
+              </a:lnSpc>
+            </a:pPr>
+            <a:endParaRPr lang="en-US" sz="2800" b="1" u="none" strike="noStrike">
+              <a:solidFill>
+                <a:schemeClr val="dk1"/>
+              </a:solidFill>
+              <a:effectLst/>
+              <a:uFillTx/>
+              <a:latin typeface="Calibri"/>
+            </a:endParaRPr>
+          </a:p>
+        </p:txBody>
+      </p:sp>
+      <p:sp>
+        <p:nvSpPr>
+          <p:cNvPr id="76" name="TextBox 4"/>
+          <p:cNvSpPr/>
+          <p:nvPr/>
+        </p:nvSpPr>
+        <p:spPr>
+          <a:xfrm>
+            <a:off x="731520" y="1097280"/>
+            <a:ext cx="5486040" cy="4571640"/>
+          </a:xfrm>
+          <a:prstGeom prst="rect">
+            <a:avLst/>
+          </a:prstGeom>
+          <a:noFill/>
+          <a:ln w="0">
+            <a:noFill/>
+          </a:ln>
+        </p:spPr>
+        <p:style>
+          <a:lnRef idx="0">
+            <a:scrgbClr r="0" g="0" b="0"/>
+          </a:lnRef>
+          <a:fillRef idx="0">
+            <a:scrgbClr r="0" g="0" b="0"/>
+          </a:fillRef>
+          <a:effectRef idx="0">
+            <a:scrgbClr r="0" g="0" b="0"/>
+          </a:effectRef>
+          <a:fontRef idx="minor"/>
+        </p:style>
+        <p:txBody>
+          <a:bodyPr wrap="square" lIns="90000" tIns="45000" rIns="90000" bIns="45000" anchor="t">
+            <a:noAutofit/>
+          </a:bodyPr>
+          <a:lstStyle/>
+          <a:p>
+            <a:pPr defTabSz="457200">
+              <a:lnSpc>
+                <a:spcPct val="100000"/>
+              </a:lnSpc>
+              <a:spcAft>
+                <a:spcPts val="1000"/>
+              </a:spcAft>
+            </a:pPr>
+            <a:r>
+              <a:rPr b="1" dirty="0">
+                <a:solidFill>
+                  <a:srgbClr val="000000"/>
+                </a:solidFill>
+                <a:latin typeface="Calibri"/>
+              </a:rPr>
+              <a:t>• Dashboard screenshots: </a:t>
+            </a:r>
+            <a:r>
+              <a:rPr b="0" dirty="0">
+                <a:solidFill>
+                  <a:srgbClr val="000000"/>
+                </a:solidFill>
+                <a:latin typeface="Calibri"/>
+              </a:rPr>
+              <a:t>A static, reproducible chart suite (18 figures) built directly into the report — no separate interactive dashboard, so every number stays traceable to one script rather than a black-box front end.</a:t>
+            </a:r>
+            <a:endParaRPr lang="en-IN" sz="3200" b="0" u="none" strike="noStrike" dirty="0">
+              <a:solidFill>
+                <a:srgbClr val="000000"/>
+              </a:solidFill>
+              <a:effectLst/>
+              <a:uFillTx/>
+              <a:latin typeface="Arial"/>
+            </a:endParaRPr>
+          </a:p>
+          <a:p>
+            <a:pPr>
+              <a:lnSpc>
+                <a:spcPct val="100000"/>
+              </a:lnSpc>
+              <a:spcAft>
+                <a:spcPts val="1000"/>
+              </a:spcAft>
+            </a:pPr>
+            <a:r>
+              <a:rPr b="1" dirty="0">
+                <a:solidFill>
+                  <a:srgbClr val="000000"/>
+                </a:solidFill>
+                <a:latin typeface="Calibri"/>
+              </a:rPr>
+              <a:t>• KPIs: </a:t>
+            </a:r>
+            <a:r>
+              <a:rPr b="0" dirty="0">
+                <a:solidFill>
+                  <a:srgbClr val="000000"/>
+                </a:solidFill>
+                <a:latin typeface="Calibri"/>
+              </a:rPr>
+              <a:t>37.8% overall participation (25.1% → 49.9%); 78.1% of score variance sits within Gram Panchayats; 13.3pp Kalyana Karnataka gap; ρ = 0.56 (ASER) and ρ = 0.51 (PARAKH) external validation.</a:t>
+            </a:r>
+          </a:p>
+          <a:p>
+            <a:pPr>
+              <a:lnSpc>
+                <a:spcPct val="100000"/>
+              </a:lnSpc>
+              <a:spcAft>
+                <a:spcPts val="1000"/>
+              </a:spcAft>
+            </a:pPr>
+            <a:r>
+              <a:rPr b="1" dirty="0">
+                <a:solidFill>
+                  <a:srgbClr val="000000"/>
+                </a:solidFill>
+                <a:latin typeface="Calibri"/>
+              </a:rPr>
+              <a:t>• Maps/Charts: </a:t>
+            </a:r>
+            <a:r>
+              <a:rPr b="0" dirty="0">
+                <a:solidFill>
+                  <a:srgbClr val="000000"/>
+                </a:solidFill>
+                <a:latin typeface="Calibri"/>
+              </a:rPr>
+              <a:t>Variance-decomposition bar chart; year-over-year competency effect-size heatmap; district/block coverage tables; Kalyana Karnataka resourcing comparisons; competency correlation heatmap; bright-spot residual maps for over/under-performing blocks.</a:t>
+            </a:r>
+          </a:p>
+        </p:txBody>
+      </p:sp>
+      <p:sp>
+        <p:nvSpPr>
+          <p:cNvPr id="77" name="EvalFooter"/>
+          <p:cNvSpPr txBox="1"/>
+          <p:nvPr/>
+        </p:nvSpPr>
+        <p:spPr>
+          <a:xfrm>
+            <a:off x="457200" y="6217920"/>
+            <a:ext cx="8229600" cy="246221"/>
+          </a:xfrm>
+          <a:prstGeom prst="rect">
+            <a:avLst/>
+          </a:prstGeom>
+          <a:noFill/>
+        </p:spPr>
+        <p:txBody>
+          <a:bodyPr wrap="square">
+            <a:normAutofit/>
+          </a:bodyPr>
+          <a:lstStyle/>
+          <a:p>
+            <a:pPr>
+              <a:defRPr sz="1000"/>
+            </a:pPr>
+            <a:r>
+              <a:rPr lang="en-US" sz="1000" dirty="0"/>
+              <a:t>Evaluation: Depth of analysis | Policy relevance | Cross-dataset analysis | Innovation | Clarity of insights | Visualisation &amp; presentation</a:t>
+            </a:r>
+          </a:p>
+        </p:txBody>
+      </p:sp>
+      <p:pic>
+        <p:nvPicPr>
+          <p:cNvPr id="78" name="Picture 77" descr="image4.png"/>
+          <p:cNvPicPr>
+            <a:picLocks noChangeAspect="1"/>
+          </p:cNvPicPr>
+          <p:nvPr/>
+        </p:nvPicPr>
+        <p:blipFill>
+          <a:blip r:embed="rId2"/>
+          <a:stretch>
+            <a:fillRect/>
+          </a:stretch>
+        </p:blipFill>
+        <p:spPr>
+          <a:xfrm>
+            <a:off x="6808560" y="1146164"/>
+            <a:ext cx="4800000" cy="2372655"/>
+          </a:xfrm>
+          <a:prstGeom prst="rect">
+            <a:avLst/>
+          </a:prstGeom>
+        </p:spPr>
+      </p:pic>
+      <p:sp>
+        <p:nvSpPr>
+          <p:cNvPr id="79" name="TextBox 78"/>
+          <p:cNvSpPr txBox="1"/>
+          <p:nvPr/>
+        </p:nvSpPr>
+        <p:spPr>
+          <a:xfrm>
+            <a:off x="7834720" y="3643320"/>
+            <a:ext cx="4800000" cy="300000"/>
+          </a:xfrm>
+          <a:prstGeom prst="rect">
+            <a:avLst/>
+          </a:prstGeom>
+          <a:noFill/>
+        </p:spPr>
+        <p:txBody>
+          <a:bodyPr wrap="square">
+            <a:spAutoFit/>
+          </a:bodyPr>
+          <a:lstStyle/>
+          <a:p>
+            <a:r>
+              <a:rPr sz="1000" i="1" dirty="0">
+                <a:solidFill>
+                  <a:srgbClr val="595959"/>
+                </a:solidFill>
+                <a:latin typeface="Calibri"/>
+              </a:rPr>
+              <a:t>Where score variance actually lives</a:t>
+            </a:r>
+          </a:p>
+        </p:txBody>
+      </p:sp>
+      <p:pic>
+        <p:nvPicPr>
+          <p:cNvPr id="3" name="Picture 2">
+            <a:extLst>
+              <a:ext uri="{FF2B5EF4-FFF2-40B4-BE49-F238E27FC236}">
+                <a16:creationId xmlns:a16="http://schemas.microsoft.com/office/drawing/2014/main" id="{F4FEE786-ADAD-352D-1FDB-30444D615806}"/>
+              </a:ext>
+            </a:extLst>
+          </p:cNvPr>
+          <p:cNvPicPr>
+            <a:picLocks noChangeAspect="1"/>
+          </p:cNvPicPr>
+          <p:nvPr/>
+        </p:nvPicPr>
+        <p:blipFill>
+          <a:blip r:embed="rId3"/>
+          <a:stretch>
+            <a:fillRect/>
+          </a:stretch>
+        </p:blipFill>
+        <p:spPr>
+          <a:xfrm>
+            <a:off x="6607684" y="3943320"/>
+            <a:ext cx="5201752" cy="2241901"/>
+          </a:xfrm>
+          <a:prstGeom prst="rect">
+            <a:avLst/>
+          </a:prstGeom>
+        </p:spPr>
+      </p:pic>
+    </p:spTree>
+  </p:cSld>
+  <p:clrMapOvr>
+    <a:masterClrMapping/>
+  </p:clrMapOvr>
+</p:sld>
+</file>
+
+<file path=ppt/slides/slide9.xml><?xml version="1.0" encoding="utf-8"?>
+<p:sld xmlns:a="http://schemas.openxmlformats.org/drawingml/2006/main" xmlns:r="http://schemas.openxmlformats.org/officeDocument/2006/relationships" xmlns:p="http://schemas.openxmlformats.org/presentationml/2006/main">
+  <p:cSld>
+    <p:spTree>
+      <p:nvGrpSpPr>
+        <p:cNvPr id="1" name=""/>
+        <p:cNvGrpSpPr/>
+        <p:nvPr/>
+      </p:nvGrpSpPr>
+      <p:grpSpPr>
+        <a:xfrm>
+          <a:off x="0" y="0"/>
+          <a:ext cx="0" cy="0"/>
+          <a:chOff x="0" y="0"/>
+          <a:chExt cx="0" cy="0"/>
+        </a:xfrm>
+      </p:grpSpPr>
+      <p:sp>
+        <p:nvSpPr>
           <p:cNvPr id="77" name="PlaceHolder 1"/>
           <p:cNvSpPr>
             <a:spLocks noGrp="1"/>
@@ -8314,9 +8791,10 @@
           </a:ln>
         </p:spPr>
         <p:txBody>
-          <a:bodyPr lIns="91440" rIns="91440" tIns="45720" bIns="45720" anchor="ctr">
-            <a:normAutofit fontScale="85000" lnSpcReduction="19999"/>
-          </a:bodyPr>
+          <a:bodyPr lIns="91440" tIns="45720" rIns="91440" bIns="45720" anchor="ctr">
+            <a:normAutofit fontScale="90000"/>
+          </a:bodyPr>
+          <a:lstStyle/>
           <a:p>
             <a:pPr indent="0" algn="ctr" defTabSz="457200">
               <a:lnSpc>
@@ -8369,15 +8847,22 @@
           </a:ln>
         </p:spPr>
         <p:style>
-          <a:lnRef idx="0"/>
-          <a:fillRef idx="0"/>
-          <a:effectRef idx="0"/>
+          <a:lnRef idx="0">
+            <a:scrgbClr r="0" g="0" b="0"/>
+          </a:lnRef>
+          <a:fillRef idx="0">
+            <a:scrgbClr r="0" g="0" b="0"/>
+          </a:fillRef>
+          <a:effectRef idx="0">
+            <a:scrgbClr r="0" g="0" b="0"/>
+          </a:effectRef>
           <a:fontRef idx="minor"/>
         </p:style>
         <p:txBody>
-          <a:bodyPr wrap="none" lIns="90000" rIns="90000" tIns="45000" bIns="45000" anchor="t">
+          <a:bodyPr wrap="none" lIns="90000" tIns="45000" rIns="90000" bIns="45000" anchor="t">
             <a:spAutoFit/>
           </a:bodyPr>
+          <a:lstStyle/>
           <a:p>
             <a:pPr defTabSz="457200">
               <a:lnSpc>
@@ -8404,7 +8889,7 @@
         <p:spPr>
           <a:xfrm>
             <a:off x="731520" y="1097280"/>
-            <a:ext cx="5486040" cy="4571640"/>
+            <a:ext cx="10728960" cy="4571640"/>
           </a:xfrm>
           <a:prstGeom prst="rect">
             <a:avLst/>
@@ -8415,33 +8900,86 @@
           </a:ln>
         </p:spPr>
         <p:style>
-          <a:lnRef idx="0"/>
-          <a:fillRef idx="0"/>
-          <a:effectRef idx="0"/>
+          <a:lnRef idx="0">
+            <a:scrgbClr r="0" g="0" b="0"/>
+          </a:lnRef>
+          <a:fillRef idx="0">
+            <a:scrgbClr r="0" g="0" b="0"/>
+          </a:fillRef>
+          <a:effectRef idx="0">
+            <a:scrgbClr r="0" g="0" b="0"/>
+          </a:effectRef>
           <a:fontRef idx="minor"/>
         </p:style>
         <p:txBody>
-          <a:bodyPr wrap="none" lIns="90000" rIns="90000" tIns="45000" bIns="45000" anchor="t">
-            <a:spAutoFit/>
-          </a:bodyPr>
+          <a:bodyPr wrap="square" lIns="90000" tIns="45000" rIns="90000" bIns="45000" anchor="t">
+            <a:noAutofit/>
+          </a:bodyPr>
+          <a:lstStyle/>
           <a:p>
             <a:pPr defTabSz="457200">
               <a:lnSpc>
                 <a:spcPct val="100000"/>
               </a:lnSpc>
-            </a:pPr>
-            <a:r>
-              <a:rPr lang="en-US" sz="2000" b="0" u="none" strike="noStrike">
-                <a:solidFill>
-                  <a:schemeClr val="dk1"/>
-                </a:solidFill>
-                <a:effectLst/>
-                <a:uFillTx/>
-                <a:latin typeface="Calibri"/>
-              </a:rPr>
-              <a:t>• Priority actions</a:t>
-            </a:r>
-            <a:endParaRPr lang="en-IN" sz="2000" b="0" u="none" strike="noStrike">
+              <a:spcAft>
+                <a:spcPts val="1000"/>
+              </a:spcAft>
+            </a:pPr>
+            <a:r>
+              <a:rPr sz="1300" b="1" dirty="0">
+                <a:solidFill>
+                  <a:srgbClr val="000000"/>
+                </a:solidFill>
+                <a:latin typeface="Calibri"/>
+              </a:rPr>
+              <a:t>• </a:t>
+            </a:r>
+            <a:r>
+              <a:rPr sz="2000" b="1" dirty="0">
+                <a:solidFill>
+                  <a:srgbClr val="000000"/>
+                </a:solidFill>
+                <a:latin typeface="Calibri"/>
+              </a:rPr>
+              <a:t>Priority actions: </a:t>
+            </a:r>
+            <a:r>
+              <a:rPr sz="2000" b="0" dirty="0">
+                <a:solidFill>
+                  <a:srgbClr val="000000"/>
+                </a:solidFill>
+                <a:latin typeface="Calibri"/>
+              </a:rPr>
+              <a:t>(1) Rebalance teacher deployment to Grade 4-6 PTR in the 7 Kalyana Karnataka districts — Commissioner DSEL with KKRDB, by the 2027-28 transfer cycle. (2) Sequence multiplicative-ladder remediation for Grades 5-6</a:t>
+            </a:r>
+            <a:r>
+              <a:rPr lang="en-IN" sz="2000" b="0" dirty="0">
+                <a:solidFill>
+                  <a:srgbClr val="000000"/>
+                </a:solidFill>
+                <a:latin typeface="Calibri"/>
+              </a:rPr>
+              <a:t> (</a:t>
+            </a:r>
+            <a:r>
+              <a:rPr lang="en-US" sz="2000" b="0" dirty="0">
+                <a:solidFill>
+                  <a:srgbClr val="000000"/>
+                </a:solidFill>
+                <a:latin typeface="Calibri"/>
+              </a:rPr>
+              <a:t>3) Add 10th-percentile score and coverage to every review table, next quarterly review</a:t>
+            </a:r>
+            <a:r>
+              <a:rPr lang="en-IN" sz="2000" b="0" dirty="0">
+                <a:solidFill>
+                  <a:srgbClr val="000000"/>
+                </a:solidFill>
+                <a:latin typeface="Calibri"/>
+              </a:rPr>
+              <a:t>.</a:t>
+            </a:r>
+            <a:endParaRPr lang="en-IN" sz="3600" b="0" u="none" strike="noStrike" dirty="0">
               <a:solidFill>
                 <a:srgbClr val="000000"/>
               </a:solidFill>
@@ -8451,56 +8989,111 @@
             </a:endParaRPr>
           </a:p>
           <a:p>
-            <a:pPr defTabSz="457200">
-              <a:lnSpc>
-                <a:spcPct val="100000"/>
-              </a:lnSpc>
-            </a:pPr>
-            <a:r>
-              <a:rPr lang="en-US" sz="2000" b="0" u="none" strike="noStrike">
-                <a:solidFill>
-                  <a:schemeClr val="dk1"/>
-                </a:solidFill>
-                <a:effectLst/>
-                <a:uFillTx/>
-                <a:latin typeface="Calibri"/>
-              </a:rPr>
-              <a:t>• Impact</a:t>
-            </a:r>
-            <a:endParaRPr lang="en-IN" sz="2000" b="0" u="none" strike="noStrike">
+            <a:pPr>
+              <a:lnSpc>
+                <a:spcPct val="100000"/>
+              </a:lnSpc>
+              <a:spcAft>
+                <a:spcPts val="1000"/>
+              </a:spcAft>
+            </a:pPr>
+            <a:r>
+              <a:rPr sz="2000" b="1" dirty="0">
+                <a:solidFill>
+                  <a:srgbClr val="000000"/>
+                </a:solidFill>
+                <a:latin typeface="Calibri"/>
+              </a:rPr>
+              <a:t>• Impact: </a:t>
+            </a:r>
+            <a:r>
+              <a:rPr sz="2000" b="0" dirty="0">
+                <a:solidFill>
+                  <a:srgbClr val="000000"/>
+                </a:solidFill>
+                <a:latin typeface="Calibri"/>
+              </a:rPr>
+              <a:t>Action 1 targets PTR under 30 in the 7 districts by June 2028; Action 2 targets Grade 6 multiplication recovering from 35.1% to above 45% by the 2026-27 round</a:t>
+            </a:r>
+            <a:r>
+              <a:rPr lang="en-US" sz="2000" b="0" dirty="0">
+                <a:solidFill>
+                  <a:srgbClr val="000000"/>
+                </a:solidFill>
+                <a:latin typeface="Calibri"/>
+              </a:rPr>
+              <a:t>; Action 3 ensures no district ranking is ever published without its coverage and floor beside it.</a:t>
+            </a:r>
+            <a:endParaRPr sz="2000" b="0" dirty="0">
               <a:solidFill>
                 <a:srgbClr val="000000"/>
               </a:solidFill>
-              <a:effectLst/>
-              <a:uFillTx/>
-              <a:latin typeface="Arial"/>
+              <a:latin typeface="Calibri"/>
             </a:endParaRPr>
           </a:p>
           <a:p>
-            <a:pPr defTabSz="457200">
-              <a:lnSpc>
-                <a:spcPct val="100000"/>
-              </a:lnSpc>
-            </a:pPr>
-            <a:r>
-              <a:rPr lang="en-US" sz="2000" b="0" u="none" strike="noStrike">
-                <a:solidFill>
-                  <a:schemeClr val="dk1"/>
-                </a:solidFill>
-                <a:effectLst/>
-                <a:uFillTx/>
-                <a:latin typeface="Calibri"/>
-              </a:rPr>
-              <a:t>• Feasibility</a:t>
-            </a:r>
-            <a:endParaRPr lang="en-IN" sz="2000" b="0" u="none" strike="noStrike">
-              <a:solidFill>
-                <a:srgbClr val="000000"/>
-              </a:solidFill>
-              <a:effectLst/>
-              <a:uFillTx/>
-              <a:latin typeface="Arial"/>
-            </a:endParaRPr>
+            <a:pPr>
+              <a:lnSpc>
+                <a:spcPct val="100000"/>
+              </a:lnSpc>
+              <a:spcAft>
+                <a:spcPts val="1000"/>
+              </a:spcAft>
+            </a:pPr>
+            <a:r>
+              <a:rPr sz="2000" b="1" dirty="0">
+                <a:solidFill>
+                  <a:srgbClr val="000000"/>
+                </a:solidFill>
+                <a:latin typeface="Calibri"/>
+              </a:rPr>
+              <a:t>• Feasibility: </a:t>
+            </a:r>
+            <a:r>
+              <a:rPr sz="2000" b="0" dirty="0">
+                <a:solidFill>
+                  <a:srgbClr val="000000"/>
+                </a:solidFill>
+                <a:latin typeface="Calibri"/>
+              </a:rPr>
+              <a:t>All three build on existing infrastructure — the GPSTR teacher pipeline already placed 11,494 </a:t>
+            </a:r>
+            <a:r>
+              <a:rPr sz="2000" b="0" dirty="0" err="1">
+                <a:solidFill>
+                  <a:srgbClr val="000000"/>
+                </a:solidFill>
+                <a:latin typeface="Calibri"/>
+              </a:rPr>
+              <a:t>joinees</a:t>
+            </a:r>
+            <a:r>
+              <a:rPr sz="2000" b="0" dirty="0">
+                <a:solidFill>
+                  <a:srgbClr val="000000"/>
+                </a:solidFill>
+                <a:latin typeface="Calibri"/>
+              </a:rPr>
+              <a:t> in 2023-24, Kalika </a:t>
+            </a:r>
+            <a:r>
+              <a:rPr sz="2000" b="0" dirty="0" err="1">
+                <a:solidFill>
+                  <a:srgbClr val="000000"/>
+                </a:solidFill>
+                <a:latin typeface="Calibri"/>
+              </a:rPr>
+              <a:t>Balavardhane</a:t>
+            </a:r>
+            <a:r>
+              <a:rPr sz="2000" b="0" dirty="0">
+                <a:solidFill>
+                  <a:srgbClr val="000000"/>
+                </a:solidFill>
+                <a:latin typeface="Calibri"/>
+              </a:rPr>
+              <a:t> already exists as a delivery channel, and Action 3 costs nil since it only adds two columns to reports already produced.</a:t>
+            </a:r>
           </a:p>
         </p:txBody>
       </p:sp>
@@ -8538,53 +9131,48 @@
       </p:sp>
     </p:spTree>
   </p:cSld>
-  <mc:AlternateContent>
-    <mc:Choice Requires="p14">
-      <p:transition spd="slow" p14:dur="2000"/>
-    </mc:Choice>
-    <mc:Fallback>
-      <p:transition spd="slow"/>
-    </mc:Fallback>
-  </mc:AlternateContent>
+  <p:clrMapOvr>
+    <a:masterClrMapping/>
+  </p:clrMapOvr>
 </p:sld>
 </file>
 
 <file path=ppt/theme/theme1.xml><?xml version="1.0" encoding="utf-8"?>
-<a:theme xmlns:a="http://schemas.openxmlformats.org/drawingml/2006/main" xmlns:r="http://schemas.openxmlformats.org/officeDocument/2006/relationships" name="Office Theme">
+<a:theme xmlns:a="http://schemas.openxmlformats.org/drawingml/2006/main" name="Office Theme">
   <a:themeElements>
     <a:clrScheme name="Office">
       <a:dk1>
         <a:srgbClr val="000000"/>
       </a:dk1>
       <a:lt1>
-        <a:srgbClr val="ffffff"/>
+        <a:srgbClr val="FFFFFF"/>
       </a:lt1>
       <a:dk2>
-        <a:srgbClr val="1f497d"/>
+        <a:srgbClr val="1F497D"/>
       </a:dk2>
       <a:lt2>
-        <a:srgbClr val="eeece1"/>
+        <a:srgbClr val="EEECE1"/>
       </a:lt2>
       <a:accent1>
-        <a:srgbClr val="4f81bd"/>
+        <a:srgbClr val="4F81BD"/>
       </a:accent1>
       <a:accent2>
-        <a:srgbClr val="c0504d"/>
+        <a:srgbClr val="C0504D"/>
       </a:accent2>
       <a:accent3>
-        <a:srgbClr val="9bbb59"/>
+        <a:srgbClr val="9BBB59"/>
       </a:accent3>
       <a:accent4>
-        <a:srgbClr val="8064a2"/>
+        <a:srgbClr val="8064A2"/>
       </a:accent4>
       <a:accent5>
-        <a:srgbClr val="4bacc6"/>
+        <a:srgbClr val="4BACC6"/>
       </a:accent5>
       <a:accent6>
-        <a:srgbClr val="f79646"/>
+        <a:srgbClr val="F79646"/>
       </a:accent6>
       <a:hlink>
-        <a:srgbClr val="0000ff"/>
+        <a:srgbClr val="0000FF"/>
       </a:hlink>
       <a:folHlink>
         <a:srgbClr val="800080"/>
@@ -8592,12 +9180,12 @@
     </a:clrScheme>
     <a:fontScheme name="Office">
       <a:majorFont>
-        <a:latin typeface="Calibri" pitchFamily="0" charset="1"/>
+        <a:latin typeface="Calibri"/>
         <a:ea typeface=""/>
         <a:cs typeface=""/>
       </a:majorFont>
       <a:minorFont>
-        <a:latin typeface="Calibri" pitchFamily="0" charset="1"/>
+        <a:latin typeface="Calibri"/>
         <a:ea typeface=""/>
         <a:cs typeface=""/>
       </a:minorFont>
@@ -8626,7 +9214,7 @@
             </a:gs>
           </a:gsLst>
           <a:lin ang="16200000" scaled="1"/>
-          <a:tileRect l="0" t="0" r="0" b="0"/>
+          <a:tileRect/>
         </a:gradFill>
         <a:gradFill>
           <a:gsLst>
@@ -8644,7 +9232,7 @@
             </a:gs>
           </a:gsLst>
           <a:lin ang="16200000" scaled="0"/>
-          <a:tileRect l="0" t="0" r="0" b="0"/>
+          <a:tileRect/>
         </a:gradFill>
       </a:fillStyleLst>
       <a:lnStyleLst>
@@ -8695,7 +9283,7 @@
           <a:path path="circle">
             <a:fillToRect l="50000" t="-80000" r="50000" b="180000"/>
           </a:path>
-          <a:tileRect l="0" t="0" r="0" b="0"/>
+          <a:tileRect/>
         </a:gradFill>
         <a:gradFill>
           <a:gsLst>
@@ -8713,10 +9301,12 @@
           <a:path path="circle">
             <a:fillToRect l="50000" t="50000" r="50000" b="50000"/>
           </a:path>
-          <a:tileRect l="0" t="0" r="0" b="0"/>
+          <a:tileRect/>
         </a:gradFill>
       </a:bgFillStyleLst>
     </a:fmtScheme>
   </a:themeElements>
+  <a:objectDefaults/>
+  <a:extraClrSchemeLst/>
 </a:theme>
 </file>